--- a/assets/showcase/aurora-en/Aurora-Buds.pptx
+++ b/assets/showcase/aurora-en/Aurora-Buds.pptx
@@ -600,7 +600,7 @@
           <a:p>
             <a:r>
               <a:rPr lang="en-US" dirty="0"/>
-              <a:t/>
+              <a:t>* Available Nov 12, 2026</a:t>
             </a:r>
             <a:endParaRPr lang="en-US" dirty="0"/>
           </a:p>
@@ -2963,7 +2963,7 @@
           <a:ln/>
         </p:spPr>
         <p:txBody>
-          <a:bodyPr wrap="square" rtlCol="0" anchor="ctr"/>
+          <a:bodyPr wrap="square" rtlCol="0" anchor="t"/>
           <a:lstStyle/>
           <a:p>
             <a:pPr indent="0" marL="0">
@@ -3044,7 +3044,7 @@
           <a:ln/>
         </p:spPr>
         <p:txBody>
-          <a:bodyPr wrap="square" rtlCol="0" anchor="ctr"/>
+          <a:bodyPr wrap="square" rtlCol="0" anchor="t"/>
           <a:lstStyle/>
           <a:p>
             <a:pPr indent="0" marL="0">
@@ -3125,7 +3125,7 @@
           <a:ln/>
         </p:spPr>
         <p:txBody>
-          <a:bodyPr wrap="square" rtlCol="0" anchor="ctr"/>
+          <a:bodyPr wrap="square" rtlCol="0" anchor="t"/>
           <a:lstStyle/>
           <a:p>
             <a:pPr indent="0" marL="0">
@@ -3557,7 +3557,7 @@
           <a:ln/>
         </p:spPr>
         <p:txBody>
-          <a:bodyPr wrap="square" rtlCol="0" anchor="ctr"/>
+          <a:bodyPr wrap="square" rtlCol="0" anchor="t"/>
           <a:lstStyle/>
           <a:p>
             <a:pPr indent="0" marL="0">
@@ -3639,7 +3639,7 @@
           <a:ln/>
         </p:spPr>
         <p:txBody>
-          <a:bodyPr wrap="square" rtlCol="0" anchor="ctr"/>
+          <a:bodyPr wrap="square" rtlCol="0" anchor="t"/>
           <a:lstStyle/>
           <a:p>
             <a:pPr indent="0" marL="0">

--- a/assets/showcase/aurora-en/Aurora-Buds.pptx
+++ b/assets/showcase/aurora-en/Aurora-Buds.pptx
@@ -1940,6 +1940,298 @@
   <p:clrMapOvr>
     <a:masterClrMapping/>
   </p:clrMapOvr>
+  <p:transition xmlns:p14="http://schemas.microsoft.com/office/powerpoint/2010/main" spd="slow" p14:dur="700">
+    <p:fade/>
+  </p:transition>
+  <p:timing xmlns:p="http://schemas.openxmlformats.org/presentationml/2006/main">
+    <p:tnLst>
+      <p:par>
+        <p:cTn id="1" dur="indefinite" restart="never" nodeType="tmRoot">
+          <p:childTnLst>
+            <p:seq concurrent="1" nextAc="seek">
+              <p:cTn id="2" dur="indefinite" nodeType="mainSeq">
+                <p:childTnLst>
+                  <p:par>
+                    <p:cTn id="3" fill="hold">
+                      <p:stCondLst>
+                        <p:cond delay="indefinite"/>
+                        <p:cond evt="onBegin" delay="0">
+                          <p:tn val="2"/>
+                        </p:cond>
+                      </p:stCondLst>
+                      <p:childTnLst>
+                        <p:par>
+                          <p:cTn id="4" fill="hold">
+                            <p:stCondLst>
+                              <p:cond delay="0"/>
+                            </p:stCondLst>
+                            <p:childTnLst>
+                              <p:par>
+                                <p:cTn id="5" presetID="10" presetClass="entr" presetSubtype="0" fill="hold" grpId="0" nodeType="withEffect">
+                                  <p:stCondLst>
+                                    <p:cond delay="0"/>
+                                  </p:stCondLst>
+                                  <p:childTnLst>
+                                    <p:set>
+                                      <p:cBhvr>
+                                        <p:cTn id="6" dur="1" fill="hold">
+                                          <p:stCondLst>
+                                            <p:cond delay="0"/>
+                                          </p:stCondLst>
+                                        </p:cTn>
+                                        <p:tgtEl>
+                                          <p:spTgt spid="2"/>
+                                        </p:tgtEl>
+                                        <p:attrNameLst>
+                                          <p:attrName>style.visibility</p:attrName>
+                                        </p:attrNameLst>
+                                      </p:cBhvr>
+                                      <p:to>
+                                        <p:strVal val="visible"/>
+                                      </p:to>
+                                    </p:set>
+                                    <p:animEffect transition="in" filter="fade">
+                                      <p:cBhvr>
+                                        <p:cTn id="7" dur="450"/>
+                                        <p:tgtEl>
+                                          <p:spTgt spid="2"/>
+                                        </p:tgtEl>
+                                      </p:cBhvr>
+                                    </p:animEffect>
+                                    <p:anim calcmode="lin" valueType="num">
+                                      <p:cBhvr additive="base">
+                                        <p:cTn id="8" dur="450" fill="hold"/>
+                                        <p:tgtEl>
+                                          <p:spTgt spid="2"/>
+                                        </p:tgtEl>
+                                        <p:attrNameLst>
+                                          <p:attrName>ppt_y</p:attrName>
+                                        </p:attrNameLst>
+                                      </p:cBhvr>
+                                      <p:tavLst>
+                                        <p:tav tm="0">
+                                          <p:val>
+                                            <p:strVal val="#ppt_y+0.025"/>
+                                          </p:val>
+                                        </p:tav>
+                                        <p:tav tm="100000">
+                                          <p:val>
+                                            <p:strVal val="#ppt_y"/>
+                                          </p:val>
+                                        </p:tav>
+                                      </p:tavLst>
+                                    </p:anim>
+                                  </p:childTnLst>
+                                </p:cTn>
+                              </p:par>
+                              <p:par>
+                                <p:cTn id="9" presetID="10" presetClass="entr" presetSubtype="0" fill="hold" grpId="0" nodeType="withEffect">
+                                  <p:stCondLst>
+                                    <p:cond delay="160"/>
+                                  </p:stCondLst>
+                                  <p:childTnLst>
+                                    <p:set>
+                                      <p:cBhvr>
+                                        <p:cTn id="10" dur="1" fill="hold">
+                                          <p:stCondLst>
+                                            <p:cond delay="0"/>
+                                          </p:stCondLst>
+                                        </p:cTn>
+                                        <p:tgtEl>
+                                          <p:spTgt spid="3"/>
+                                        </p:tgtEl>
+                                        <p:attrNameLst>
+                                          <p:attrName>style.visibility</p:attrName>
+                                        </p:attrNameLst>
+                                      </p:cBhvr>
+                                      <p:to>
+                                        <p:strVal val="visible"/>
+                                      </p:to>
+                                    </p:set>
+                                    <p:animEffect transition="in" filter="fade">
+                                      <p:cBhvr>
+                                        <p:cTn id="11" dur="450"/>
+                                        <p:tgtEl>
+                                          <p:spTgt spid="3"/>
+                                        </p:tgtEl>
+                                      </p:cBhvr>
+                                    </p:animEffect>
+                                    <p:anim calcmode="lin" valueType="num">
+                                      <p:cBhvr additive="base">
+                                        <p:cTn id="12" dur="450" fill="hold"/>
+                                        <p:tgtEl>
+                                          <p:spTgt spid="3"/>
+                                        </p:tgtEl>
+                                        <p:attrNameLst>
+                                          <p:attrName>ppt_y</p:attrName>
+                                        </p:attrNameLst>
+                                      </p:cBhvr>
+                                      <p:tavLst>
+                                        <p:tav tm="0">
+                                          <p:val>
+                                            <p:strVal val="#ppt_y+0.025"/>
+                                          </p:val>
+                                        </p:tav>
+                                        <p:tav tm="100000">
+                                          <p:val>
+                                            <p:strVal val="#ppt_y"/>
+                                          </p:val>
+                                        </p:tav>
+                                      </p:tavLst>
+                                    </p:anim>
+                                  </p:childTnLst>
+                                </p:cTn>
+                              </p:par>
+                              <p:par>
+                                <p:cTn id="13" presetID="10" presetClass="entr" presetSubtype="0" fill="hold" grpId="0" nodeType="withEffect">
+                                  <p:stCondLst>
+                                    <p:cond delay="320"/>
+                                  </p:stCondLst>
+                                  <p:childTnLst>
+                                    <p:set>
+                                      <p:cBhvr>
+                                        <p:cTn id="14" dur="1" fill="hold">
+                                          <p:stCondLst>
+                                            <p:cond delay="0"/>
+                                          </p:stCondLst>
+                                        </p:cTn>
+                                        <p:tgtEl>
+                                          <p:spTgt spid="4"/>
+                                        </p:tgtEl>
+                                        <p:attrNameLst>
+                                          <p:attrName>style.visibility</p:attrName>
+                                        </p:attrNameLst>
+                                      </p:cBhvr>
+                                      <p:to>
+                                        <p:strVal val="visible"/>
+                                      </p:to>
+                                    </p:set>
+                                    <p:animEffect transition="in" filter="fade">
+                                      <p:cBhvr>
+                                        <p:cTn id="15" dur="450"/>
+                                        <p:tgtEl>
+                                          <p:spTgt spid="4"/>
+                                        </p:tgtEl>
+                                      </p:cBhvr>
+                                    </p:animEffect>
+                                    <p:anim calcmode="lin" valueType="num">
+                                      <p:cBhvr additive="base">
+                                        <p:cTn id="16" dur="450" fill="hold"/>
+                                        <p:tgtEl>
+                                          <p:spTgt spid="4"/>
+                                        </p:tgtEl>
+                                        <p:attrNameLst>
+                                          <p:attrName>ppt_y</p:attrName>
+                                        </p:attrNameLst>
+                                      </p:cBhvr>
+                                      <p:tavLst>
+                                        <p:tav tm="0">
+                                          <p:val>
+                                            <p:strVal val="#ppt_y+0.025"/>
+                                          </p:val>
+                                        </p:tav>
+                                        <p:tav tm="100000">
+                                          <p:val>
+                                            <p:strVal val="#ppt_y"/>
+                                          </p:val>
+                                        </p:tav>
+                                      </p:tavLst>
+                                    </p:anim>
+                                  </p:childTnLst>
+                                </p:cTn>
+                              </p:par>
+                              <p:par>
+                                <p:cTn id="17" presetID="10" presetClass="entr" presetSubtype="0" fill="hold" grpId="0" nodeType="withEffect">
+                                  <p:stCondLst>
+                                    <p:cond delay="480"/>
+                                  </p:stCondLst>
+                                  <p:childTnLst>
+                                    <p:set>
+                                      <p:cBhvr>
+                                        <p:cTn id="18" dur="1" fill="hold">
+                                          <p:stCondLst>
+                                            <p:cond delay="0"/>
+                                          </p:stCondLst>
+                                        </p:cTn>
+                                        <p:tgtEl>
+                                          <p:spTgt spid="5"/>
+                                        </p:tgtEl>
+                                        <p:attrNameLst>
+                                          <p:attrName>style.visibility</p:attrName>
+                                        </p:attrNameLst>
+                                      </p:cBhvr>
+                                      <p:to>
+                                        <p:strVal val="visible"/>
+                                      </p:to>
+                                    </p:set>
+                                    <p:animEffect transition="in" filter="fade">
+                                      <p:cBhvr>
+                                        <p:cTn id="19" dur="450"/>
+                                        <p:tgtEl>
+                                          <p:spTgt spid="5"/>
+                                        </p:tgtEl>
+                                      </p:cBhvr>
+                                    </p:animEffect>
+                                    <p:anim calcmode="lin" valueType="num">
+                                      <p:cBhvr additive="base">
+                                        <p:cTn id="20" dur="450" fill="hold"/>
+                                        <p:tgtEl>
+                                          <p:spTgt spid="5"/>
+                                        </p:tgtEl>
+                                        <p:attrNameLst>
+                                          <p:attrName>ppt_y</p:attrName>
+                                        </p:attrNameLst>
+                                      </p:cBhvr>
+                                      <p:tavLst>
+                                        <p:tav tm="0">
+                                          <p:val>
+                                            <p:strVal val="#ppt_y+0.025"/>
+                                          </p:val>
+                                        </p:tav>
+                                        <p:tav tm="100000">
+                                          <p:val>
+                                            <p:strVal val="#ppt_y"/>
+                                          </p:val>
+                                        </p:tav>
+                                      </p:tavLst>
+                                    </p:anim>
+                                  </p:childTnLst>
+                                </p:cTn>
+                              </p:par>
+                            </p:childTnLst>
+                          </p:cTn>
+                        </p:par>
+                      </p:childTnLst>
+                    </p:cTn>
+                  </p:par>
+                </p:childTnLst>
+              </p:cTn>
+              <p:prevCondLst>
+                <p:cond evt="onPrev" delay="0">
+                  <p:tgtEl>
+                    <p:sldTgt/>
+                  </p:tgtEl>
+                </p:cond>
+              </p:prevCondLst>
+              <p:nextCondLst>
+                <p:cond evt="onNext" delay="0">
+                  <p:tgtEl>
+                    <p:sldTgt/>
+                  </p:tgtEl>
+                </p:cond>
+              </p:nextCondLst>
+            </p:seq>
+          </p:childTnLst>
+        </p:cTn>
+      </p:par>
+    </p:tnLst>
+    <p:bldLst>
+      <p:bldP spid="2" grpId="0"/>
+      <p:bldP spid="3" grpId="0"/>
+      <p:bldP spid="4" grpId="0"/>
+      <p:bldP spid="5" grpId="0"/>
+    </p:bldLst>
+  </p:timing>
 </p:sld>
 </file>
 
@@ -2142,6 +2434,298 @@
   <p:clrMapOvr>
     <a:masterClrMapping/>
   </p:clrMapOvr>
+  <p:transition xmlns:p14="http://schemas.microsoft.com/office/powerpoint/2010/main" spd="slow" p14:dur="700">
+    <p:fade/>
+  </p:transition>
+  <p:timing xmlns:p="http://schemas.openxmlformats.org/presentationml/2006/main">
+    <p:tnLst>
+      <p:par>
+        <p:cTn id="1" dur="indefinite" restart="never" nodeType="tmRoot">
+          <p:childTnLst>
+            <p:seq concurrent="1" nextAc="seek">
+              <p:cTn id="2" dur="indefinite" nodeType="mainSeq">
+                <p:childTnLst>
+                  <p:par>
+                    <p:cTn id="3" fill="hold">
+                      <p:stCondLst>
+                        <p:cond delay="indefinite"/>
+                        <p:cond evt="onBegin" delay="0">
+                          <p:tn val="2"/>
+                        </p:cond>
+                      </p:stCondLst>
+                      <p:childTnLst>
+                        <p:par>
+                          <p:cTn id="4" fill="hold">
+                            <p:stCondLst>
+                              <p:cond delay="0"/>
+                            </p:stCondLst>
+                            <p:childTnLst>
+                              <p:par>
+                                <p:cTn id="5" presetID="10" presetClass="entr" presetSubtype="0" fill="hold" grpId="0" nodeType="withEffect">
+                                  <p:stCondLst>
+                                    <p:cond delay="0"/>
+                                  </p:stCondLst>
+                                  <p:childTnLst>
+                                    <p:set>
+                                      <p:cBhvr>
+                                        <p:cTn id="6" dur="1" fill="hold">
+                                          <p:stCondLst>
+                                            <p:cond delay="0"/>
+                                          </p:stCondLst>
+                                        </p:cTn>
+                                        <p:tgtEl>
+                                          <p:spTgt spid="2"/>
+                                        </p:tgtEl>
+                                        <p:attrNameLst>
+                                          <p:attrName>style.visibility</p:attrName>
+                                        </p:attrNameLst>
+                                      </p:cBhvr>
+                                      <p:to>
+                                        <p:strVal val="visible"/>
+                                      </p:to>
+                                    </p:set>
+                                    <p:animEffect transition="in" filter="fade">
+                                      <p:cBhvr>
+                                        <p:cTn id="7" dur="450"/>
+                                        <p:tgtEl>
+                                          <p:spTgt spid="2"/>
+                                        </p:tgtEl>
+                                      </p:cBhvr>
+                                    </p:animEffect>
+                                    <p:anim calcmode="lin" valueType="num">
+                                      <p:cBhvr additive="base">
+                                        <p:cTn id="8" dur="450" fill="hold"/>
+                                        <p:tgtEl>
+                                          <p:spTgt spid="2"/>
+                                        </p:tgtEl>
+                                        <p:attrNameLst>
+                                          <p:attrName>ppt_y</p:attrName>
+                                        </p:attrNameLst>
+                                      </p:cBhvr>
+                                      <p:tavLst>
+                                        <p:tav tm="0">
+                                          <p:val>
+                                            <p:strVal val="#ppt_y+0.025"/>
+                                          </p:val>
+                                        </p:tav>
+                                        <p:tav tm="100000">
+                                          <p:val>
+                                            <p:strVal val="#ppt_y"/>
+                                          </p:val>
+                                        </p:tav>
+                                      </p:tavLst>
+                                    </p:anim>
+                                  </p:childTnLst>
+                                </p:cTn>
+                              </p:par>
+                              <p:par>
+                                <p:cTn id="9" presetID="10" presetClass="entr" presetSubtype="0" fill="hold" grpId="0" nodeType="withEffect">
+                                  <p:stCondLst>
+                                    <p:cond delay="160"/>
+                                  </p:stCondLst>
+                                  <p:childTnLst>
+                                    <p:set>
+                                      <p:cBhvr>
+                                        <p:cTn id="10" dur="1" fill="hold">
+                                          <p:stCondLst>
+                                            <p:cond delay="0"/>
+                                          </p:stCondLst>
+                                        </p:cTn>
+                                        <p:tgtEl>
+                                          <p:spTgt spid="3"/>
+                                        </p:tgtEl>
+                                        <p:attrNameLst>
+                                          <p:attrName>style.visibility</p:attrName>
+                                        </p:attrNameLst>
+                                      </p:cBhvr>
+                                      <p:to>
+                                        <p:strVal val="visible"/>
+                                      </p:to>
+                                    </p:set>
+                                    <p:animEffect transition="in" filter="fade">
+                                      <p:cBhvr>
+                                        <p:cTn id="11" dur="450"/>
+                                        <p:tgtEl>
+                                          <p:spTgt spid="3"/>
+                                        </p:tgtEl>
+                                      </p:cBhvr>
+                                    </p:animEffect>
+                                    <p:anim calcmode="lin" valueType="num">
+                                      <p:cBhvr additive="base">
+                                        <p:cTn id="12" dur="450" fill="hold"/>
+                                        <p:tgtEl>
+                                          <p:spTgt spid="3"/>
+                                        </p:tgtEl>
+                                        <p:attrNameLst>
+                                          <p:attrName>ppt_y</p:attrName>
+                                        </p:attrNameLst>
+                                      </p:cBhvr>
+                                      <p:tavLst>
+                                        <p:tav tm="0">
+                                          <p:val>
+                                            <p:strVal val="#ppt_y+0.025"/>
+                                          </p:val>
+                                        </p:tav>
+                                        <p:tav tm="100000">
+                                          <p:val>
+                                            <p:strVal val="#ppt_y"/>
+                                          </p:val>
+                                        </p:tav>
+                                      </p:tavLst>
+                                    </p:anim>
+                                  </p:childTnLst>
+                                </p:cTn>
+                              </p:par>
+                              <p:par>
+                                <p:cTn id="13" presetID="10" presetClass="entr" presetSubtype="0" fill="hold" grpId="0" nodeType="withEffect">
+                                  <p:stCondLst>
+                                    <p:cond delay="320"/>
+                                  </p:stCondLst>
+                                  <p:childTnLst>
+                                    <p:set>
+                                      <p:cBhvr>
+                                        <p:cTn id="14" dur="1" fill="hold">
+                                          <p:stCondLst>
+                                            <p:cond delay="0"/>
+                                          </p:stCondLst>
+                                        </p:cTn>
+                                        <p:tgtEl>
+                                          <p:spTgt spid="4"/>
+                                        </p:tgtEl>
+                                        <p:attrNameLst>
+                                          <p:attrName>style.visibility</p:attrName>
+                                        </p:attrNameLst>
+                                      </p:cBhvr>
+                                      <p:to>
+                                        <p:strVal val="visible"/>
+                                      </p:to>
+                                    </p:set>
+                                    <p:animEffect transition="in" filter="fade">
+                                      <p:cBhvr>
+                                        <p:cTn id="15" dur="450"/>
+                                        <p:tgtEl>
+                                          <p:spTgt spid="4"/>
+                                        </p:tgtEl>
+                                      </p:cBhvr>
+                                    </p:animEffect>
+                                    <p:anim calcmode="lin" valueType="num">
+                                      <p:cBhvr additive="base">
+                                        <p:cTn id="16" dur="450" fill="hold"/>
+                                        <p:tgtEl>
+                                          <p:spTgt spid="4"/>
+                                        </p:tgtEl>
+                                        <p:attrNameLst>
+                                          <p:attrName>ppt_y</p:attrName>
+                                        </p:attrNameLst>
+                                      </p:cBhvr>
+                                      <p:tavLst>
+                                        <p:tav tm="0">
+                                          <p:val>
+                                            <p:strVal val="#ppt_y+0.025"/>
+                                          </p:val>
+                                        </p:tav>
+                                        <p:tav tm="100000">
+                                          <p:val>
+                                            <p:strVal val="#ppt_y"/>
+                                          </p:val>
+                                        </p:tav>
+                                      </p:tavLst>
+                                    </p:anim>
+                                  </p:childTnLst>
+                                </p:cTn>
+                              </p:par>
+                              <p:par>
+                                <p:cTn id="17" presetID="10" presetClass="entr" presetSubtype="0" fill="hold" grpId="0" nodeType="withEffect">
+                                  <p:stCondLst>
+                                    <p:cond delay="480"/>
+                                  </p:stCondLst>
+                                  <p:childTnLst>
+                                    <p:set>
+                                      <p:cBhvr>
+                                        <p:cTn id="18" dur="1" fill="hold">
+                                          <p:stCondLst>
+                                            <p:cond delay="0"/>
+                                          </p:stCondLst>
+                                        </p:cTn>
+                                        <p:tgtEl>
+                                          <p:spTgt spid="5"/>
+                                        </p:tgtEl>
+                                        <p:attrNameLst>
+                                          <p:attrName>style.visibility</p:attrName>
+                                        </p:attrNameLst>
+                                      </p:cBhvr>
+                                      <p:to>
+                                        <p:strVal val="visible"/>
+                                      </p:to>
+                                    </p:set>
+                                    <p:animEffect transition="in" filter="fade">
+                                      <p:cBhvr>
+                                        <p:cTn id="19" dur="450"/>
+                                        <p:tgtEl>
+                                          <p:spTgt spid="5"/>
+                                        </p:tgtEl>
+                                      </p:cBhvr>
+                                    </p:animEffect>
+                                    <p:anim calcmode="lin" valueType="num">
+                                      <p:cBhvr additive="base">
+                                        <p:cTn id="20" dur="450" fill="hold"/>
+                                        <p:tgtEl>
+                                          <p:spTgt spid="5"/>
+                                        </p:tgtEl>
+                                        <p:attrNameLst>
+                                          <p:attrName>ppt_y</p:attrName>
+                                        </p:attrNameLst>
+                                      </p:cBhvr>
+                                      <p:tavLst>
+                                        <p:tav tm="0">
+                                          <p:val>
+                                            <p:strVal val="#ppt_y+0.025"/>
+                                          </p:val>
+                                        </p:tav>
+                                        <p:tav tm="100000">
+                                          <p:val>
+                                            <p:strVal val="#ppt_y"/>
+                                          </p:val>
+                                        </p:tav>
+                                      </p:tavLst>
+                                    </p:anim>
+                                  </p:childTnLst>
+                                </p:cTn>
+                              </p:par>
+                            </p:childTnLst>
+                          </p:cTn>
+                        </p:par>
+                      </p:childTnLst>
+                    </p:cTn>
+                  </p:par>
+                </p:childTnLst>
+              </p:cTn>
+              <p:prevCondLst>
+                <p:cond evt="onPrev" delay="0">
+                  <p:tgtEl>
+                    <p:sldTgt/>
+                  </p:tgtEl>
+                </p:cond>
+              </p:prevCondLst>
+              <p:nextCondLst>
+                <p:cond evt="onNext" delay="0">
+                  <p:tgtEl>
+                    <p:sldTgt/>
+                  </p:tgtEl>
+                </p:cond>
+              </p:nextCondLst>
+            </p:seq>
+          </p:childTnLst>
+        </p:cTn>
+      </p:par>
+    </p:tnLst>
+    <p:bldLst>
+      <p:bldP spid="2" grpId="0"/>
+      <p:bldP spid="3" grpId="0"/>
+      <p:bldP spid="4" grpId="0"/>
+      <p:bldP spid="5" grpId="0"/>
+    </p:bldLst>
+  </p:timing>
 </p:sld>
 </file>
 
@@ -2305,6 +2889,239 @@
   <p:clrMapOvr>
     <a:masterClrMapping/>
   </p:clrMapOvr>
+  <p:transition xmlns:p14="http://schemas.microsoft.com/office/powerpoint/2010/main" spd="slow" p14:dur="700">
+    <p:fade/>
+  </p:transition>
+  <p:timing xmlns:p="http://schemas.openxmlformats.org/presentationml/2006/main">
+    <p:tnLst>
+      <p:par>
+        <p:cTn id="1" dur="indefinite" restart="never" nodeType="tmRoot">
+          <p:childTnLst>
+            <p:seq concurrent="1" nextAc="seek">
+              <p:cTn id="2" dur="indefinite" nodeType="mainSeq">
+                <p:childTnLst>
+                  <p:par>
+                    <p:cTn id="3" fill="hold">
+                      <p:stCondLst>
+                        <p:cond delay="indefinite"/>
+                        <p:cond evt="onBegin" delay="0">
+                          <p:tn val="2"/>
+                        </p:cond>
+                      </p:stCondLst>
+                      <p:childTnLst>
+                        <p:par>
+                          <p:cTn id="4" fill="hold">
+                            <p:stCondLst>
+                              <p:cond delay="0"/>
+                            </p:stCondLst>
+                            <p:childTnLst>
+                              <p:par>
+                                <p:cTn id="5" presetID="10" presetClass="entr" presetSubtype="0" fill="hold" grpId="0" nodeType="withEffect">
+                                  <p:stCondLst>
+                                    <p:cond delay="0"/>
+                                  </p:stCondLst>
+                                  <p:childTnLst>
+                                    <p:set>
+                                      <p:cBhvr>
+                                        <p:cTn id="6" dur="1" fill="hold">
+                                          <p:stCondLst>
+                                            <p:cond delay="0"/>
+                                          </p:stCondLst>
+                                        </p:cTn>
+                                        <p:tgtEl>
+                                          <p:spTgt spid="2"/>
+                                        </p:tgtEl>
+                                        <p:attrNameLst>
+                                          <p:attrName>style.visibility</p:attrName>
+                                        </p:attrNameLst>
+                                      </p:cBhvr>
+                                      <p:to>
+                                        <p:strVal val="visible"/>
+                                      </p:to>
+                                    </p:set>
+                                    <p:animEffect transition="in" filter="fade">
+                                      <p:cBhvr>
+                                        <p:cTn id="7" dur="450"/>
+                                        <p:tgtEl>
+                                          <p:spTgt spid="2"/>
+                                        </p:tgtEl>
+                                      </p:cBhvr>
+                                    </p:animEffect>
+                                    <p:anim calcmode="lin" valueType="num">
+                                      <p:cBhvr additive="base">
+                                        <p:cTn id="8" dur="450" fill="hold"/>
+                                        <p:tgtEl>
+                                          <p:spTgt spid="2"/>
+                                        </p:tgtEl>
+                                        <p:attrNameLst>
+                                          <p:attrName>ppt_y</p:attrName>
+                                        </p:attrNameLst>
+                                      </p:cBhvr>
+                                      <p:tavLst>
+                                        <p:tav tm="0">
+                                          <p:val>
+                                            <p:strVal val="#ppt_y+0.025"/>
+                                          </p:val>
+                                        </p:tav>
+                                        <p:tav tm="100000">
+                                          <p:val>
+                                            <p:strVal val="#ppt_y"/>
+                                          </p:val>
+                                        </p:tav>
+                                      </p:tavLst>
+                                    </p:anim>
+                                  </p:childTnLst>
+                                </p:cTn>
+                              </p:par>
+                              <p:par>
+                                <p:cTn id="9" presetID="10" presetClass="entr" presetSubtype="0" fill="hold" grpId="0" nodeType="withEffect">
+                                  <p:stCondLst>
+                                    <p:cond delay="160"/>
+                                  </p:stCondLst>
+                                  <p:childTnLst>
+                                    <p:set>
+                                      <p:cBhvr>
+                                        <p:cTn id="10" dur="1" fill="hold">
+                                          <p:stCondLst>
+                                            <p:cond delay="0"/>
+                                          </p:stCondLst>
+                                        </p:cTn>
+                                        <p:tgtEl>
+                                          <p:spTgt spid="3"/>
+                                        </p:tgtEl>
+                                        <p:attrNameLst>
+                                          <p:attrName>style.visibility</p:attrName>
+                                        </p:attrNameLst>
+                                      </p:cBhvr>
+                                      <p:to>
+                                        <p:strVal val="visible"/>
+                                      </p:to>
+                                    </p:set>
+                                    <p:animEffect transition="in" filter="fade">
+                                      <p:cBhvr>
+                                        <p:cTn id="11" dur="450"/>
+                                        <p:tgtEl>
+                                          <p:spTgt spid="3"/>
+                                        </p:tgtEl>
+                                      </p:cBhvr>
+                                    </p:animEffect>
+                                    <p:anim calcmode="lin" valueType="num">
+                                      <p:cBhvr additive="base">
+                                        <p:cTn id="12" dur="450" fill="hold"/>
+                                        <p:tgtEl>
+                                          <p:spTgt spid="3"/>
+                                        </p:tgtEl>
+                                        <p:attrNameLst>
+                                          <p:attrName>ppt_y</p:attrName>
+                                        </p:attrNameLst>
+                                      </p:cBhvr>
+                                      <p:tavLst>
+                                        <p:tav tm="0">
+                                          <p:val>
+                                            <p:strVal val="#ppt_y+0.025"/>
+                                          </p:val>
+                                        </p:tav>
+                                        <p:tav tm="100000">
+                                          <p:val>
+                                            <p:strVal val="#ppt_y"/>
+                                          </p:val>
+                                        </p:tav>
+                                      </p:tavLst>
+                                    </p:anim>
+                                  </p:childTnLst>
+                                </p:cTn>
+                              </p:par>
+                              <p:par>
+                                <p:cTn id="13" presetID="10" presetClass="entr" presetSubtype="0" fill="hold" grpId="0" nodeType="withEffect">
+                                  <p:stCondLst>
+                                    <p:cond delay="320"/>
+                                  </p:stCondLst>
+                                  <p:childTnLst>
+                                    <p:set>
+                                      <p:cBhvr>
+                                        <p:cTn id="14" dur="1" fill="hold">
+                                          <p:stCondLst>
+                                            <p:cond delay="0"/>
+                                          </p:stCondLst>
+                                        </p:cTn>
+                                        <p:tgtEl>
+                                          <p:spTgt spid="4"/>
+                                        </p:tgtEl>
+                                        <p:attrNameLst>
+                                          <p:attrName>style.visibility</p:attrName>
+                                        </p:attrNameLst>
+                                      </p:cBhvr>
+                                      <p:to>
+                                        <p:strVal val="visible"/>
+                                      </p:to>
+                                    </p:set>
+                                    <p:animEffect transition="in" filter="fade">
+                                      <p:cBhvr>
+                                        <p:cTn id="15" dur="450"/>
+                                        <p:tgtEl>
+                                          <p:spTgt spid="4"/>
+                                        </p:tgtEl>
+                                      </p:cBhvr>
+                                    </p:animEffect>
+                                    <p:anim calcmode="lin" valueType="num">
+                                      <p:cBhvr additive="base">
+                                        <p:cTn id="16" dur="450" fill="hold"/>
+                                        <p:tgtEl>
+                                          <p:spTgt spid="4"/>
+                                        </p:tgtEl>
+                                        <p:attrNameLst>
+                                          <p:attrName>ppt_y</p:attrName>
+                                        </p:attrNameLst>
+                                      </p:cBhvr>
+                                      <p:tavLst>
+                                        <p:tav tm="0">
+                                          <p:val>
+                                            <p:strVal val="#ppt_y+0.025"/>
+                                          </p:val>
+                                        </p:tav>
+                                        <p:tav tm="100000">
+                                          <p:val>
+                                            <p:strVal val="#ppt_y"/>
+                                          </p:val>
+                                        </p:tav>
+                                      </p:tavLst>
+                                    </p:anim>
+                                  </p:childTnLst>
+                                </p:cTn>
+                              </p:par>
+                            </p:childTnLst>
+                          </p:cTn>
+                        </p:par>
+                      </p:childTnLst>
+                    </p:cTn>
+                  </p:par>
+                </p:childTnLst>
+              </p:cTn>
+              <p:prevCondLst>
+                <p:cond evt="onPrev" delay="0">
+                  <p:tgtEl>
+                    <p:sldTgt/>
+                  </p:tgtEl>
+                </p:cond>
+              </p:prevCondLst>
+              <p:nextCondLst>
+                <p:cond evt="onNext" delay="0">
+                  <p:tgtEl>
+                    <p:sldTgt/>
+                  </p:tgtEl>
+                </p:cond>
+              </p:nextCondLst>
+            </p:seq>
+          </p:childTnLst>
+        </p:cTn>
+      </p:par>
+    </p:tnLst>
+    <p:bldLst>
+      <p:bldP spid="2" grpId="0"/>
+      <p:bldP spid="3" grpId="0"/>
+      <p:bldP spid="4" grpId="0"/>
+    </p:bldLst>
+  </p:timing>
 </p:sld>
 </file>
 
@@ -2379,6 +3196,121 @@
   <p:clrMapOvr>
     <a:masterClrMapping/>
   </p:clrMapOvr>
+  <p:transition xmlns:p14="http://schemas.microsoft.com/office/powerpoint/2010/main" spd="slow" p14:dur="700">
+    <p:fade/>
+  </p:transition>
+  <p:timing xmlns:p="http://schemas.openxmlformats.org/presentationml/2006/main">
+    <p:tnLst>
+      <p:par>
+        <p:cTn id="1" dur="indefinite" restart="never" nodeType="tmRoot">
+          <p:childTnLst>
+            <p:seq concurrent="1" nextAc="seek">
+              <p:cTn id="2" dur="indefinite" nodeType="mainSeq">
+                <p:childTnLst>
+                  <p:par>
+                    <p:cTn id="3" fill="hold">
+                      <p:stCondLst>
+                        <p:cond delay="indefinite"/>
+                        <p:cond evt="onBegin" delay="0">
+                          <p:tn val="2"/>
+                        </p:cond>
+                      </p:stCondLst>
+                      <p:childTnLst>
+                        <p:par>
+                          <p:cTn id="4" fill="hold">
+                            <p:stCondLst>
+                              <p:cond delay="0"/>
+                            </p:stCondLst>
+                            <p:childTnLst>
+                              <p:par>
+                                <p:cTn id="5" presetID="10" presetClass="entr" presetSubtype="0" fill="hold" grpId="0" nodeType="withEffect">
+                                  <p:stCondLst>
+                                    <p:cond delay="0"/>
+                                  </p:stCondLst>
+                                  <p:childTnLst>
+                                    <p:set>
+                                      <p:cBhvr>
+                                        <p:cTn id="6" dur="1" fill="hold">
+                                          <p:stCondLst>
+                                            <p:cond delay="0"/>
+                                          </p:stCondLst>
+                                        </p:cTn>
+                                        <p:tgtEl>
+                                          <p:spTgt spid="2"/>
+                                        </p:tgtEl>
+                                        <p:attrNameLst>
+                                          <p:attrName>style.visibility</p:attrName>
+                                        </p:attrNameLst>
+                                      </p:cBhvr>
+                                      <p:to>
+                                        <p:strVal val="visible"/>
+                                      </p:to>
+                                    </p:set>
+                                    <p:animEffect transition="in" filter="fade">
+                                      <p:cBhvr>
+                                        <p:cTn id="7" dur="450"/>
+                                        <p:tgtEl>
+                                          <p:spTgt spid="2"/>
+                                        </p:tgtEl>
+                                      </p:cBhvr>
+                                    </p:animEffect>
+                                    <p:anim calcmode="lin" valueType="num">
+                                      <p:cBhvr additive="base">
+                                        <p:cTn id="8" dur="450" fill="hold"/>
+                                        <p:tgtEl>
+                                          <p:spTgt spid="2"/>
+                                        </p:tgtEl>
+                                        <p:attrNameLst>
+                                          <p:attrName>ppt_y</p:attrName>
+                                        </p:attrNameLst>
+                                      </p:cBhvr>
+                                      <p:tavLst>
+                                        <p:tav tm="0">
+                                          <p:val>
+                                            <p:strVal val="#ppt_y+0.025"/>
+                                          </p:val>
+                                        </p:tav>
+                                        <p:tav tm="100000">
+                                          <p:val>
+                                            <p:strVal val="#ppt_y"/>
+                                          </p:val>
+                                        </p:tav>
+                                      </p:tavLst>
+                                    </p:anim>
+                                  </p:childTnLst>
+                                </p:cTn>
+                              </p:par>
+                            </p:childTnLst>
+                          </p:cTn>
+                        </p:par>
+                      </p:childTnLst>
+                    </p:cTn>
+                  </p:par>
+                </p:childTnLst>
+              </p:cTn>
+              <p:prevCondLst>
+                <p:cond evt="onPrev" delay="0">
+                  <p:tgtEl>
+                    <p:sldTgt/>
+                  </p:tgtEl>
+                </p:cond>
+              </p:prevCondLst>
+              <p:nextCondLst>
+                <p:cond evt="onNext" delay="0">
+                  <p:tgtEl>
+                    <p:sldTgt/>
+                  </p:tgtEl>
+                </p:cond>
+              </p:nextCondLst>
+            </p:seq>
+          </p:childTnLst>
+        </p:cTn>
+      </p:par>
+    </p:tnLst>
+    <p:bldLst>
+      <p:bldP spid="2" grpId="0"/>
+    </p:bldLst>
+  </p:timing>
 </p:sld>
 </file>
 
@@ -2528,6 +3460,239 @@
   <p:clrMapOvr>
     <a:masterClrMapping/>
   </p:clrMapOvr>
+  <p:transition xmlns:p14="http://schemas.microsoft.com/office/powerpoint/2010/main" spd="slow" p14:dur="700">
+    <p:fade/>
+  </p:transition>
+  <p:timing xmlns:p="http://schemas.openxmlformats.org/presentationml/2006/main">
+    <p:tnLst>
+      <p:par>
+        <p:cTn id="1" dur="indefinite" restart="never" nodeType="tmRoot">
+          <p:childTnLst>
+            <p:seq concurrent="1" nextAc="seek">
+              <p:cTn id="2" dur="indefinite" nodeType="mainSeq">
+                <p:childTnLst>
+                  <p:par>
+                    <p:cTn id="3" fill="hold">
+                      <p:stCondLst>
+                        <p:cond delay="indefinite"/>
+                        <p:cond evt="onBegin" delay="0">
+                          <p:tn val="2"/>
+                        </p:cond>
+                      </p:stCondLst>
+                      <p:childTnLst>
+                        <p:par>
+                          <p:cTn id="4" fill="hold">
+                            <p:stCondLst>
+                              <p:cond delay="0"/>
+                            </p:stCondLst>
+                            <p:childTnLst>
+                              <p:par>
+                                <p:cTn id="5" presetID="10" presetClass="entr" presetSubtype="0" fill="hold" grpId="0" nodeType="withEffect">
+                                  <p:stCondLst>
+                                    <p:cond delay="0"/>
+                                  </p:stCondLst>
+                                  <p:childTnLst>
+                                    <p:set>
+                                      <p:cBhvr>
+                                        <p:cTn id="6" dur="1" fill="hold">
+                                          <p:stCondLst>
+                                            <p:cond delay="0"/>
+                                          </p:stCondLst>
+                                        </p:cTn>
+                                        <p:tgtEl>
+                                          <p:spTgt spid="2"/>
+                                        </p:tgtEl>
+                                        <p:attrNameLst>
+                                          <p:attrName>style.visibility</p:attrName>
+                                        </p:attrNameLst>
+                                      </p:cBhvr>
+                                      <p:to>
+                                        <p:strVal val="visible"/>
+                                      </p:to>
+                                    </p:set>
+                                    <p:animEffect transition="in" filter="fade">
+                                      <p:cBhvr>
+                                        <p:cTn id="7" dur="450"/>
+                                        <p:tgtEl>
+                                          <p:spTgt spid="2"/>
+                                        </p:tgtEl>
+                                      </p:cBhvr>
+                                    </p:animEffect>
+                                    <p:anim calcmode="lin" valueType="num">
+                                      <p:cBhvr additive="base">
+                                        <p:cTn id="8" dur="450" fill="hold"/>
+                                        <p:tgtEl>
+                                          <p:spTgt spid="2"/>
+                                        </p:tgtEl>
+                                        <p:attrNameLst>
+                                          <p:attrName>ppt_y</p:attrName>
+                                        </p:attrNameLst>
+                                      </p:cBhvr>
+                                      <p:tavLst>
+                                        <p:tav tm="0">
+                                          <p:val>
+                                            <p:strVal val="#ppt_y+0.025"/>
+                                          </p:val>
+                                        </p:tav>
+                                        <p:tav tm="100000">
+                                          <p:val>
+                                            <p:strVal val="#ppt_y"/>
+                                          </p:val>
+                                        </p:tav>
+                                      </p:tavLst>
+                                    </p:anim>
+                                  </p:childTnLst>
+                                </p:cTn>
+                              </p:par>
+                              <p:par>
+                                <p:cTn id="9" presetID="10" presetClass="entr" presetSubtype="0" fill="hold" grpId="0" nodeType="withEffect">
+                                  <p:stCondLst>
+                                    <p:cond delay="160"/>
+                                  </p:stCondLst>
+                                  <p:childTnLst>
+                                    <p:set>
+                                      <p:cBhvr>
+                                        <p:cTn id="10" dur="1" fill="hold">
+                                          <p:stCondLst>
+                                            <p:cond delay="0"/>
+                                          </p:stCondLst>
+                                        </p:cTn>
+                                        <p:tgtEl>
+                                          <p:spTgt spid="3"/>
+                                        </p:tgtEl>
+                                        <p:attrNameLst>
+                                          <p:attrName>style.visibility</p:attrName>
+                                        </p:attrNameLst>
+                                      </p:cBhvr>
+                                      <p:to>
+                                        <p:strVal val="visible"/>
+                                      </p:to>
+                                    </p:set>
+                                    <p:animEffect transition="in" filter="fade">
+                                      <p:cBhvr>
+                                        <p:cTn id="11" dur="450"/>
+                                        <p:tgtEl>
+                                          <p:spTgt spid="3"/>
+                                        </p:tgtEl>
+                                      </p:cBhvr>
+                                    </p:animEffect>
+                                    <p:anim calcmode="lin" valueType="num">
+                                      <p:cBhvr additive="base">
+                                        <p:cTn id="12" dur="450" fill="hold"/>
+                                        <p:tgtEl>
+                                          <p:spTgt spid="3"/>
+                                        </p:tgtEl>
+                                        <p:attrNameLst>
+                                          <p:attrName>ppt_y</p:attrName>
+                                        </p:attrNameLst>
+                                      </p:cBhvr>
+                                      <p:tavLst>
+                                        <p:tav tm="0">
+                                          <p:val>
+                                            <p:strVal val="#ppt_y+0.025"/>
+                                          </p:val>
+                                        </p:tav>
+                                        <p:tav tm="100000">
+                                          <p:val>
+                                            <p:strVal val="#ppt_y"/>
+                                          </p:val>
+                                        </p:tav>
+                                      </p:tavLst>
+                                    </p:anim>
+                                  </p:childTnLst>
+                                </p:cTn>
+                              </p:par>
+                              <p:par>
+                                <p:cTn id="13" presetID="10" presetClass="entr" presetSubtype="0" fill="hold" grpId="0" nodeType="withEffect">
+                                  <p:stCondLst>
+                                    <p:cond delay="320"/>
+                                  </p:stCondLst>
+                                  <p:childTnLst>
+                                    <p:set>
+                                      <p:cBhvr>
+                                        <p:cTn id="14" dur="1" fill="hold">
+                                          <p:stCondLst>
+                                            <p:cond delay="0"/>
+                                          </p:stCondLst>
+                                        </p:cTn>
+                                        <p:tgtEl>
+                                          <p:spTgt spid="4"/>
+                                        </p:tgtEl>
+                                        <p:attrNameLst>
+                                          <p:attrName>style.visibility</p:attrName>
+                                        </p:attrNameLst>
+                                      </p:cBhvr>
+                                      <p:to>
+                                        <p:strVal val="visible"/>
+                                      </p:to>
+                                    </p:set>
+                                    <p:animEffect transition="in" filter="fade">
+                                      <p:cBhvr>
+                                        <p:cTn id="15" dur="450"/>
+                                        <p:tgtEl>
+                                          <p:spTgt spid="4"/>
+                                        </p:tgtEl>
+                                      </p:cBhvr>
+                                    </p:animEffect>
+                                    <p:anim calcmode="lin" valueType="num">
+                                      <p:cBhvr additive="base">
+                                        <p:cTn id="16" dur="450" fill="hold"/>
+                                        <p:tgtEl>
+                                          <p:spTgt spid="4"/>
+                                        </p:tgtEl>
+                                        <p:attrNameLst>
+                                          <p:attrName>ppt_y</p:attrName>
+                                        </p:attrNameLst>
+                                      </p:cBhvr>
+                                      <p:tavLst>
+                                        <p:tav tm="0">
+                                          <p:val>
+                                            <p:strVal val="#ppt_y+0.025"/>
+                                          </p:val>
+                                        </p:tav>
+                                        <p:tav tm="100000">
+                                          <p:val>
+                                            <p:strVal val="#ppt_y"/>
+                                          </p:val>
+                                        </p:tav>
+                                      </p:tavLst>
+                                    </p:anim>
+                                  </p:childTnLst>
+                                </p:cTn>
+                              </p:par>
+                            </p:childTnLst>
+                          </p:cTn>
+                        </p:par>
+                      </p:childTnLst>
+                    </p:cTn>
+                  </p:par>
+                </p:childTnLst>
+              </p:cTn>
+              <p:prevCondLst>
+                <p:cond evt="onPrev" delay="0">
+                  <p:tgtEl>
+                    <p:sldTgt/>
+                  </p:tgtEl>
+                </p:cond>
+              </p:prevCondLst>
+              <p:nextCondLst>
+                <p:cond evt="onNext" delay="0">
+                  <p:tgtEl>
+                    <p:sldTgt/>
+                  </p:tgtEl>
+                </p:cond>
+              </p:nextCondLst>
+            </p:seq>
+          </p:childTnLst>
+        </p:cTn>
+      </p:par>
+    </p:tnLst>
+    <p:bldLst>
+      <p:bldP spid="2" grpId="0"/>
+      <p:bldP spid="3" grpId="0"/>
+      <p:bldP spid="4" grpId="0"/>
+    </p:bldLst>
+  </p:timing>
 </p:sld>
 </file>
 
@@ -2638,6 +3803,180 @@
   <p:clrMapOvr>
     <a:masterClrMapping/>
   </p:clrMapOvr>
+  <p:transition xmlns:p14="http://schemas.microsoft.com/office/powerpoint/2010/main" spd="slow" p14:dur="700">
+    <p:fade/>
+  </p:transition>
+  <p:timing xmlns:p="http://schemas.openxmlformats.org/presentationml/2006/main">
+    <p:tnLst>
+      <p:par>
+        <p:cTn id="1" dur="indefinite" restart="never" nodeType="tmRoot">
+          <p:childTnLst>
+            <p:seq concurrent="1" nextAc="seek">
+              <p:cTn id="2" dur="indefinite" nodeType="mainSeq">
+                <p:childTnLst>
+                  <p:par>
+                    <p:cTn id="3" fill="hold">
+                      <p:stCondLst>
+                        <p:cond delay="indefinite"/>
+                        <p:cond evt="onBegin" delay="0">
+                          <p:tn val="2"/>
+                        </p:cond>
+                      </p:stCondLst>
+                      <p:childTnLst>
+                        <p:par>
+                          <p:cTn id="4" fill="hold">
+                            <p:stCondLst>
+                              <p:cond delay="0"/>
+                            </p:stCondLst>
+                            <p:childTnLst>
+                              <p:par>
+                                <p:cTn id="5" presetID="10" presetClass="entr" presetSubtype="0" fill="hold" grpId="0" nodeType="withEffect">
+                                  <p:stCondLst>
+                                    <p:cond delay="0"/>
+                                  </p:stCondLst>
+                                  <p:childTnLst>
+                                    <p:set>
+                                      <p:cBhvr>
+                                        <p:cTn id="6" dur="1" fill="hold">
+                                          <p:stCondLst>
+                                            <p:cond delay="0"/>
+                                          </p:stCondLst>
+                                        </p:cTn>
+                                        <p:tgtEl>
+                                          <p:spTgt spid="2"/>
+                                        </p:tgtEl>
+                                        <p:attrNameLst>
+                                          <p:attrName>style.visibility</p:attrName>
+                                        </p:attrNameLst>
+                                      </p:cBhvr>
+                                      <p:to>
+                                        <p:strVal val="visible"/>
+                                      </p:to>
+                                    </p:set>
+                                    <p:animEffect transition="in" filter="fade">
+                                      <p:cBhvr>
+                                        <p:cTn id="7" dur="450"/>
+                                        <p:tgtEl>
+                                          <p:spTgt spid="2"/>
+                                        </p:tgtEl>
+                                      </p:cBhvr>
+                                    </p:animEffect>
+                                    <p:anim calcmode="lin" valueType="num">
+                                      <p:cBhvr additive="base">
+                                        <p:cTn id="8" dur="450" fill="hold"/>
+                                        <p:tgtEl>
+                                          <p:spTgt spid="2"/>
+                                        </p:tgtEl>
+                                        <p:attrNameLst>
+                                          <p:attrName>ppt_y</p:attrName>
+                                        </p:attrNameLst>
+                                      </p:cBhvr>
+                                      <p:tavLst>
+                                        <p:tav tm="0">
+                                          <p:val>
+                                            <p:strVal val="#ppt_y+0.025"/>
+                                          </p:val>
+                                        </p:tav>
+                                        <p:tav tm="100000">
+                                          <p:val>
+                                            <p:strVal val="#ppt_y"/>
+                                          </p:val>
+                                        </p:tav>
+                                      </p:tavLst>
+                                    </p:anim>
+                                  </p:childTnLst>
+                                </p:cTn>
+                              </p:par>
+                              <p:par>
+                                <p:cTn id="9" presetID="10" presetClass="entr" presetSubtype="0" fill="hold" grpId="0" nodeType="withEffect">
+                                  <p:stCondLst>
+                                    <p:cond delay="160"/>
+                                  </p:stCondLst>
+                                  <p:childTnLst>
+                                    <p:set>
+                                      <p:cBhvr>
+                                        <p:cTn id="10" dur="1" fill="hold">
+                                          <p:stCondLst>
+                                            <p:cond delay="0"/>
+                                          </p:stCondLst>
+                                        </p:cTn>
+                                        <p:tgtEl>
+                                          <p:spTgt spid="3"/>
+                                        </p:tgtEl>
+                                        <p:attrNameLst>
+                                          <p:attrName>style.visibility</p:attrName>
+                                        </p:attrNameLst>
+                                      </p:cBhvr>
+                                      <p:to>
+                                        <p:strVal val="visible"/>
+                                      </p:to>
+                                    </p:set>
+                                    <p:animEffect transition="in" filter="fade">
+                                      <p:cBhvr>
+                                        <p:cTn id="11" dur="450"/>
+                                        <p:tgtEl>
+                                          <p:spTgt spid="3"/>
+                                        </p:tgtEl>
+                                      </p:cBhvr>
+                                    </p:animEffect>
+                                    <p:anim calcmode="lin" valueType="num">
+                                      <p:cBhvr additive="base">
+                                        <p:cTn id="12" dur="450" fill="hold"/>
+                                        <p:tgtEl>
+                                          <p:spTgt spid="3"/>
+                                        </p:tgtEl>
+                                        <p:attrNameLst>
+                                          <p:attrName>ppt_y</p:attrName>
+                                        </p:attrNameLst>
+                                      </p:cBhvr>
+                                      <p:tavLst>
+                                        <p:tav tm="0">
+                                          <p:val>
+                                            <p:strVal val="#ppt_y+0.025"/>
+                                          </p:val>
+                                        </p:tav>
+                                        <p:tav tm="100000">
+                                          <p:val>
+                                            <p:strVal val="#ppt_y"/>
+                                          </p:val>
+                                        </p:tav>
+                                      </p:tavLst>
+                                    </p:anim>
+                                  </p:childTnLst>
+                                </p:cTn>
+                              </p:par>
+                            </p:childTnLst>
+                          </p:cTn>
+                        </p:par>
+                      </p:childTnLst>
+                    </p:cTn>
+                  </p:par>
+                </p:childTnLst>
+              </p:cTn>
+              <p:prevCondLst>
+                <p:cond evt="onPrev" delay="0">
+                  <p:tgtEl>
+                    <p:sldTgt/>
+                  </p:tgtEl>
+                </p:cond>
+              </p:prevCondLst>
+              <p:nextCondLst>
+                <p:cond evt="onNext" delay="0">
+                  <p:tgtEl>
+                    <p:sldTgt/>
+                  </p:tgtEl>
+                </p:cond>
+              </p:nextCondLst>
+            </p:seq>
+          </p:childTnLst>
+        </p:cTn>
+      </p:par>
+    </p:tnLst>
+    <p:bldLst>
+      <p:bldP spid="2" grpId="0"/>
+      <p:bldP spid="3" grpId="0"/>
+    </p:bldLst>
+  </p:timing>
 </p:sld>
 </file>
 
@@ -2840,6 +4179,298 @@
   <p:clrMapOvr>
     <a:masterClrMapping/>
   </p:clrMapOvr>
+  <p:transition xmlns:p14="http://schemas.microsoft.com/office/powerpoint/2010/main" spd="slow" p14:dur="700">
+    <p:fade/>
+  </p:transition>
+  <p:timing xmlns:p="http://schemas.openxmlformats.org/presentationml/2006/main">
+    <p:tnLst>
+      <p:par>
+        <p:cTn id="1" dur="indefinite" restart="never" nodeType="tmRoot">
+          <p:childTnLst>
+            <p:seq concurrent="1" nextAc="seek">
+              <p:cTn id="2" dur="indefinite" nodeType="mainSeq">
+                <p:childTnLst>
+                  <p:par>
+                    <p:cTn id="3" fill="hold">
+                      <p:stCondLst>
+                        <p:cond delay="indefinite"/>
+                        <p:cond evt="onBegin" delay="0">
+                          <p:tn val="2"/>
+                        </p:cond>
+                      </p:stCondLst>
+                      <p:childTnLst>
+                        <p:par>
+                          <p:cTn id="4" fill="hold">
+                            <p:stCondLst>
+                              <p:cond delay="0"/>
+                            </p:stCondLst>
+                            <p:childTnLst>
+                              <p:par>
+                                <p:cTn id="5" presetID="10" presetClass="entr" presetSubtype="0" fill="hold" grpId="0" nodeType="withEffect">
+                                  <p:stCondLst>
+                                    <p:cond delay="0"/>
+                                  </p:stCondLst>
+                                  <p:childTnLst>
+                                    <p:set>
+                                      <p:cBhvr>
+                                        <p:cTn id="6" dur="1" fill="hold">
+                                          <p:stCondLst>
+                                            <p:cond delay="0"/>
+                                          </p:stCondLst>
+                                        </p:cTn>
+                                        <p:tgtEl>
+                                          <p:spTgt spid="2"/>
+                                        </p:tgtEl>
+                                        <p:attrNameLst>
+                                          <p:attrName>style.visibility</p:attrName>
+                                        </p:attrNameLst>
+                                      </p:cBhvr>
+                                      <p:to>
+                                        <p:strVal val="visible"/>
+                                      </p:to>
+                                    </p:set>
+                                    <p:animEffect transition="in" filter="fade">
+                                      <p:cBhvr>
+                                        <p:cTn id="7" dur="450"/>
+                                        <p:tgtEl>
+                                          <p:spTgt spid="2"/>
+                                        </p:tgtEl>
+                                      </p:cBhvr>
+                                    </p:animEffect>
+                                    <p:anim calcmode="lin" valueType="num">
+                                      <p:cBhvr additive="base">
+                                        <p:cTn id="8" dur="450" fill="hold"/>
+                                        <p:tgtEl>
+                                          <p:spTgt spid="2"/>
+                                        </p:tgtEl>
+                                        <p:attrNameLst>
+                                          <p:attrName>ppt_y</p:attrName>
+                                        </p:attrNameLst>
+                                      </p:cBhvr>
+                                      <p:tavLst>
+                                        <p:tav tm="0">
+                                          <p:val>
+                                            <p:strVal val="#ppt_y+0.025"/>
+                                          </p:val>
+                                        </p:tav>
+                                        <p:tav tm="100000">
+                                          <p:val>
+                                            <p:strVal val="#ppt_y"/>
+                                          </p:val>
+                                        </p:tav>
+                                      </p:tavLst>
+                                    </p:anim>
+                                  </p:childTnLst>
+                                </p:cTn>
+                              </p:par>
+                              <p:par>
+                                <p:cTn id="9" presetID="10" presetClass="entr" presetSubtype="0" fill="hold" grpId="0" nodeType="withEffect">
+                                  <p:stCondLst>
+                                    <p:cond delay="160"/>
+                                  </p:stCondLst>
+                                  <p:childTnLst>
+                                    <p:set>
+                                      <p:cBhvr>
+                                        <p:cTn id="10" dur="1" fill="hold">
+                                          <p:stCondLst>
+                                            <p:cond delay="0"/>
+                                          </p:stCondLst>
+                                        </p:cTn>
+                                        <p:tgtEl>
+                                          <p:spTgt spid="3"/>
+                                        </p:tgtEl>
+                                        <p:attrNameLst>
+                                          <p:attrName>style.visibility</p:attrName>
+                                        </p:attrNameLst>
+                                      </p:cBhvr>
+                                      <p:to>
+                                        <p:strVal val="visible"/>
+                                      </p:to>
+                                    </p:set>
+                                    <p:animEffect transition="in" filter="fade">
+                                      <p:cBhvr>
+                                        <p:cTn id="11" dur="450"/>
+                                        <p:tgtEl>
+                                          <p:spTgt spid="3"/>
+                                        </p:tgtEl>
+                                      </p:cBhvr>
+                                    </p:animEffect>
+                                    <p:anim calcmode="lin" valueType="num">
+                                      <p:cBhvr additive="base">
+                                        <p:cTn id="12" dur="450" fill="hold"/>
+                                        <p:tgtEl>
+                                          <p:spTgt spid="3"/>
+                                        </p:tgtEl>
+                                        <p:attrNameLst>
+                                          <p:attrName>ppt_y</p:attrName>
+                                        </p:attrNameLst>
+                                      </p:cBhvr>
+                                      <p:tavLst>
+                                        <p:tav tm="0">
+                                          <p:val>
+                                            <p:strVal val="#ppt_y+0.025"/>
+                                          </p:val>
+                                        </p:tav>
+                                        <p:tav tm="100000">
+                                          <p:val>
+                                            <p:strVal val="#ppt_y"/>
+                                          </p:val>
+                                        </p:tav>
+                                      </p:tavLst>
+                                    </p:anim>
+                                  </p:childTnLst>
+                                </p:cTn>
+                              </p:par>
+                              <p:par>
+                                <p:cTn id="13" presetID="10" presetClass="entr" presetSubtype="0" fill="hold" grpId="0" nodeType="withEffect">
+                                  <p:stCondLst>
+                                    <p:cond delay="320"/>
+                                  </p:stCondLst>
+                                  <p:childTnLst>
+                                    <p:set>
+                                      <p:cBhvr>
+                                        <p:cTn id="14" dur="1" fill="hold">
+                                          <p:stCondLst>
+                                            <p:cond delay="0"/>
+                                          </p:stCondLst>
+                                        </p:cTn>
+                                        <p:tgtEl>
+                                          <p:spTgt spid="4"/>
+                                        </p:tgtEl>
+                                        <p:attrNameLst>
+                                          <p:attrName>style.visibility</p:attrName>
+                                        </p:attrNameLst>
+                                      </p:cBhvr>
+                                      <p:to>
+                                        <p:strVal val="visible"/>
+                                      </p:to>
+                                    </p:set>
+                                    <p:animEffect transition="in" filter="fade">
+                                      <p:cBhvr>
+                                        <p:cTn id="15" dur="450"/>
+                                        <p:tgtEl>
+                                          <p:spTgt spid="4"/>
+                                        </p:tgtEl>
+                                      </p:cBhvr>
+                                    </p:animEffect>
+                                    <p:anim calcmode="lin" valueType="num">
+                                      <p:cBhvr additive="base">
+                                        <p:cTn id="16" dur="450" fill="hold"/>
+                                        <p:tgtEl>
+                                          <p:spTgt spid="4"/>
+                                        </p:tgtEl>
+                                        <p:attrNameLst>
+                                          <p:attrName>ppt_y</p:attrName>
+                                        </p:attrNameLst>
+                                      </p:cBhvr>
+                                      <p:tavLst>
+                                        <p:tav tm="0">
+                                          <p:val>
+                                            <p:strVal val="#ppt_y+0.025"/>
+                                          </p:val>
+                                        </p:tav>
+                                        <p:tav tm="100000">
+                                          <p:val>
+                                            <p:strVal val="#ppt_y"/>
+                                          </p:val>
+                                        </p:tav>
+                                      </p:tavLst>
+                                    </p:anim>
+                                  </p:childTnLst>
+                                </p:cTn>
+                              </p:par>
+                              <p:par>
+                                <p:cTn id="17" presetID="10" presetClass="entr" presetSubtype="0" fill="hold" grpId="0" nodeType="withEffect">
+                                  <p:stCondLst>
+                                    <p:cond delay="480"/>
+                                  </p:stCondLst>
+                                  <p:childTnLst>
+                                    <p:set>
+                                      <p:cBhvr>
+                                        <p:cTn id="18" dur="1" fill="hold">
+                                          <p:stCondLst>
+                                            <p:cond delay="0"/>
+                                          </p:stCondLst>
+                                        </p:cTn>
+                                        <p:tgtEl>
+                                          <p:spTgt spid="5"/>
+                                        </p:tgtEl>
+                                        <p:attrNameLst>
+                                          <p:attrName>style.visibility</p:attrName>
+                                        </p:attrNameLst>
+                                      </p:cBhvr>
+                                      <p:to>
+                                        <p:strVal val="visible"/>
+                                      </p:to>
+                                    </p:set>
+                                    <p:animEffect transition="in" filter="fade">
+                                      <p:cBhvr>
+                                        <p:cTn id="19" dur="450"/>
+                                        <p:tgtEl>
+                                          <p:spTgt spid="5"/>
+                                        </p:tgtEl>
+                                      </p:cBhvr>
+                                    </p:animEffect>
+                                    <p:anim calcmode="lin" valueType="num">
+                                      <p:cBhvr additive="base">
+                                        <p:cTn id="20" dur="450" fill="hold"/>
+                                        <p:tgtEl>
+                                          <p:spTgt spid="5"/>
+                                        </p:tgtEl>
+                                        <p:attrNameLst>
+                                          <p:attrName>ppt_y</p:attrName>
+                                        </p:attrNameLst>
+                                      </p:cBhvr>
+                                      <p:tavLst>
+                                        <p:tav tm="0">
+                                          <p:val>
+                                            <p:strVal val="#ppt_y+0.025"/>
+                                          </p:val>
+                                        </p:tav>
+                                        <p:tav tm="100000">
+                                          <p:val>
+                                            <p:strVal val="#ppt_y"/>
+                                          </p:val>
+                                        </p:tav>
+                                      </p:tavLst>
+                                    </p:anim>
+                                  </p:childTnLst>
+                                </p:cTn>
+                              </p:par>
+                            </p:childTnLst>
+                          </p:cTn>
+                        </p:par>
+                      </p:childTnLst>
+                    </p:cTn>
+                  </p:par>
+                </p:childTnLst>
+              </p:cTn>
+              <p:prevCondLst>
+                <p:cond evt="onPrev" delay="0">
+                  <p:tgtEl>
+                    <p:sldTgt/>
+                  </p:tgtEl>
+                </p:cond>
+              </p:prevCondLst>
+              <p:nextCondLst>
+                <p:cond evt="onNext" delay="0">
+                  <p:tgtEl>
+                    <p:sldTgt/>
+                  </p:tgtEl>
+                </p:cond>
+              </p:nextCondLst>
+            </p:seq>
+          </p:childTnLst>
+        </p:cTn>
+      </p:par>
+    </p:tnLst>
+    <p:bldLst>
+      <p:bldP spid="2" grpId="0"/>
+      <p:bldP spid="3" grpId="0"/>
+      <p:bldP spid="4" grpId="0"/>
+      <p:bldP spid="5" grpId="0"/>
+    </p:bldLst>
+  </p:timing>
 </p:sld>
 </file>
 
@@ -3154,6 +4785,475 @@
   <p:clrMapOvr>
     <a:masterClrMapping/>
   </p:clrMapOvr>
+  <p:transition xmlns:p14="http://schemas.microsoft.com/office/powerpoint/2010/main" spd="slow" p14:dur="700">
+    <p:fade/>
+  </p:transition>
+  <p:timing xmlns:p="http://schemas.openxmlformats.org/presentationml/2006/main">
+    <p:tnLst>
+      <p:par>
+        <p:cTn id="1" dur="indefinite" restart="never" nodeType="tmRoot">
+          <p:childTnLst>
+            <p:seq concurrent="1" nextAc="seek">
+              <p:cTn id="2" dur="indefinite" nodeType="mainSeq">
+                <p:childTnLst>
+                  <p:par>
+                    <p:cTn id="3" fill="hold">
+                      <p:stCondLst>
+                        <p:cond delay="indefinite"/>
+                        <p:cond evt="onBegin" delay="0">
+                          <p:tn val="2"/>
+                        </p:cond>
+                      </p:stCondLst>
+                      <p:childTnLst>
+                        <p:par>
+                          <p:cTn id="4" fill="hold">
+                            <p:stCondLst>
+                              <p:cond delay="0"/>
+                            </p:stCondLst>
+                            <p:childTnLst>
+                              <p:par>
+                                <p:cTn id="5" presetID="10" presetClass="entr" presetSubtype="0" fill="hold" grpId="0" nodeType="withEffect">
+                                  <p:stCondLst>
+                                    <p:cond delay="0"/>
+                                  </p:stCondLst>
+                                  <p:childTnLst>
+                                    <p:set>
+                                      <p:cBhvr>
+                                        <p:cTn id="6" dur="1" fill="hold">
+                                          <p:stCondLst>
+                                            <p:cond delay="0"/>
+                                          </p:stCondLst>
+                                        </p:cTn>
+                                        <p:tgtEl>
+                                          <p:spTgt spid="2"/>
+                                        </p:tgtEl>
+                                        <p:attrNameLst>
+                                          <p:attrName>style.visibility</p:attrName>
+                                        </p:attrNameLst>
+                                      </p:cBhvr>
+                                      <p:to>
+                                        <p:strVal val="visible"/>
+                                      </p:to>
+                                    </p:set>
+                                    <p:animEffect transition="in" filter="fade">
+                                      <p:cBhvr>
+                                        <p:cTn id="7" dur="450"/>
+                                        <p:tgtEl>
+                                          <p:spTgt spid="2"/>
+                                        </p:tgtEl>
+                                      </p:cBhvr>
+                                    </p:animEffect>
+                                    <p:anim calcmode="lin" valueType="num">
+                                      <p:cBhvr additive="base">
+                                        <p:cTn id="8" dur="450" fill="hold"/>
+                                        <p:tgtEl>
+                                          <p:spTgt spid="2"/>
+                                        </p:tgtEl>
+                                        <p:attrNameLst>
+                                          <p:attrName>ppt_y</p:attrName>
+                                        </p:attrNameLst>
+                                      </p:cBhvr>
+                                      <p:tavLst>
+                                        <p:tav tm="0">
+                                          <p:val>
+                                            <p:strVal val="#ppt_y+0.025"/>
+                                          </p:val>
+                                        </p:tav>
+                                        <p:tav tm="100000">
+                                          <p:val>
+                                            <p:strVal val="#ppt_y"/>
+                                          </p:val>
+                                        </p:tav>
+                                      </p:tavLst>
+                                    </p:anim>
+                                  </p:childTnLst>
+                                </p:cTn>
+                              </p:par>
+                              <p:par>
+                                <p:cTn id="9" presetID="10" presetClass="entr" presetSubtype="0" fill="hold" grpId="0" nodeType="withEffect">
+                                  <p:stCondLst>
+                                    <p:cond delay="160"/>
+                                  </p:stCondLst>
+                                  <p:childTnLst>
+                                    <p:set>
+                                      <p:cBhvr>
+                                        <p:cTn id="10" dur="1" fill="hold">
+                                          <p:stCondLst>
+                                            <p:cond delay="0"/>
+                                          </p:stCondLst>
+                                        </p:cTn>
+                                        <p:tgtEl>
+                                          <p:spTgt spid="3"/>
+                                        </p:tgtEl>
+                                        <p:attrNameLst>
+                                          <p:attrName>style.visibility</p:attrName>
+                                        </p:attrNameLst>
+                                      </p:cBhvr>
+                                      <p:to>
+                                        <p:strVal val="visible"/>
+                                      </p:to>
+                                    </p:set>
+                                    <p:animEffect transition="in" filter="fade">
+                                      <p:cBhvr>
+                                        <p:cTn id="11" dur="450"/>
+                                        <p:tgtEl>
+                                          <p:spTgt spid="3"/>
+                                        </p:tgtEl>
+                                      </p:cBhvr>
+                                    </p:animEffect>
+                                    <p:anim calcmode="lin" valueType="num">
+                                      <p:cBhvr additive="base">
+                                        <p:cTn id="12" dur="450" fill="hold"/>
+                                        <p:tgtEl>
+                                          <p:spTgt spid="3"/>
+                                        </p:tgtEl>
+                                        <p:attrNameLst>
+                                          <p:attrName>ppt_y</p:attrName>
+                                        </p:attrNameLst>
+                                      </p:cBhvr>
+                                      <p:tavLst>
+                                        <p:tav tm="0">
+                                          <p:val>
+                                            <p:strVal val="#ppt_y+0.025"/>
+                                          </p:val>
+                                        </p:tav>
+                                        <p:tav tm="100000">
+                                          <p:val>
+                                            <p:strVal val="#ppt_y"/>
+                                          </p:val>
+                                        </p:tav>
+                                      </p:tavLst>
+                                    </p:anim>
+                                  </p:childTnLst>
+                                </p:cTn>
+                              </p:par>
+                              <p:par>
+                                <p:cTn id="13" presetID="10" presetClass="entr" presetSubtype="0" fill="hold" grpId="0" nodeType="withEffect">
+                                  <p:stCondLst>
+                                    <p:cond delay="320"/>
+                                  </p:stCondLst>
+                                  <p:childTnLst>
+                                    <p:set>
+                                      <p:cBhvr>
+                                        <p:cTn id="14" dur="1" fill="hold">
+                                          <p:stCondLst>
+                                            <p:cond delay="0"/>
+                                          </p:stCondLst>
+                                        </p:cTn>
+                                        <p:tgtEl>
+                                          <p:spTgt spid="5"/>
+                                        </p:tgtEl>
+                                        <p:attrNameLst>
+                                          <p:attrName>style.visibility</p:attrName>
+                                        </p:attrNameLst>
+                                      </p:cBhvr>
+                                      <p:to>
+                                        <p:strVal val="visible"/>
+                                      </p:to>
+                                    </p:set>
+                                    <p:animEffect transition="in" filter="fade">
+                                      <p:cBhvr>
+                                        <p:cTn id="15" dur="450"/>
+                                        <p:tgtEl>
+                                          <p:spTgt spid="5"/>
+                                        </p:tgtEl>
+                                      </p:cBhvr>
+                                    </p:animEffect>
+                                    <p:anim calcmode="lin" valueType="num">
+                                      <p:cBhvr additive="base">
+                                        <p:cTn id="16" dur="450" fill="hold"/>
+                                        <p:tgtEl>
+                                          <p:spTgt spid="5"/>
+                                        </p:tgtEl>
+                                        <p:attrNameLst>
+                                          <p:attrName>ppt_y</p:attrName>
+                                        </p:attrNameLst>
+                                      </p:cBhvr>
+                                      <p:tavLst>
+                                        <p:tav tm="0">
+                                          <p:val>
+                                            <p:strVal val="#ppt_y+0.025"/>
+                                          </p:val>
+                                        </p:tav>
+                                        <p:tav tm="100000">
+                                          <p:val>
+                                            <p:strVal val="#ppt_y"/>
+                                          </p:val>
+                                        </p:tav>
+                                      </p:tavLst>
+                                    </p:anim>
+                                  </p:childTnLst>
+                                </p:cTn>
+                              </p:par>
+                              <p:par>
+                                <p:cTn id="17" presetID="10" presetClass="entr" presetSubtype="0" fill="hold" grpId="0" nodeType="withEffect">
+                                  <p:stCondLst>
+                                    <p:cond delay="480"/>
+                                  </p:stCondLst>
+                                  <p:childTnLst>
+                                    <p:set>
+                                      <p:cBhvr>
+                                        <p:cTn id="18" dur="1" fill="hold">
+                                          <p:stCondLst>
+                                            <p:cond delay="0"/>
+                                          </p:stCondLst>
+                                        </p:cTn>
+                                        <p:tgtEl>
+                                          <p:spTgt spid="7"/>
+                                        </p:tgtEl>
+                                        <p:attrNameLst>
+                                          <p:attrName>style.visibility</p:attrName>
+                                        </p:attrNameLst>
+                                      </p:cBhvr>
+                                      <p:to>
+                                        <p:strVal val="visible"/>
+                                      </p:to>
+                                    </p:set>
+                                    <p:animEffect transition="in" filter="fade">
+                                      <p:cBhvr>
+                                        <p:cTn id="19" dur="450"/>
+                                        <p:tgtEl>
+                                          <p:spTgt spid="7"/>
+                                        </p:tgtEl>
+                                      </p:cBhvr>
+                                    </p:animEffect>
+                                    <p:anim calcmode="lin" valueType="num">
+                                      <p:cBhvr additive="base">
+                                        <p:cTn id="20" dur="450" fill="hold"/>
+                                        <p:tgtEl>
+                                          <p:spTgt spid="7"/>
+                                        </p:tgtEl>
+                                        <p:attrNameLst>
+                                          <p:attrName>ppt_y</p:attrName>
+                                        </p:attrNameLst>
+                                      </p:cBhvr>
+                                      <p:tavLst>
+                                        <p:tav tm="0">
+                                          <p:val>
+                                            <p:strVal val="#ppt_y+0.025"/>
+                                          </p:val>
+                                        </p:tav>
+                                        <p:tav tm="100000">
+                                          <p:val>
+                                            <p:strVal val="#ppt_y"/>
+                                          </p:val>
+                                        </p:tav>
+                                      </p:tavLst>
+                                    </p:anim>
+                                  </p:childTnLst>
+                                </p:cTn>
+                              </p:par>
+                              <p:par>
+                                <p:cTn id="21" presetID="10" presetClass="entr" presetSubtype="0" fill="hold" grpId="0" nodeType="withEffect">
+                                  <p:stCondLst>
+                                    <p:cond delay="640"/>
+                                  </p:stCondLst>
+                                  <p:childTnLst>
+                                    <p:set>
+                                      <p:cBhvr>
+                                        <p:cTn id="22" dur="1" fill="hold">
+                                          <p:stCondLst>
+                                            <p:cond delay="0"/>
+                                          </p:stCondLst>
+                                        </p:cTn>
+                                        <p:tgtEl>
+                                          <p:spTgt spid="4"/>
+                                        </p:tgtEl>
+                                        <p:attrNameLst>
+                                          <p:attrName>style.visibility</p:attrName>
+                                        </p:attrNameLst>
+                                      </p:cBhvr>
+                                      <p:to>
+                                        <p:strVal val="visible"/>
+                                      </p:to>
+                                    </p:set>
+                                    <p:animEffect transition="in" filter="fade">
+                                      <p:cBhvr>
+                                        <p:cTn id="23" dur="450"/>
+                                        <p:tgtEl>
+                                          <p:spTgt spid="4"/>
+                                        </p:tgtEl>
+                                      </p:cBhvr>
+                                    </p:animEffect>
+                                    <p:anim calcmode="lin" valueType="num">
+                                      <p:cBhvr additive="base">
+                                        <p:cTn id="24" dur="450" fill="hold"/>
+                                        <p:tgtEl>
+                                          <p:spTgt spid="4"/>
+                                        </p:tgtEl>
+                                        <p:attrNameLst>
+                                          <p:attrName>ppt_y</p:attrName>
+                                        </p:attrNameLst>
+                                      </p:cBhvr>
+                                      <p:tavLst>
+                                        <p:tav tm="0">
+                                          <p:val>
+                                            <p:strVal val="#ppt_y+0.025"/>
+                                          </p:val>
+                                        </p:tav>
+                                        <p:tav tm="100000">
+                                          <p:val>
+                                            <p:strVal val="#ppt_y"/>
+                                          </p:val>
+                                        </p:tav>
+                                      </p:tavLst>
+                                    </p:anim>
+                                  </p:childTnLst>
+                                </p:cTn>
+                              </p:par>
+                              <p:par>
+                                <p:cTn id="25" presetID="10" presetClass="entr" presetSubtype="0" fill="hold" grpId="0" nodeType="withEffect">
+                                  <p:stCondLst>
+                                    <p:cond delay="800"/>
+                                  </p:stCondLst>
+                                  <p:childTnLst>
+                                    <p:set>
+                                      <p:cBhvr>
+                                        <p:cTn id="26" dur="1" fill="hold">
+                                          <p:stCondLst>
+                                            <p:cond delay="0"/>
+                                          </p:stCondLst>
+                                        </p:cTn>
+                                        <p:tgtEl>
+                                          <p:spTgt spid="6"/>
+                                        </p:tgtEl>
+                                        <p:attrNameLst>
+                                          <p:attrName>style.visibility</p:attrName>
+                                        </p:attrNameLst>
+                                      </p:cBhvr>
+                                      <p:to>
+                                        <p:strVal val="visible"/>
+                                      </p:to>
+                                    </p:set>
+                                    <p:animEffect transition="in" filter="fade">
+                                      <p:cBhvr>
+                                        <p:cTn id="27" dur="450"/>
+                                        <p:tgtEl>
+                                          <p:spTgt spid="6"/>
+                                        </p:tgtEl>
+                                      </p:cBhvr>
+                                    </p:animEffect>
+                                    <p:anim calcmode="lin" valueType="num">
+                                      <p:cBhvr additive="base">
+                                        <p:cTn id="28" dur="450" fill="hold"/>
+                                        <p:tgtEl>
+                                          <p:spTgt spid="6"/>
+                                        </p:tgtEl>
+                                        <p:attrNameLst>
+                                          <p:attrName>ppt_y</p:attrName>
+                                        </p:attrNameLst>
+                                      </p:cBhvr>
+                                      <p:tavLst>
+                                        <p:tav tm="0">
+                                          <p:val>
+                                            <p:strVal val="#ppt_y+0.025"/>
+                                          </p:val>
+                                        </p:tav>
+                                        <p:tav tm="100000">
+                                          <p:val>
+                                            <p:strVal val="#ppt_y"/>
+                                          </p:val>
+                                        </p:tav>
+                                      </p:tavLst>
+                                    </p:anim>
+                                  </p:childTnLst>
+                                </p:cTn>
+                              </p:par>
+                              <p:par>
+                                <p:cTn id="29" presetID="10" presetClass="entr" presetSubtype="0" fill="hold" grpId="0" nodeType="withEffect">
+                                  <p:stCondLst>
+                                    <p:cond delay="960"/>
+                                  </p:stCondLst>
+                                  <p:childTnLst>
+                                    <p:set>
+                                      <p:cBhvr>
+                                        <p:cTn id="30" dur="1" fill="hold">
+                                          <p:stCondLst>
+                                            <p:cond delay="0"/>
+                                          </p:stCondLst>
+                                        </p:cTn>
+                                        <p:tgtEl>
+                                          <p:spTgt spid="8"/>
+                                        </p:tgtEl>
+                                        <p:attrNameLst>
+                                          <p:attrName>style.visibility</p:attrName>
+                                        </p:attrNameLst>
+                                      </p:cBhvr>
+                                      <p:to>
+                                        <p:strVal val="visible"/>
+                                      </p:to>
+                                    </p:set>
+                                    <p:animEffect transition="in" filter="fade">
+                                      <p:cBhvr>
+                                        <p:cTn id="31" dur="450"/>
+                                        <p:tgtEl>
+                                          <p:spTgt spid="8"/>
+                                        </p:tgtEl>
+                                      </p:cBhvr>
+                                    </p:animEffect>
+                                    <p:anim calcmode="lin" valueType="num">
+                                      <p:cBhvr additive="base">
+                                        <p:cTn id="32" dur="450" fill="hold"/>
+                                        <p:tgtEl>
+                                          <p:spTgt spid="8"/>
+                                        </p:tgtEl>
+                                        <p:attrNameLst>
+                                          <p:attrName>ppt_y</p:attrName>
+                                        </p:attrNameLst>
+                                      </p:cBhvr>
+                                      <p:tavLst>
+                                        <p:tav tm="0">
+                                          <p:val>
+                                            <p:strVal val="#ppt_y+0.025"/>
+                                          </p:val>
+                                        </p:tav>
+                                        <p:tav tm="100000">
+                                          <p:val>
+                                            <p:strVal val="#ppt_y"/>
+                                          </p:val>
+                                        </p:tav>
+                                      </p:tavLst>
+                                    </p:anim>
+                                  </p:childTnLst>
+                                </p:cTn>
+                              </p:par>
+                            </p:childTnLst>
+                          </p:cTn>
+                        </p:par>
+                      </p:childTnLst>
+                    </p:cTn>
+                  </p:par>
+                </p:childTnLst>
+              </p:cTn>
+              <p:prevCondLst>
+                <p:cond evt="onPrev" delay="0">
+                  <p:tgtEl>
+                    <p:sldTgt/>
+                  </p:tgtEl>
+                </p:cond>
+              </p:prevCondLst>
+              <p:nextCondLst>
+                <p:cond evt="onNext" delay="0">
+                  <p:tgtEl>
+                    <p:sldTgt/>
+                  </p:tgtEl>
+                </p:cond>
+              </p:nextCondLst>
+            </p:seq>
+          </p:childTnLst>
+        </p:cTn>
+      </p:par>
+    </p:tnLst>
+    <p:bldLst>
+      <p:bldP spid="2" grpId="0"/>
+      <p:bldP spid="3" grpId="0"/>
+      <p:bldP spid="5" grpId="0"/>
+      <p:bldP spid="7" grpId="0"/>
+      <p:bldP spid="4" grpId="0"/>
+      <p:bldP spid="6" grpId="0"/>
+      <p:bldP spid="8" grpId="0"/>
+    </p:bldLst>
+  </p:timing>
 </p:sld>
 </file>
 
@@ -3356,6 +5456,298 @@
   <p:clrMapOvr>
     <a:masterClrMapping/>
   </p:clrMapOvr>
+  <p:transition xmlns:p14="http://schemas.microsoft.com/office/powerpoint/2010/main" spd="slow" p14:dur="700">
+    <p:fade/>
+  </p:transition>
+  <p:timing xmlns:p="http://schemas.openxmlformats.org/presentationml/2006/main">
+    <p:tnLst>
+      <p:par>
+        <p:cTn id="1" dur="indefinite" restart="never" nodeType="tmRoot">
+          <p:childTnLst>
+            <p:seq concurrent="1" nextAc="seek">
+              <p:cTn id="2" dur="indefinite" nodeType="mainSeq">
+                <p:childTnLst>
+                  <p:par>
+                    <p:cTn id="3" fill="hold">
+                      <p:stCondLst>
+                        <p:cond delay="indefinite"/>
+                        <p:cond evt="onBegin" delay="0">
+                          <p:tn val="2"/>
+                        </p:cond>
+                      </p:stCondLst>
+                      <p:childTnLst>
+                        <p:par>
+                          <p:cTn id="4" fill="hold">
+                            <p:stCondLst>
+                              <p:cond delay="0"/>
+                            </p:stCondLst>
+                            <p:childTnLst>
+                              <p:par>
+                                <p:cTn id="5" presetID="10" presetClass="entr" presetSubtype="0" fill="hold" grpId="0" nodeType="withEffect">
+                                  <p:stCondLst>
+                                    <p:cond delay="0"/>
+                                  </p:stCondLst>
+                                  <p:childTnLst>
+                                    <p:set>
+                                      <p:cBhvr>
+                                        <p:cTn id="6" dur="1" fill="hold">
+                                          <p:stCondLst>
+                                            <p:cond delay="0"/>
+                                          </p:stCondLst>
+                                        </p:cTn>
+                                        <p:tgtEl>
+                                          <p:spTgt spid="2"/>
+                                        </p:tgtEl>
+                                        <p:attrNameLst>
+                                          <p:attrName>style.visibility</p:attrName>
+                                        </p:attrNameLst>
+                                      </p:cBhvr>
+                                      <p:to>
+                                        <p:strVal val="visible"/>
+                                      </p:to>
+                                    </p:set>
+                                    <p:animEffect transition="in" filter="fade">
+                                      <p:cBhvr>
+                                        <p:cTn id="7" dur="450"/>
+                                        <p:tgtEl>
+                                          <p:spTgt spid="2"/>
+                                        </p:tgtEl>
+                                      </p:cBhvr>
+                                    </p:animEffect>
+                                    <p:anim calcmode="lin" valueType="num">
+                                      <p:cBhvr additive="base">
+                                        <p:cTn id="8" dur="450" fill="hold"/>
+                                        <p:tgtEl>
+                                          <p:spTgt spid="2"/>
+                                        </p:tgtEl>
+                                        <p:attrNameLst>
+                                          <p:attrName>ppt_y</p:attrName>
+                                        </p:attrNameLst>
+                                      </p:cBhvr>
+                                      <p:tavLst>
+                                        <p:tav tm="0">
+                                          <p:val>
+                                            <p:strVal val="#ppt_y+0.025"/>
+                                          </p:val>
+                                        </p:tav>
+                                        <p:tav tm="100000">
+                                          <p:val>
+                                            <p:strVal val="#ppt_y"/>
+                                          </p:val>
+                                        </p:tav>
+                                      </p:tavLst>
+                                    </p:anim>
+                                  </p:childTnLst>
+                                </p:cTn>
+                              </p:par>
+                              <p:par>
+                                <p:cTn id="9" presetID="10" presetClass="entr" presetSubtype="0" fill="hold" grpId="0" nodeType="withEffect">
+                                  <p:stCondLst>
+                                    <p:cond delay="160"/>
+                                  </p:stCondLst>
+                                  <p:childTnLst>
+                                    <p:set>
+                                      <p:cBhvr>
+                                        <p:cTn id="10" dur="1" fill="hold">
+                                          <p:stCondLst>
+                                            <p:cond delay="0"/>
+                                          </p:stCondLst>
+                                        </p:cTn>
+                                        <p:tgtEl>
+                                          <p:spTgt spid="3"/>
+                                        </p:tgtEl>
+                                        <p:attrNameLst>
+                                          <p:attrName>style.visibility</p:attrName>
+                                        </p:attrNameLst>
+                                      </p:cBhvr>
+                                      <p:to>
+                                        <p:strVal val="visible"/>
+                                      </p:to>
+                                    </p:set>
+                                    <p:animEffect transition="in" filter="fade">
+                                      <p:cBhvr>
+                                        <p:cTn id="11" dur="450"/>
+                                        <p:tgtEl>
+                                          <p:spTgt spid="3"/>
+                                        </p:tgtEl>
+                                      </p:cBhvr>
+                                    </p:animEffect>
+                                    <p:anim calcmode="lin" valueType="num">
+                                      <p:cBhvr additive="base">
+                                        <p:cTn id="12" dur="450" fill="hold"/>
+                                        <p:tgtEl>
+                                          <p:spTgt spid="3"/>
+                                        </p:tgtEl>
+                                        <p:attrNameLst>
+                                          <p:attrName>ppt_y</p:attrName>
+                                        </p:attrNameLst>
+                                      </p:cBhvr>
+                                      <p:tavLst>
+                                        <p:tav tm="0">
+                                          <p:val>
+                                            <p:strVal val="#ppt_y+0.025"/>
+                                          </p:val>
+                                        </p:tav>
+                                        <p:tav tm="100000">
+                                          <p:val>
+                                            <p:strVal val="#ppt_y"/>
+                                          </p:val>
+                                        </p:tav>
+                                      </p:tavLst>
+                                    </p:anim>
+                                  </p:childTnLst>
+                                </p:cTn>
+                              </p:par>
+                              <p:par>
+                                <p:cTn id="13" presetID="10" presetClass="entr" presetSubtype="0" fill="hold" grpId="0" nodeType="withEffect">
+                                  <p:stCondLst>
+                                    <p:cond delay="320"/>
+                                  </p:stCondLst>
+                                  <p:childTnLst>
+                                    <p:set>
+                                      <p:cBhvr>
+                                        <p:cTn id="14" dur="1" fill="hold">
+                                          <p:stCondLst>
+                                            <p:cond delay="0"/>
+                                          </p:stCondLst>
+                                        </p:cTn>
+                                        <p:tgtEl>
+                                          <p:spTgt spid="4"/>
+                                        </p:tgtEl>
+                                        <p:attrNameLst>
+                                          <p:attrName>style.visibility</p:attrName>
+                                        </p:attrNameLst>
+                                      </p:cBhvr>
+                                      <p:to>
+                                        <p:strVal val="visible"/>
+                                      </p:to>
+                                    </p:set>
+                                    <p:animEffect transition="in" filter="fade">
+                                      <p:cBhvr>
+                                        <p:cTn id="15" dur="450"/>
+                                        <p:tgtEl>
+                                          <p:spTgt spid="4"/>
+                                        </p:tgtEl>
+                                      </p:cBhvr>
+                                    </p:animEffect>
+                                    <p:anim calcmode="lin" valueType="num">
+                                      <p:cBhvr additive="base">
+                                        <p:cTn id="16" dur="450" fill="hold"/>
+                                        <p:tgtEl>
+                                          <p:spTgt spid="4"/>
+                                        </p:tgtEl>
+                                        <p:attrNameLst>
+                                          <p:attrName>ppt_y</p:attrName>
+                                        </p:attrNameLst>
+                                      </p:cBhvr>
+                                      <p:tavLst>
+                                        <p:tav tm="0">
+                                          <p:val>
+                                            <p:strVal val="#ppt_y+0.025"/>
+                                          </p:val>
+                                        </p:tav>
+                                        <p:tav tm="100000">
+                                          <p:val>
+                                            <p:strVal val="#ppt_y"/>
+                                          </p:val>
+                                        </p:tav>
+                                      </p:tavLst>
+                                    </p:anim>
+                                  </p:childTnLst>
+                                </p:cTn>
+                              </p:par>
+                              <p:par>
+                                <p:cTn id="17" presetID="10" presetClass="entr" presetSubtype="0" fill="hold" grpId="0" nodeType="withEffect">
+                                  <p:stCondLst>
+                                    <p:cond delay="480"/>
+                                  </p:stCondLst>
+                                  <p:childTnLst>
+                                    <p:set>
+                                      <p:cBhvr>
+                                        <p:cTn id="18" dur="1" fill="hold">
+                                          <p:stCondLst>
+                                            <p:cond delay="0"/>
+                                          </p:stCondLst>
+                                        </p:cTn>
+                                        <p:tgtEl>
+                                          <p:spTgt spid="5"/>
+                                        </p:tgtEl>
+                                        <p:attrNameLst>
+                                          <p:attrName>style.visibility</p:attrName>
+                                        </p:attrNameLst>
+                                      </p:cBhvr>
+                                      <p:to>
+                                        <p:strVal val="visible"/>
+                                      </p:to>
+                                    </p:set>
+                                    <p:animEffect transition="in" filter="fade">
+                                      <p:cBhvr>
+                                        <p:cTn id="19" dur="450"/>
+                                        <p:tgtEl>
+                                          <p:spTgt spid="5"/>
+                                        </p:tgtEl>
+                                      </p:cBhvr>
+                                    </p:animEffect>
+                                    <p:anim calcmode="lin" valueType="num">
+                                      <p:cBhvr additive="base">
+                                        <p:cTn id="20" dur="450" fill="hold"/>
+                                        <p:tgtEl>
+                                          <p:spTgt spid="5"/>
+                                        </p:tgtEl>
+                                        <p:attrNameLst>
+                                          <p:attrName>ppt_y</p:attrName>
+                                        </p:attrNameLst>
+                                      </p:cBhvr>
+                                      <p:tavLst>
+                                        <p:tav tm="0">
+                                          <p:val>
+                                            <p:strVal val="#ppt_y+0.025"/>
+                                          </p:val>
+                                        </p:tav>
+                                        <p:tav tm="100000">
+                                          <p:val>
+                                            <p:strVal val="#ppt_y"/>
+                                          </p:val>
+                                        </p:tav>
+                                      </p:tavLst>
+                                    </p:anim>
+                                  </p:childTnLst>
+                                </p:cTn>
+                              </p:par>
+                            </p:childTnLst>
+                          </p:cTn>
+                        </p:par>
+                      </p:childTnLst>
+                    </p:cTn>
+                  </p:par>
+                </p:childTnLst>
+              </p:cTn>
+              <p:prevCondLst>
+                <p:cond evt="onPrev" delay="0">
+                  <p:tgtEl>
+                    <p:sldTgt/>
+                  </p:tgtEl>
+                </p:cond>
+              </p:prevCondLst>
+              <p:nextCondLst>
+                <p:cond evt="onNext" delay="0">
+                  <p:tgtEl>
+                    <p:sldTgt/>
+                  </p:tgtEl>
+                </p:cond>
+              </p:nextCondLst>
+            </p:seq>
+          </p:childTnLst>
+        </p:cTn>
+      </p:par>
+    </p:tnLst>
+    <p:bldLst>
+      <p:bldP spid="2" grpId="0"/>
+      <p:bldP spid="3" grpId="0"/>
+      <p:bldP spid="4" grpId="0"/>
+      <p:bldP spid="5" grpId="0"/>
+    </p:bldLst>
+  </p:timing>
 </p:sld>
 </file>
 
@@ -3728,6 +6120,474 @@
   <p:clrMapOvr>
     <a:masterClrMapping/>
   </p:clrMapOvr>
+  <p:transition xmlns:p14="http://schemas.microsoft.com/office/powerpoint/2010/main" spd="slow" p14:dur="700">
+    <p:fade/>
+  </p:transition>
+  <p:timing xmlns:p="http://schemas.openxmlformats.org/presentationml/2006/main">
+    <p:tnLst>
+      <p:par>
+        <p:cTn id="1" dur="indefinite" restart="never" nodeType="tmRoot">
+          <p:childTnLst>
+            <p:seq concurrent="1" nextAc="seek">
+              <p:cTn id="2" dur="indefinite" nodeType="mainSeq">
+                <p:childTnLst>
+                  <p:par>
+                    <p:cTn id="3" fill="hold">
+                      <p:stCondLst>
+                        <p:cond delay="indefinite"/>
+                        <p:cond evt="onBegin" delay="0">
+                          <p:tn val="2"/>
+                        </p:cond>
+                      </p:stCondLst>
+                      <p:childTnLst>
+                        <p:par>
+                          <p:cTn id="4" fill="hold">
+                            <p:stCondLst>
+                              <p:cond delay="0"/>
+                            </p:stCondLst>
+                            <p:childTnLst>
+                              <p:par>
+                                <p:cTn id="5" presetID="10" presetClass="entr" presetSubtype="0" fill="hold" grpId="0" nodeType="withEffect">
+                                  <p:stCondLst>
+                                    <p:cond delay="0"/>
+                                  </p:stCondLst>
+                                  <p:childTnLst>
+                                    <p:set>
+                                      <p:cBhvr>
+                                        <p:cTn id="6" dur="1" fill="hold">
+                                          <p:stCondLst>
+                                            <p:cond delay="0"/>
+                                          </p:stCondLst>
+                                        </p:cTn>
+                                        <p:tgtEl>
+                                          <p:spTgt spid="2"/>
+                                        </p:tgtEl>
+                                        <p:attrNameLst>
+                                          <p:attrName>style.visibility</p:attrName>
+                                        </p:attrNameLst>
+                                      </p:cBhvr>
+                                      <p:to>
+                                        <p:strVal val="visible"/>
+                                      </p:to>
+                                    </p:set>
+                                    <p:animEffect transition="in" filter="fade">
+                                      <p:cBhvr>
+                                        <p:cTn id="7" dur="450"/>
+                                        <p:tgtEl>
+                                          <p:spTgt spid="2"/>
+                                        </p:tgtEl>
+                                      </p:cBhvr>
+                                    </p:animEffect>
+                                    <p:anim calcmode="lin" valueType="num">
+                                      <p:cBhvr additive="base">
+                                        <p:cTn id="8" dur="450" fill="hold"/>
+                                        <p:tgtEl>
+                                          <p:spTgt spid="2"/>
+                                        </p:tgtEl>
+                                        <p:attrNameLst>
+                                          <p:attrName>ppt_y</p:attrName>
+                                        </p:attrNameLst>
+                                      </p:cBhvr>
+                                      <p:tavLst>
+                                        <p:tav tm="0">
+                                          <p:val>
+                                            <p:strVal val="#ppt_y+0.025"/>
+                                          </p:val>
+                                        </p:tav>
+                                        <p:tav tm="100000">
+                                          <p:val>
+                                            <p:strVal val="#ppt_y"/>
+                                          </p:val>
+                                        </p:tav>
+                                      </p:tavLst>
+                                    </p:anim>
+                                  </p:childTnLst>
+                                </p:cTn>
+                              </p:par>
+                              <p:par>
+                                <p:cTn id="9" presetID="10" presetClass="entr" presetSubtype="0" fill="hold" grpId="0" nodeType="withEffect">
+                                  <p:stCondLst>
+                                    <p:cond delay="160"/>
+                                  </p:stCondLst>
+                                  <p:childTnLst>
+                                    <p:set>
+                                      <p:cBhvr>
+                                        <p:cTn id="10" dur="1" fill="hold">
+                                          <p:stCondLst>
+                                            <p:cond delay="0"/>
+                                          </p:stCondLst>
+                                        </p:cTn>
+                                        <p:tgtEl>
+                                          <p:spTgt spid="3"/>
+                                        </p:tgtEl>
+                                        <p:attrNameLst>
+                                          <p:attrName>style.visibility</p:attrName>
+                                        </p:attrNameLst>
+                                      </p:cBhvr>
+                                      <p:to>
+                                        <p:strVal val="visible"/>
+                                      </p:to>
+                                    </p:set>
+                                    <p:animEffect transition="in" filter="fade">
+                                      <p:cBhvr>
+                                        <p:cTn id="11" dur="450"/>
+                                        <p:tgtEl>
+                                          <p:spTgt spid="3"/>
+                                        </p:tgtEl>
+                                      </p:cBhvr>
+                                    </p:animEffect>
+                                    <p:anim calcmode="lin" valueType="num">
+                                      <p:cBhvr additive="base">
+                                        <p:cTn id="12" dur="450" fill="hold"/>
+                                        <p:tgtEl>
+                                          <p:spTgt spid="3"/>
+                                        </p:tgtEl>
+                                        <p:attrNameLst>
+                                          <p:attrName>ppt_y</p:attrName>
+                                        </p:attrNameLst>
+                                      </p:cBhvr>
+                                      <p:tavLst>
+                                        <p:tav tm="0">
+                                          <p:val>
+                                            <p:strVal val="#ppt_y+0.025"/>
+                                          </p:val>
+                                        </p:tav>
+                                        <p:tav tm="100000">
+                                          <p:val>
+                                            <p:strVal val="#ppt_y"/>
+                                          </p:val>
+                                        </p:tav>
+                                      </p:tavLst>
+                                    </p:anim>
+                                  </p:childTnLst>
+                                </p:cTn>
+                              </p:par>
+                              <p:par>
+                                <p:cTn id="13" presetID="10" presetClass="entr" presetSubtype="0" fill="hold" grpId="0" nodeType="withEffect">
+                                  <p:stCondLst>
+                                    <p:cond delay="320"/>
+                                  </p:stCondLst>
+                                  <p:childTnLst>
+                                    <p:set>
+                                      <p:cBhvr>
+                                        <p:cTn id="14" dur="1" fill="hold">
+                                          <p:stCondLst>
+                                            <p:cond delay="0"/>
+                                          </p:stCondLst>
+                                        </p:cTn>
+                                        <p:tgtEl>
+                                          <p:spTgt spid="8"/>
+                                        </p:tgtEl>
+                                        <p:attrNameLst>
+                                          <p:attrName>style.visibility</p:attrName>
+                                        </p:attrNameLst>
+                                      </p:cBhvr>
+                                      <p:to>
+                                        <p:strVal val="visible"/>
+                                      </p:to>
+                                    </p:set>
+                                    <p:animEffect transition="in" filter="fade">
+                                      <p:cBhvr>
+                                        <p:cTn id="15" dur="450"/>
+                                        <p:tgtEl>
+                                          <p:spTgt spid="8"/>
+                                        </p:tgtEl>
+                                      </p:cBhvr>
+                                    </p:animEffect>
+                                    <p:anim calcmode="lin" valueType="num">
+                                      <p:cBhvr additive="base">
+                                        <p:cTn id="16" dur="450" fill="hold"/>
+                                        <p:tgtEl>
+                                          <p:spTgt spid="8"/>
+                                        </p:tgtEl>
+                                        <p:attrNameLst>
+                                          <p:attrName>ppt_y</p:attrName>
+                                        </p:attrNameLst>
+                                      </p:cBhvr>
+                                      <p:tavLst>
+                                        <p:tav tm="0">
+                                          <p:val>
+                                            <p:strVal val="#ppt_y+0.025"/>
+                                          </p:val>
+                                        </p:tav>
+                                        <p:tav tm="100000">
+                                          <p:val>
+                                            <p:strVal val="#ppt_y"/>
+                                          </p:val>
+                                        </p:tav>
+                                      </p:tavLst>
+                                    </p:anim>
+                                  </p:childTnLst>
+                                </p:cTn>
+                              </p:par>
+                              <p:par>
+                                <p:cTn id="17" presetID="10" presetClass="entr" presetSubtype="0" fill="hold" grpId="0" nodeType="withEffect">
+                                  <p:stCondLst>
+                                    <p:cond delay="480"/>
+                                  </p:stCondLst>
+                                  <p:childTnLst>
+                                    <p:set>
+                                      <p:cBhvr>
+                                        <p:cTn id="18" dur="1" fill="hold">
+                                          <p:stCondLst>
+                                            <p:cond delay="0"/>
+                                          </p:stCondLst>
+                                        </p:cTn>
+                                        <p:tgtEl>
+                                          <p:spTgt spid="4"/>
+                                        </p:tgtEl>
+                                        <p:attrNameLst>
+                                          <p:attrName>style.visibility</p:attrName>
+                                        </p:attrNameLst>
+                                      </p:cBhvr>
+                                      <p:to>
+                                        <p:strVal val="visible"/>
+                                      </p:to>
+                                    </p:set>
+                                    <p:animEffect transition="in" filter="fade">
+                                      <p:cBhvr>
+                                        <p:cTn id="19" dur="450"/>
+                                        <p:tgtEl>
+                                          <p:spTgt spid="4"/>
+                                        </p:tgtEl>
+                                      </p:cBhvr>
+                                    </p:animEffect>
+                                    <p:anim calcmode="lin" valueType="num">
+                                      <p:cBhvr additive="base">
+                                        <p:cTn id="20" dur="450" fill="hold"/>
+                                        <p:tgtEl>
+                                          <p:spTgt spid="4"/>
+                                        </p:tgtEl>
+                                        <p:attrNameLst>
+                                          <p:attrName>ppt_y</p:attrName>
+                                        </p:attrNameLst>
+                                      </p:cBhvr>
+                                      <p:tavLst>
+                                        <p:tav tm="0">
+                                          <p:val>
+                                            <p:strVal val="#ppt_y+0.025"/>
+                                          </p:val>
+                                        </p:tav>
+                                        <p:tav tm="100000">
+                                          <p:val>
+                                            <p:strVal val="#ppt_y"/>
+                                          </p:val>
+                                        </p:tav>
+                                      </p:tavLst>
+                                    </p:anim>
+                                  </p:childTnLst>
+                                </p:cTn>
+                              </p:par>
+                              <p:par>
+                                <p:cTn id="21" presetID="10" presetClass="entr" presetSubtype="0" fill="hold" grpId="0" nodeType="withEffect">
+                                  <p:stCondLst>
+                                    <p:cond delay="640"/>
+                                  </p:stCondLst>
+                                  <p:childTnLst>
+                                    <p:set>
+                                      <p:cBhvr>
+                                        <p:cTn id="22" dur="1" fill="hold">
+                                          <p:stCondLst>
+                                            <p:cond delay="0"/>
+                                          </p:stCondLst>
+                                        </p:cTn>
+                                        <p:tgtEl>
+                                          <p:spTgt spid="5"/>
+                                        </p:tgtEl>
+                                        <p:attrNameLst>
+                                          <p:attrName>style.visibility</p:attrName>
+                                        </p:attrNameLst>
+                                      </p:cBhvr>
+                                      <p:to>
+                                        <p:strVal val="visible"/>
+                                      </p:to>
+                                    </p:set>
+                                    <p:animEffect transition="in" filter="fade">
+                                      <p:cBhvr>
+                                        <p:cTn id="23" dur="450"/>
+                                        <p:tgtEl>
+                                          <p:spTgt spid="5"/>
+                                        </p:tgtEl>
+                                      </p:cBhvr>
+                                    </p:animEffect>
+                                    <p:anim calcmode="lin" valueType="num">
+                                      <p:cBhvr additive="base">
+                                        <p:cTn id="24" dur="450" fill="hold"/>
+                                        <p:tgtEl>
+                                          <p:spTgt spid="5"/>
+                                        </p:tgtEl>
+                                        <p:attrNameLst>
+                                          <p:attrName>ppt_y</p:attrName>
+                                        </p:attrNameLst>
+                                      </p:cBhvr>
+                                      <p:tavLst>
+                                        <p:tav tm="0">
+                                          <p:val>
+                                            <p:strVal val="#ppt_y+0.025"/>
+                                          </p:val>
+                                        </p:tav>
+                                        <p:tav tm="100000">
+                                          <p:val>
+                                            <p:strVal val="#ppt_y"/>
+                                          </p:val>
+                                        </p:tav>
+                                      </p:tavLst>
+                                    </p:anim>
+                                  </p:childTnLst>
+                                </p:cTn>
+                              </p:par>
+                              <p:par>
+                                <p:cTn id="25" presetID="10" presetClass="entr" presetSubtype="0" fill="hold" grpId="0" nodeType="withEffect">
+                                  <p:stCondLst>
+                                    <p:cond delay="800"/>
+                                  </p:stCondLst>
+                                  <p:childTnLst>
+                                    <p:set>
+                                      <p:cBhvr>
+                                        <p:cTn id="26" dur="1" fill="hold">
+                                          <p:stCondLst>
+                                            <p:cond delay="0"/>
+                                          </p:stCondLst>
+                                        </p:cTn>
+                                        <p:tgtEl>
+                                          <p:spTgt spid="6"/>
+                                        </p:tgtEl>
+                                        <p:attrNameLst>
+                                          <p:attrName>style.visibility</p:attrName>
+                                        </p:attrNameLst>
+                                      </p:cBhvr>
+                                      <p:to>
+                                        <p:strVal val="visible"/>
+                                      </p:to>
+                                    </p:set>
+                                    <p:animEffect transition="in" filter="fade">
+                                      <p:cBhvr>
+                                        <p:cTn id="27" dur="450"/>
+                                        <p:tgtEl>
+                                          <p:spTgt spid="6"/>
+                                        </p:tgtEl>
+                                      </p:cBhvr>
+                                    </p:animEffect>
+                                    <p:anim calcmode="lin" valueType="num">
+                                      <p:cBhvr additive="base">
+                                        <p:cTn id="28" dur="450" fill="hold"/>
+                                        <p:tgtEl>
+                                          <p:spTgt spid="6"/>
+                                        </p:tgtEl>
+                                        <p:attrNameLst>
+                                          <p:attrName>ppt_y</p:attrName>
+                                        </p:attrNameLst>
+                                      </p:cBhvr>
+                                      <p:tavLst>
+                                        <p:tav tm="0">
+                                          <p:val>
+                                            <p:strVal val="#ppt_y+0.025"/>
+                                          </p:val>
+                                        </p:tav>
+                                        <p:tav tm="100000">
+                                          <p:val>
+                                            <p:strVal val="#ppt_y"/>
+                                          </p:val>
+                                        </p:tav>
+                                      </p:tavLst>
+                                    </p:anim>
+                                  </p:childTnLst>
+                                </p:cTn>
+                              </p:par>
+                              <p:par>
+                                <p:cTn id="29" presetID="10" presetClass="entr" presetSubtype="0" fill="hold" grpId="0" nodeType="withEffect">
+                                  <p:stCondLst>
+                                    <p:cond delay="960"/>
+                                  </p:stCondLst>
+                                  <p:childTnLst>
+                                    <p:set>
+                                      <p:cBhvr>
+                                        <p:cTn id="30" dur="1" fill="hold">
+                                          <p:stCondLst>
+                                            <p:cond delay="0"/>
+                                          </p:stCondLst>
+                                        </p:cTn>
+                                        <p:tgtEl>
+                                          <p:spTgt spid="7"/>
+                                        </p:tgtEl>
+                                        <p:attrNameLst>
+                                          <p:attrName>style.visibility</p:attrName>
+                                        </p:attrNameLst>
+                                      </p:cBhvr>
+                                      <p:to>
+                                        <p:strVal val="visible"/>
+                                      </p:to>
+                                    </p:set>
+                                    <p:animEffect transition="in" filter="fade">
+                                      <p:cBhvr>
+                                        <p:cTn id="31" dur="450"/>
+                                        <p:tgtEl>
+                                          <p:spTgt spid="7"/>
+                                        </p:tgtEl>
+                                      </p:cBhvr>
+                                    </p:animEffect>
+                                    <p:anim calcmode="lin" valueType="num">
+                                      <p:cBhvr additive="base">
+                                        <p:cTn id="32" dur="450" fill="hold"/>
+                                        <p:tgtEl>
+                                          <p:spTgt spid="7"/>
+                                        </p:tgtEl>
+                                        <p:attrNameLst>
+                                          <p:attrName>ppt_y</p:attrName>
+                                        </p:attrNameLst>
+                                      </p:cBhvr>
+                                      <p:tavLst>
+                                        <p:tav tm="0">
+                                          <p:val>
+                                            <p:strVal val="#ppt_y+0.025"/>
+                                          </p:val>
+                                        </p:tav>
+                                        <p:tav tm="100000">
+                                          <p:val>
+                                            <p:strVal val="#ppt_y"/>
+                                          </p:val>
+                                        </p:tav>
+                                      </p:tavLst>
+                                    </p:anim>
+                                  </p:childTnLst>
+                                </p:cTn>
+                              </p:par>
+                            </p:childTnLst>
+                          </p:cTn>
+                        </p:par>
+                      </p:childTnLst>
+                    </p:cTn>
+                  </p:par>
+                </p:childTnLst>
+              </p:cTn>
+              <p:prevCondLst>
+                <p:cond evt="onPrev" delay="0">
+                  <p:tgtEl>
+                    <p:sldTgt/>
+                  </p:tgtEl>
+                </p:cond>
+              </p:prevCondLst>
+              <p:nextCondLst>
+                <p:cond evt="onNext" delay="0">
+                  <p:tgtEl>
+                    <p:sldTgt/>
+                  </p:tgtEl>
+                </p:cond>
+              </p:nextCondLst>
+            </p:seq>
+          </p:childTnLst>
+        </p:cTn>
+      </p:par>
+    </p:tnLst>
+    <p:bldLst>
+      <p:bldP spid="2" grpId="0"/>
+      <p:bldP spid="3" grpId="0"/>
+      <p:bldP spid="4" grpId="0"/>
+      <p:bldP spid="5" grpId="0"/>
+      <p:bldP spid="6" grpId="0"/>
+      <p:bldP spid="7" grpId="0"/>
+    </p:bldLst>
+  </p:timing>
 </p:sld>
 </file>
 
@@ -4199,6 +7059,825 @@
   <p:clrMapOvr>
     <a:masterClrMapping/>
   </p:clrMapOvr>
+  <p:transition xmlns:p14="http://schemas.microsoft.com/office/powerpoint/2010/main" spd="slow" p14:dur="700">
+    <p:fade/>
+  </p:transition>
+  <p:timing xmlns:p="http://schemas.openxmlformats.org/presentationml/2006/main">
+    <p:tnLst>
+      <p:par>
+        <p:cTn id="1" dur="indefinite" restart="never" nodeType="tmRoot">
+          <p:childTnLst>
+            <p:seq concurrent="1" nextAc="seek">
+              <p:cTn id="2" dur="indefinite" nodeType="mainSeq">
+                <p:childTnLst>
+                  <p:par>
+                    <p:cTn id="3" fill="hold">
+                      <p:stCondLst>
+                        <p:cond delay="indefinite"/>
+                        <p:cond evt="onBegin" delay="0">
+                          <p:tn val="2"/>
+                        </p:cond>
+                      </p:stCondLst>
+                      <p:childTnLst>
+                        <p:par>
+                          <p:cTn id="4" fill="hold">
+                            <p:stCondLst>
+                              <p:cond delay="0"/>
+                            </p:stCondLst>
+                            <p:childTnLst>
+                              <p:par>
+                                <p:cTn id="5" presetID="10" presetClass="entr" presetSubtype="0" fill="hold" grpId="0" nodeType="withEffect">
+                                  <p:stCondLst>
+                                    <p:cond delay="0"/>
+                                  </p:stCondLst>
+                                  <p:childTnLst>
+                                    <p:set>
+                                      <p:cBhvr>
+                                        <p:cTn id="6" dur="1" fill="hold">
+                                          <p:stCondLst>
+                                            <p:cond delay="0"/>
+                                          </p:stCondLst>
+                                        </p:cTn>
+                                        <p:tgtEl>
+                                          <p:spTgt spid="2"/>
+                                        </p:tgtEl>
+                                        <p:attrNameLst>
+                                          <p:attrName>style.visibility</p:attrName>
+                                        </p:attrNameLst>
+                                      </p:cBhvr>
+                                      <p:to>
+                                        <p:strVal val="visible"/>
+                                      </p:to>
+                                    </p:set>
+                                    <p:animEffect transition="in" filter="fade">
+                                      <p:cBhvr>
+                                        <p:cTn id="7" dur="450"/>
+                                        <p:tgtEl>
+                                          <p:spTgt spid="2"/>
+                                        </p:tgtEl>
+                                      </p:cBhvr>
+                                    </p:animEffect>
+                                    <p:anim calcmode="lin" valueType="num">
+                                      <p:cBhvr additive="base">
+                                        <p:cTn id="8" dur="450" fill="hold"/>
+                                        <p:tgtEl>
+                                          <p:spTgt spid="2"/>
+                                        </p:tgtEl>
+                                        <p:attrNameLst>
+                                          <p:attrName>ppt_y</p:attrName>
+                                        </p:attrNameLst>
+                                      </p:cBhvr>
+                                      <p:tavLst>
+                                        <p:tav tm="0">
+                                          <p:val>
+                                            <p:strVal val="#ppt_y+0.025"/>
+                                          </p:val>
+                                        </p:tav>
+                                        <p:tav tm="100000">
+                                          <p:val>
+                                            <p:strVal val="#ppt_y"/>
+                                          </p:val>
+                                        </p:tav>
+                                      </p:tavLst>
+                                    </p:anim>
+                                  </p:childTnLst>
+                                </p:cTn>
+                              </p:par>
+                              <p:par>
+                                <p:cTn id="9" presetID="10" presetClass="entr" presetSubtype="0" fill="hold" grpId="0" nodeType="withEffect">
+                                  <p:stCondLst>
+                                    <p:cond delay="91"/>
+                                  </p:stCondLst>
+                                  <p:childTnLst>
+                                    <p:set>
+                                      <p:cBhvr>
+                                        <p:cTn id="10" dur="1" fill="hold">
+                                          <p:stCondLst>
+                                            <p:cond delay="0"/>
+                                          </p:stCondLst>
+                                        </p:cTn>
+                                        <p:tgtEl>
+                                          <p:spTgt spid="3"/>
+                                        </p:tgtEl>
+                                        <p:attrNameLst>
+                                          <p:attrName>style.visibility</p:attrName>
+                                        </p:attrNameLst>
+                                      </p:cBhvr>
+                                      <p:to>
+                                        <p:strVal val="visible"/>
+                                      </p:to>
+                                    </p:set>
+                                    <p:animEffect transition="in" filter="fade">
+                                      <p:cBhvr>
+                                        <p:cTn id="11" dur="450"/>
+                                        <p:tgtEl>
+                                          <p:spTgt spid="3"/>
+                                        </p:tgtEl>
+                                      </p:cBhvr>
+                                    </p:animEffect>
+                                    <p:anim calcmode="lin" valueType="num">
+                                      <p:cBhvr additive="base">
+                                        <p:cTn id="12" dur="450" fill="hold"/>
+                                        <p:tgtEl>
+                                          <p:spTgt spid="3"/>
+                                        </p:tgtEl>
+                                        <p:attrNameLst>
+                                          <p:attrName>ppt_y</p:attrName>
+                                        </p:attrNameLst>
+                                      </p:cBhvr>
+                                      <p:tavLst>
+                                        <p:tav tm="0">
+                                          <p:val>
+                                            <p:strVal val="#ppt_y+0.025"/>
+                                          </p:val>
+                                        </p:tav>
+                                        <p:tav tm="100000">
+                                          <p:val>
+                                            <p:strVal val="#ppt_y"/>
+                                          </p:val>
+                                        </p:tav>
+                                      </p:tavLst>
+                                    </p:anim>
+                                  </p:childTnLst>
+                                </p:cTn>
+                              </p:par>
+                              <p:par>
+                                <p:cTn id="13" presetID="10" presetClass="entr" presetSubtype="0" fill="hold" grpId="0" nodeType="withEffect">
+                                  <p:stCondLst>
+                                    <p:cond delay="182"/>
+                                  </p:stCondLst>
+                                  <p:childTnLst>
+                                    <p:set>
+                                      <p:cBhvr>
+                                        <p:cTn id="14" dur="1" fill="hold">
+                                          <p:stCondLst>
+                                            <p:cond delay="0"/>
+                                          </p:stCondLst>
+                                        </p:cTn>
+                                        <p:tgtEl>
+                                          <p:spTgt spid="6"/>
+                                        </p:tgtEl>
+                                        <p:attrNameLst>
+                                          <p:attrName>style.visibility</p:attrName>
+                                        </p:attrNameLst>
+                                      </p:cBhvr>
+                                      <p:to>
+                                        <p:strVal val="visible"/>
+                                      </p:to>
+                                    </p:set>
+                                    <p:animEffect transition="in" filter="fade">
+                                      <p:cBhvr>
+                                        <p:cTn id="15" dur="450"/>
+                                        <p:tgtEl>
+                                          <p:spTgt spid="6"/>
+                                        </p:tgtEl>
+                                      </p:cBhvr>
+                                    </p:animEffect>
+                                    <p:anim calcmode="lin" valueType="num">
+                                      <p:cBhvr additive="base">
+                                        <p:cTn id="16" dur="450" fill="hold"/>
+                                        <p:tgtEl>
+                                          <p:spTgt spid="6"/>
+                                        </p:tgtEl>
+                                        <p:attrNameLst>
+                                          <p:attrName>ppt_y</p:attrName>
+                                        </p:attrNameLst>
+                                      </p:cBhvr>
+                                      <p:tavLst>
+                                        <p:tav tm="0">
+                                          <p:val>
+                                            <p:strVal val="#ppt_y+0.025"/>
+                                          </p:val>
+                                        </p:tav>
+                                        <p:tav tm="100000">
+                                          <p:val>
+                                            <p:strVal val="#ppt_y"/>
+                                          </p:val>
+                                        </p:tav>
+                                      </p:tavLst>
+                                    </p:anim>
+                                  </p:childTnLst>
+                                </p:cTn>
+                              </p:par>
+                              <p:par>
+                                <p:cTn id="17" presetID="10" presetClass="entr" presetSubtype="0" fill="hold" grpId="0" nodeType="withEffect">
+                                  <p:stCondLst>
+                                    <p:cond delay="273"/>
+                                  </p:stCondLst>
+                                  <p:childTnLst>
+                                    <p:set>
+                                      <p:cBhvr>
+                                        <p:cTn id="18" dur="1" fill="hold">
+                                          <p:stCondLst>
+                                            <p:cond delay="0"/>
+                                          </p:stCondLst>
+                                        </p:cTn>
+                                        <p:tgtEl>
+                                          <p:spTgt spid="9"/>
+                                        </p:tgtEl>
+                                        <p:attrNameLst>
+                                          <p:attrName>style.visibility</p:attrName>
+                                        </p:attrNameLst>
+                                      </p:cBhvr>
+                                      <p:to>
+                                        <p:strVal val="visible"/>
+                                      </p:to>
+                                    </p:set>
+                                    <p:animEffect transition="in" filter="fade">
+                                      <p:cBhvr>
+                                        <p:cTn id="19" dur="450"/>
+                                        <p:tgtEl>
+                                          <p:spTgt spid="9"/>
+                                        </p:tgtEl>
+                                      </p:cBhvr>
+                                    </p:animEffect>
+                                    <p:anim calcmode="lin" valueType="num">
+                                      <p:cBhvr additive="base">
+                                        <p:cTn id="20" dur="450" fill="hold"/>
+                                        <p:tgtEl>
+                                          <p:spTgt spid="9"/>
+                                        </p:tgtEl>
+                                        <p:attrNameLst>
+                                          <p:attrName>ppt_y</p:attrName>
+                                        </p:attrNameLst>
+                                      </p:cBhvr>
+                                      <p:tavLst>
+                                        <p:tav tm="0">
+                                          <p:val>
+                                            <p:strVal val="#ppt_y+0.025"/>
+                                          </p:val>
+                                        </p:tav>
+                                        <p:tav tm="100000">
+                                          <p:val>
+                                            <p:strVal val="#ppt_y"/>
+                                          </p:val>
+                                        </p:tav>
+                                      </p:tavLst>
+                                    </p:anim>
+                                  </p:childTnLst>
+                                </p:cTn>
+                              </p:par>
+                              <p:par>
+                                <p:cTn id="21" presetID="10" presetClass="entr" presetSubtype="0" fill="hold" grpId="0" nodeType="withEffect">
+                                  <p:stCondLst>
+                                    <p:cond delay="364"/>
+                                  </p:stCondLst>
+                                  <p:childTnLst>
+                                    <p:set>
+                                      <p:cBhvr>
+                                        <p:cTn id="22" dur="1" fill="hold">
+                                          <p:stCondLst>
+                                            <p:cond delay="0"/>
+                                          </p:stCondLst>
+                                        </p:cTn>
+                                        <p:tgtEl>
+                                          <p:spTgt spid="12"/>
+                                        </p:tgtEl>
+                                        <p:attrNameLst>
+                                          <p:attrName>style.visibility</p:attrName>
+                                        </p:attrNameLst>
+                                      </p:cBhvr>
+                                      <p:to>
+                                        <p:strVal val="visible"/>
+                                      </p:to>
+                                    </p:set>
+                                    <p:animEffect transition="in" filter="fade">
+                                      <p:cBhvr>
+                                        <p:cTn id="23" dur="450"/>
+                                        <p:tgtEl>
+                                          <p:spTgt spid="12"/>
+                                        </p:tgtEl>
+                                      </p:cBhvr>
+                                    </p:animEffect>
+                                    <p:anim calcmode="lin" valueType="num">
+                                      <p:cBhvr additive="base">
+                                        <p:cTn id="24" dur="450" fill="hold"/>
+                                        <p:tgtEl>
+                                          <p:spTgt spid="12"/>
+                                        </p:tgtEl>
+                                        <p:attrNameLst>
+                                          <p:attrName>ppt_y</p:attrName>
+                                        </p:attrNameLst>
+                                      </p:cBhvr>
+                                      <p:tavLst>
+                                        <p:tav tm="0">
+                                          <p:val>
+                                            <p:strVal val="#ppt_y+0.025"/>
+                                          </p:val>
+                                        </p:tav>
+                                        <p:tav tm="100000">
+                                          <p:val>
+                                            <p:strVal val="#ppt_y"/>
+                                          </p:val>
+                                        </p:tav>
+                                      </p:tavLst>
+                                    </p:anim>
+                                  </p:childTnLst>
+                                </p:cTn>
+                              </p:par>
+                              <p:par>
+                                <p:cTn id="25" presetID="10" presetClass="entr" presetSubtype="0" fill="hold" grpId="0" nodeType="withEffect">
+                                  <p:stCondLst>
+                                    <p:cond delay="455"/>
+                                  </p:stCondLst>
+                                  <p:childTnLst>
+                                    <p:set>
+                                      <p:cBhvr>
+                                        <p:cTn id="26" dur="1" fill="hold">
+                                          <p:stCondLst>
+                                            <p:cond delay="0"/>
+                                          </p:stCondLst>
+                                        </p:cTn>
+                                        <p:tgtEl>
+                                          <p:spTgt spid="4"/>
+                                        </p:tgtEl>
+                                        <p:attrNameLst>
+                                          <p:attrName>style.visibility</p:attrName>
+                                        </p:attrNameLst>
+                                      </p:cBhvr>
+                                      <p:to>
+                                        <p:strVal val="visible"/>
+                                      </p:to>
+                                    </p:set>
+                                    <p:animEffect transition="in" filter="fade">
+                                      <p:cBhvr>
+                                        <p:cTn id="27" dur="450"/>
+                                        <p:tgtEl>
+                                          <p:spTgt spid="4"/>
+                                        </p:tgtEl>
+                                      </p:cBhvr>
+                                    </p:animEffect>
+                                    <p:anim calcmode="lin" valueType="num">
+                                      <p:cBhvr additive="base">
+                                        <p:cTn id="28" dur="450" fill="hold"/>
+                                        <p:tgtEl>
+                                          <p:spTgt spid="4"/>
+                                        </p:tgtEl>
+                                        <p:attrNameLst>
+                                          <p:attrName>ppt_y</p:attrName>
+                                        </p:attrNameLst>
+                                      </p:cBhvr>
+                                      <p:tavLst>
+                                        <p:tav tm="0">
+                                          <p:val>
+                                            <p:strVal val="#ppt_y+0.025"/>
+                                          </p:val>
+                                        </p:tav>
+                                        <p:tav tm="100000">
+                                          <p:val>
+                                            <p:strVal val="#ppt_y"/>
+                                          </p:val>
+                                        </p:tav>
+                                      </p:tavLst>
+                                    </p:anim>
+                                  </p:childTnLst>
+                                </p:cTn>
+                              </p:par>
+                              <p:par>
+                                <p:cTn id="29" presetID="10" presetClass="entr" presetSubtype="0" fill="hold" grpId="0" nodeType="withEffect">
+                                  <p:stCondLst>
+                                    <p:cond delay="546"/>
+                                  </p:stCondLst>
+                                  <p:childTnLst>
+                                    <p:set>
+                                      <p:cBhvr>
+                                        <p:cTn id="30" dur="1" fill="hold">
+                                          <p:stCondLst>
+                                            <p:cond delay="0"/>
+                                          </p:stCondLst>
+                                        </p:cTn>
+                                        <p:tgtEl>
+                                          <p:spTgt spid="7"/>
+                                        </p:tgtEl>
+                                        <p:attrNameLst>
+                                          <p:attrName>style.visibility</p:attrName>
+                                        </p:attrNameLst>
+                                      </p:cBhvr>
+                                      <p:to>
+                                        <p:strVal val="visible"/>
+                                      </p:to>
+                                    </p:set>
+                                    <p:animEffect transition="in" filter="fade">
+                                      <p:cBhvr>
+                                        <p:cTn id="31" dur="450"/>
+                                        <p:tgtEl>
+                                          <p:spTgt spid="7"/>
+                                        </p:tgtEl>
+                                      </p:cBhvr>
+                                    </p:animEffect>
+                                    <p:anim calcmode="lin" valueType="num">
+                                      <p:cBhvr additive="base">
+                                        <p:cTn id="32" dur="450" fill="hold"/>
+                                        <p:tgtEl>
+                                          <p:spTgt spid="7"/>
+                                        </p:tgtEl>
+                                        <p:attrNameLst>
+                                          <p:attrName>ppt_y</p:attrName>
+                                        </p:attrNameLst>
+                                      </p:cBhvr>
+                                      <p:tavLst>
+                                        <p:tav tm="0">
+                                          <p:val>
+                                            <p:strVal val="#ppt_y+0.025"/>
+                                          </p:val>
+                                        </p:tav>
+                                        <p:tav tm="100000">
+                                          <p:val>
+                                            <p:strVal val="#ppt_y"/>
+                                          </p:val>
+                                        </p:tav>
+                                      </p:tavLst>
+                                    </p:anim>
+                                  </p:childTnLst>
+                                </p:cTn>
+                              </p:par>
+                              <p:par>
+                                <p:cTn id="33" presetID="10" presetClass="entr" presetSubtype="0" fill="hold" grpId="0" nodeType="withEffect">
+                                  <p:stCondLst>
+                                    <p:cond delay="637"/>
+                                  </p:stCondLst>
+                                  <p:childTnLst>
+                                    <p:set>
+                                      <p:cBhvr>
+                                        <p:cTn id="34" dur="1" fill="hold">
+                                          <p:stCondLst>
+                                            <p:cond delay="0"/>
+                                          </p:stCondLst>
+                                        </p:cTn>
+                                        <p:tgtEl>
+                                          <p:spTgt spid="10"/>
+                                        </p:tgtEl>
+                                        <p:attrNameLst>
+                                          <p:attrName>style.visibility</p:attrName>
+                                        </p:attrNameLst>
+                                      </p:cBhvr>
+                                      <p:to>
+                                        <p:strVal val="visible"/>
+                                      </p:to>
+                                    </p:set>
+                                    <p:animEffect transition="in" filter="fade">
+                                      <p:cBhvr>
+                                        <p:cTn id="35" dur="450"/>
+                                        <p:tgtEl>
+                                          <p:spTgt spid="10"/>
+                                        </p:tgtEl>
+                                      </p:cBhvr>
+                                    </p:animEffect>
+                                    <p:anim calcmode="lin" valueType="num">
+                                      <p:cBhvr additive="base">
+                                        <p:cTn id="36" dur="450" fill="hold"/>
+                                        <p:tgtEl>
+                                          <p:spTgt spid="10"/>
+                                        </p:tgtEl>
+                                        <p:attrNameLst>
+                                          <p:attrName>ppt_y</p:attrName>
+                                        </p:attrNameLst>
+                                      </p:cBhvr>
+                                      <p:tavLst>
+                                        <p:tav tm="0">
+                                          <p:val>
+                                            <p:strVal val="#ppt_y+0.025"/>
+                                          </p:val>
+                                        </p:tav>
+                                        <p:tav tm="100000">
+                                          <p:val>
+                                            <p:strVal val="#ppt_y"/>
+                                          </p:val>
+                                        </p:tav>
+                                      </p:tavLst>
+                                    </p:anim>
+                                  </p:childTnLst>
+                                </p:cTn>
+                              </p:par>
+                              <p:par>
+                                <p:cTn id="37" presetID="10" presetClass="entr" presetSubtype="0" fill="hold" grpId="0" nodeType="withEffect">
+                                  <p:stCondLst>
+                                    <p:cond delay="728"/>
+                                  </p:stCondLst>
+                                  <p:childTnLst>
+                                    <p:set>
+                                      <p:cBhvr>
+                                        <p:cTn id="38" dur="1" fill="hold">
+                                          <p:stCondLst>
+                                            <p:cond delay="0"/>
+                                          </p:stCondLst>
+                                        </p:cTn>
+                                        <p:tgtEl>
+                                          <p:spTgt spid="13"/>
+                                        </p:tgtEl>
+                                        <p:attrNameLst>
+                                          <p:attrName>style.visibility</p:attrName>
+                                        </p:attrNameLst>
+                                      </p:cBhvr>
+                                      <p:to>
+                                        <p:strVal val="visible"/>
+                                      </p:to>
+                                    </p:set>
+                                    <p:animEffect transition="in" filter="fade">
+                                      <p:cBhvr>
+                                        <p:cTn id="39" dur="450"/>
+                                        <p:tgtEl>
+                                          <p:spTgt spid="13"/>
+                                        </p:tgtEl>
+                                      </p:cBhvr>
+                                    </p:animEffect>
+                                    <p:anim calcmode="lin" valueType="num">
+                                      <p:cBhvr additive="base">
+                                        <p:cTn id="40" dur="450" fill="hold"/>
+                                        <p:tgtEl>
+                                          <p:spTgt spid="13"/>
+                                        </p:tgtEl>
+                                        <p:attrNameLst>
+                                          <p:attrName>ppt_y</p:attrName>
+                                        </p:attrNameLst>
+                                      </p:cBhvr>
+                                      <p:tavLst>
+                                        <p:tav tm="0">
+                                          <p:val>
+                                            <p:strVal val="#ppt_y+0.025"/>
+                                          </p:val>
+                                        </p:tav>
+                                        <p:tav tm="100000">
+                                          <p:val>
+                                            <p:strVal val="#ppt_y"/>
+                                          </p:val>
+                                        </p:tav>
+                                      </p:tavLst>
+                                    </p:anim>
+                                  </p:childTnLst>
+                                </p:cTn>
+                              </p:par>
+                              <p:par>
+                                <p:cTn id="41" presetID="10" presetClass="entr" presetSubtype="0" fill="hold" grpId="0" nodeType="withEffect">
+                                  <p:stCondLst>
+                                    <p:cond delay="819"/>
+                                  </p:stCondLst>
+                                  <p:childTnLst>
+                                    <p:set>
+                                      <p:cBhvr>
+                                        <p:cTn id="42" dur="1" fill="hold">
+                                          <p:stCondLst>
+                                            <p:cond delay="0"/>
+                                          </p:stCondLst>
+                                        </p:cTn>
+                                        <p:tgtEl>
+                                          <p:spTgt spid="5"/>
+                                        </p:tgtEl>
+                                        <p:attrNameLst>
+                                          <p:attrName>style.visibility</p:attrName>
+                                        </p:attrNameLst>
+                                      </p:cBhvr>
+                                      <p:to>
+                                        <p:strVal val="visible"/>
+                                      </p:to>
+                                    </p:set>
+                                    <p:animEffect transition="in" filter="fade">
+                                      <p:cBhvr>
+                                        <p:cTn id="43" dur="450"/>
+                                        <p:tgtEl>
+                                          <p:spTgt spid="5"/>
+                                        </p:tgtEl>
+                                      </p:cBhvr>
+                                    </p:animEffect>
+                                    <p:anim calcmode="lin" valueType="num">
+                                      <p:cBhvr additive="base">
+                                        <p:cTn id="44" dur="450" fill="hold"/>
+                                        <p:tgtEl>
+                                          <p:spTgt spid="5"/>
+                                        </p:tgtEl>
+                                        <p:attrNameLst>
+                                          <p:attrName>ppt_y</p:attrName>
+                                        </p:attrNameLst>
+                                      </p:cBhvr>
+                                      <p:tavLst>
+                                        <p:tav tm="0">
+                                          <p:val>
+                                            <p:strVal val="#ppt_y+0.025"/>
+                                          </p:val>
+                                        </p:tav>
+                                        <p:tav tm="100000">
+                                          <p:val>
+                                            <p:strVal val="#ppt_y"/>
+                                          </p:val>
+                                        </p:tav>
+                                      </p:tavLst>
+                                    </p:anim>
+                                  </p:childTnLst>
+                                </p:cTn>
+                              </p:par>
+                              <p:par>
+                                <p:cTn id="45" presetID="10" presetClass="entr" presetSubtype="0" fill="hold" grpId="0" nodeType="withEffect">
+                                  <p:stCondLst>
+                                    <p:cond delay="910"/>
+                                  </p:stCondLst>
+                                  <p:childTnLst>
+                                    <p:set>
+                                      <p:cBhvr>
+                                        <p:cTn id="46" dur="1" fill="hold">
+                                          <p:stCondLst>
+                                            <p:cond delay="0"/>
+                                          </p:stCondLst>
+                                        </p:cTn>
+                                        <p:tgtEl>
+                                          <p:spTgt spid="8"/>
+                                        </p:tgtEl>
+                                        <p:attrNameLst>
+                                          <p:attrName>style.visibility</p:attrName>
+                                        </p:attrNameLst>
+                                      </p:cBhvr>
+                                      <p:to>
+                                        <p:strVal val="visible"/>
+                                      </p:to>
+                                    </p:set>
+                                    <p:animEffect transition="in" filter="fade">
+                                      <p:cBhvr>
+                                        <p:cTn id="47" dur="450"/>
+                                        <p:tgtEl>
+                                          <p:spTgt spid="8"/>
+                                        </p:tgtEl>
+                                      </p:cBhvr>
+                                    </p:animEffect>
+                                    <p:anim calcmode="lin" valueType="num">
+                                      <p:cBhvr additive="base">
+                                        <p:cTn id="48" dur="450" fill="hold"/>
+                                        <p:tgtEl>
+                                          <p:spTgt spid="8"/>
+                                        </p:tgtEl>
+                                        <p:attrNameLst>
+                                          <p:attrName>ppt_y</p:attrName>
+                                        </p:attrNameLst>
+                                      </p:cBhvr>
+                                      <p:tavLst>
+                                        <p:tav tm="0">
+                                          <p:val>
+                                            <p:strVal val="#ppt_y+0.025"/>
+                                          </p:val>
+                                        </p:tav>
+                                        <p:tav tm="100000">
+                                          <p:val>
+                                            <p:strVal val="#ppt_y"/>
+                                          </p:val>
+                                        </p:tav>
+                                      </p:tavLst>
+                                    </p:anim>
+                                  </p:childTnLst>
+                                </p:cTn>
+                              </p:par>
+                              <p:par>
+                                <p:cTn id="49" presetID="10" presetClass="entr" presetSubtype="0" fill="hold" grpId="0" nodeType="withEffect">
+                                  <p:stCondLst>
+                                    <p:cond delay="1001"/>
+                                  </p:stCondLst>
+                                  <p:childTnLst>
+                                    <p:set>
+                                      <p:cBhvr>
+                                        <p:cTn id="50" dur="1" fill="hold">
+                                          <p:stCondLst>
+                                            <p:cond delay="0"/>
+                                          </p:stCondLst>
+                                        </p:cTn>
+                                        <p:tgtEl>
+                                          <p:spTgt spid="11"/>
+                                        </p:tgtEl>
+                                        <p:attrNameLst>
+                                          <p:attrName>style.visibility</p:attrName>
+                                        </p:attrNameLst>
+                                      </p:cBhvr>
+                                      <p:to>
+                                        <p:strVal val="visible"/>
+                                      </p:to>
+                                    </p:set>
+                                    <p:animEffect transition="in" filter="fade">
+                                      <p:cBhvr>
+                                        <p:cTn id="51" dur="450"/>
+                                        <p:tgtEl>
+                                          <p:spTgt spid="11"/>
+                                        </p:tgtEl>
+                                      </p:cBhvr>
+                                    </p:animEffect>
+                                    <p:anim calcmode="lin" valueType="num">
+                                      <p:cBhvr additive="base">
+                                        <p:cTn id="52" dur="450" fill="hold"/>
+                                        <p:tgtEl>
+                                          <p:spTgt spid="11"/>
+                                        </p:tgtEl>
+                                        <p:attrNameLst>
+                                          <p:attrName>ppt_y</p:attrName>
+                                        </p:attrNameLst>
+                                      </p:cBhvr>
+                                      <p:tavLst>
+                                        <p:tav tm="0">
+                                          <p:val>
+                                            <p:strVal val="#ppt_y+0.025"/>
+                                          </p:val>
+                                        </p:tav>
+                                        <p:tav tm="100000">
+                                          <p:val>
+                                            <p:strVal val="#ppt_y"/>
+                                          </p:val>
+                                        </p:tav>
+                                      </p:tavLst>
+                                    </p:anim>
+                                  </p:childTnLst>
+                                </p:cTn>
+                              </p:par>
+                              <p:par>
+                                <p:cTn id="53" presetID="10" presetClass="entr" presetSubtype="0" fill="hold" grpId="0" nodeType="withEffect">
+                                  <p:stCondLst>
+                                    <p:cond delay="1092"/>
+                                  </p:stCondLst>
+                                  <p:childTnLst>
+                                    <p:set>
+                                      <p:cBhvr>
+                                        <p:cTn id="54" dur="1" fill="hold">
+                                          <p:stCondLst>
+                                            <p:cond delay="0"/>
+                                          </p:stCondLst>
+                                        </p:cTn>
+                                        <p:tgtEl>
+                                          <p:spTgt spid="14"/>
+                                        </p:tgtEl>
+                                        <p:attrNameLst>
+                                          <p:attrName>style.visibility</p:attrName>
+                                        </p:attrNameLst>
+                                      </p:cBhvr>
+                                      <p:to>
+                                        <p:strVal val="visible"/>
+                                      </p:to>
+                                    </p:set>
+                                    <p:animEffect transition="in" filter="fade">
+                                      <p:cBhvr>
+                                        <p:cTn id="55" dur="450"/>
+                                        <p:tgtEl>
+                                          <p:spTgt spid="14"/>
+                                        </p:tgtEl>
+                                      </p:cBhvr>
+                                    </p:animEffect>
+                                    <p:anim calcmode="lin" valueType="num">
+                                      <p:cBhvr additive="base">
+                                        <p:cTn id="56" dur="450" fill="hold"/>
+                                        <p:tgtEl>
+                                          <p:spTgt spid="14"/>
+                                        </p:tgtEl>
+                                        <p:attrNameLst>
+                                          <p:attrName>ppt_y</p:attrName>
+                                        </p:attrNameLst>
+                                      </p:cBhvr>
+                                      <p:tavLst>
+                                        <p:tav tm="0">
+                                          <p:val>
+                                            <p:strVal val="#ppt_y+0.025"/>
+                                          </p:val>
+                                        </p:tav>
+                                        <p:tav tm="100000">
+                                          <p:val>
+                                            <p:strVal val="#ppt_y"/>
+                                          </p:val>
+                                        </p:tav>
+                                      </p:tavLst>
+                                    </p:anim>
+                                  </p:childTnLst>
+                                </p:cTn>
+                              </p:par>
+                            </p:childTnLst>
+                          </p:cTn>
+                        </p:par>
+                      </p:childTnLst>
+                    </p:cTn>
+                  </p:par>
+                </p:childTnLst>
+              </p:cTn>
+              <p:prevCondLst>
+                <p:cond evt="onPrev" delay="0">
+                  <p:tgtEl>
+                    <p:sldTgt/>
+                  </p:tgtEl>
+                </p:cond>
+              </p:prevCondLst>
+              <p:nextCondLst>
+                <p:cond evt="onNext" delay="0">
+                  <p:tgtEl>
+                    <p:sldTgt/>
+                  </p:tgtEl>
+                </p:cond>
+              </p:nextCondLst>
+            </p:seq>
+          </p:childTnLst>
+        </p:cTn>
+      </p:par>
+    </p:tnLst>
+    <p:bldLst>
+      <p:bldP spid="2" grpId="0"/>
+      <p:bldP spid="4" grpId="0"/>
+      <p:bldP spid="7" grpId="0"/>
+      <p:bldP spid="10" grpId="0"/>
+      <p:bldP spid="13" grpId="0"/>
+      <p:bldP spid="5" grpId="0"/>
+      <p:bldP spid="8" grpId="0"/>
+      <p:bldP spid="11" grpId="0"/>
+      <p:bldP spid="14" grpId="0"/>
+    </p:bldLst>
+  </p:timing>
 </p:sld>
 </file>
 

--- a/assets/showcase/aurora-en/Aurora-Buds.pptx
+++ b/assets/showcase/aurora-en/Aurora-Buds.pptx
@@ -1940,8 +1940,8 @@
   <p:clrMapOvr>
     <a:masterClrMapping/>
   </p:clrMapOvr>
-  <p:transition xmlns:p14="http://schemas.microsoft.com/office/powerpoint/2010/main" spd="slow" p14:dur="700">
-    <p:fade/>
+  <p:transition xmlns:p14="http://schemas.microsoft.com/office/powerpoint/2010/main" spd="slow" p14:dur="820">
+    <p:fade thruBlk="1"/>
   </p:transition>
   <p:timing xmlns:p="http://schemas.openxmlformats.org/presentationml/2006/main">
     <p:tnLst>
@@ -1980,7 +1980,7 @@
                                           </p:stCondLst>
                                         </p:cTn>
                                         <p:tgtEl>
-                                          <p:spTgt spid="2"/>
+                                          <p:spTgt spid="3"/>
                                         </p:tgtEl>
                                         <p:attrNameLst>
                                           <p:attrName>style.visibility</p:attrName>
@@ -1992,42 +1992,29 @@
                                     </p:set>
                                     <p:animEffect transition="in" filter="fade">
                                       <p:cBhvr>
-                                        <p:cTn id="7" dur="450"/>
-                                        <p:tgtEl>
-                                          <p:spTgt spid="2"/>
+                                        <p:cTn id="7" dur="600"/>
+                                        <p:tgtEl>
+                                          <p:spTgt spid="3"/>
                                         </p:tgtEl>
                                       </p:cBhvr>
                                     </p:animEffect>
-                                    <p:anim calcmode="lin" valueType="num">
-                                      <p:cBhvr additive="base">
-                                        <p:cTn id="8" dur="450" fill="hold"/>
-                                        <p:tgtEl>
-                                          <p:spTgt spid="2"/>
-                                        </p:tgtEl>
-                                        <p:attrNameLst>
-                                          <p:attrName>ppt_y</p:attrName>
-                                        </p:attrNameLst>
-                                      </p:cBhvr>
-                                      <p:tavLst>
-                                        <p:tav tm="0">
-                                          <p:val>
-                                            <p:strVal val="#ppt_y+0.025"/>
-                                          </p:val>
-                                        </p:tav>
-                                        <p:tav tm="100000">
-                                          <p:val>
-                                            <p:strVal val="#ppt_y"/>
-                                          </p:val>
-                                        </p:tav>
-                                      </p:tavLst>
-                                    </p:anim>
+                                    <p:animScale>
+                                      <p:cBhvr>
+                                        <p:cTn id="8" dur="600" fill="hold"/>
+                                        <p:tgtEl>
+                                          <p:spTgt spid="3"/>
+                                        </p:tgtEl>
+                                      </p:cBhvr>
+                                      <p:from x="88000" y="88000"/>
+                                      <p:to x="100000" y="100000"/>
+                                    </p:animScale>
                                   </p:childTnLst>
                                 </p:cTn>
                               </p:par>
                               <p:par>
                                 <p:cTn id="9" presetID="10" presetClass="entr" presetSubtype="0" fill="hold" grpId="0" nodeType="withEffect">
                                   <p:stCondLst>
-                                    <p:cond delay="160"/>
+                                    <p:cond delay="200"/>
                                   </p:stCondLst>
                                   <p:childTnLst>
                                     <p:set>
@@ -2038,7 +2025,7 @@
                                           </p:stCondLst>
                                         </p:cTn>
                                         <p:tgtEl>
-                                          <p:spTgt spid="3"/>
+                                          <p:spTgt spid="4"/>
                                         </p:tgtEl>
                                         <p:attrNameLst>
                                           <p:attrName>style.visibility</p:attrName>
@@ -2050,17 +2037,17 @@
                                     </p:set>
                                     <p:animEffect transition="in" filter="fade">
                                       <p:cBhvr>
-                                        <p:cTn id="11" dur="450"/>
-                                        <p:tgtEl>
-                                          <p:spTgt spid="3"/>
+                                        <p:cTn id="11" dur="600"/>
+                                        <p:tgtEl>
+                                          <p:spTgt spid="4"/>
                                         </p:tgtEl>
                                       </p:cBhvr>
                                     </p:animEffect>
                                     <p:anim calcmode="lin" valueType="num">
                                       <p:cBhvr additive="base">
-                                        <p:cTn id="12" dur="450" fill="hold"/>
-                                        <p:tgtEl>
-                                          <p:spTgt spid="3"/>
+                                        <p:cTn id="12" dur="600" fill="hold"/>
+                                        <p:tgtEl>
+                                          <p:spTgt spid="4"/>
                                         </p:tgtEl>
                                         <p:attrNameLst>
                                           <p:attrName>ppt_y</p:attrName>
@@ -2069,7 +2056,7 @@
                                       <p:tavLst>
                                         <p:tav tm="0">
                                           <p:val>
-                                            <p:strVal val="#ppt_y+0.025"/>
+                                            <p:strVal val="#ppt_y+0.04"/>
                                           </p:val>
                                         </p:tav>
                                         <p:tav tm="100000">
@@ -2085,7 +2072,7 @@
                               <p:par>
                                 <p:cTn id="13" presetID="10" presetClass="entr" presetSubtype="0" fill="hold" grpId="0" nodeType="withEffect">
                                   <p:stCondLst>
-                                    <p:cond delay="320"/>
+                                    <p:cond delay="400"/>
                                   </p:stCondLst>
                                   <p:childTnLst>
                                     <p:set>
@@ -2096,7 +2083,7 @@
                                           </p:stCondLst>
                                         </p:cTn>
                                         <p:tgtEl>
-                                          <p:spTgt spid="4"/>
+                                          <p:spTgt spid="2"/>
                                         </p:tgtEl>
                                         <p:attrNameLst>
                                           <p:attrName>style.visibility</p:attrName>
@@ -2108,17 +2095,17 @@
                                     </p:set>
                                     <p:animEffect transition="in" filter="fade">
                                       <p:cBhvr>
-                                        <p:cTn id="15" dur="450"/>
-                                        <p:tgtEl>
-                                          <p:spTgt spid="4"/>
+                                        <p:cTn id="15" dur="600"/>
+                                        <p:tgtEl>
+                                          <p:spTgt spid="2"/>
                                         </p:tgtEl>
                                       </p:cBhvr>
                                     </p:animEffect>
                                     <p:anim calcmode="lin" valueType="num">
                                       <p:cBhvr additive="base">
-                                        <p:cTn id="16" dur="450" fill="hold"/>
-                                        <p:tgtEl>
-                                          <p:spTgt spid="4"/>
+                                        <p:cTn id="16" dur="600" fill="hold"/>
+                                        <p:tgtEl>
+                                          <p:spTgt spid="2"/>
                                         </p:tgtEl>
                                         <p:attrNameLst>
                                           <p:attrName>ppt_y</p:attrName>
@@ -2127,7 +2114,7 @@
                                       <p:tavLst>
                                         <p:tav tm="0">
                                           <p:val>
-                                            <p:strVal val="#ppt_y+0.025"/>
+                                            <p:strVal val="#ppt_y+0.04"/>
                                           </p:val>
                                         </p:tav>
                                         <p:tav tm="100000">
@@ -2143,7 +2130,7 @@
                               <p:par>
                                 <p:cTn id="17" presetID="10" presetClass="entr" presetSubtype="0" fill="hold" grpId="0" nodeType="withEffect">
                                   <p:stCondLst>
-                                    <p:cond delay="480"/>
+                                    <p:cond delay="600"/>
                                   </p:stCondLst>
                                   <p:childTnLst>
                                     <p:set>
@@ -2166,7 +2153,7 @@
                                     </p:set>
                                     <p:animEffect transition="in" filter="fade">
                                       <p:cBhvr>
-                                        <p:cTn id="19" dur="450"/>
+                                        <p:cTn id="19" dur="600"/>
                                         <p:tgtEl>
                                           <p:spTgt spid="5"/>
                                         </p:tgtEl>
@@ -2174,7 +2161,7 @@
                                     </p:animEffect>
                                     <p:anim calcmode="lin" valueType="num">
                                       <p:cBhvr additive="base">
-                                        <p:cTn id="20" dur="450" fill="hold"/>
+                                        <p:cTn id="20" dur="600" fill="hold"/>
                                         <p:tgtEl>
                                           <p:spTgt spid="5"/>
                                         </p:tgtEl>
@@ -2185,7 +2172,7 @@
                                       <p:tavLst>
                                         <p:tav tm="0">
                                           <p:val>
-                                            <p:strVal val="#ppt_y+0.025"/>
+                                            <p:strVal val="#ppt_y+0.04"/>
                                           </p:val>
                                         </p:tav>
                                         <p:tav tm="100000">
@@ -2226,9 +2213,9 @@
       </p:par>
     </p:tnLst>
     <p:bldLst>
-      <p:bldP spid="2" grpId="0"/>
       <p:bldP spid="3" grpId="0"/>
       <p:bldP spid="4" grpId="0"/>
+      <p:bldP spid="2" grpId="0"/>
       <p:bldP spid="5" grpId="0"/>
     </p:bldLst>
   </p:timing>
@@ -2434,8 +2421,8 @@
   <p:clrMapOvr>
     <a:masterClrMapping/>
   </p:clrMapOvr>
-  <p:transition xmlns:p14="http://schemas.microsoft.com/office/powerpoint/2010/main" spd="slow" p14:dur="700">
-    <p:fade/>
+  <p:transition xmlns:p14="http://schemas.microsoft.com/office/powerpoint/2010/main" spd="slow" p14:dur="820">
+    <p:fade thruBlk="1"/>
   </p:transition>
   <p:timing xmlns:p="http://schemas.openxmlformats.org/presentationml/2006/main">
     <p:tnLst>
@@ -2474,7 +2461,7 @@
                                           </p:stCondLst>
                                         </p:cTn>
                                         <p:tgtEl>
-                                          <p:spTgt spid="2"/>
+                                          <p:spTgt spid="3"/>
                                         </p:tgtEl>
                                         <p:attrNameLst>
                                           <p:attrName>style.visibility</p:attrName>
@@ -2486,17 +2473,17 @@
                                     </p:set>
                                     <p:animEffect transition="in" filter="fade">
                                       <p:cBhvr>
-                                        <p:cTn id="7" dur="450"/>
-                                        <p:tgtEl>
-                                          <p:spTgt spid="2"/>
+                                        <p:cTn id="7" dur="600"/>
+                                        <p:tgtEl>
+                                          <p:spTgt spid="3"/>
                                         </p:tgtEl>
                                       </p:cBhvr>
                                     </p:animEffect>
                                     <p:anim calcmode="lin" valueType="num">
                                       <p:cBhvr additive="base">
-                                        <p:cTn id="8" dur="450" fill="hold"/>
-                                        <p:tgtEl>
-                                          <p:spTgt spid="2"/>
+                                        <p:cTn id="8" dur="600" fill="hold"/>
+                                        <p:tgtEl>
+                                          <p:spTgt spid="3"/>
                                         </p:tgtEl>
                                         <p:attrNameLst>
                                           <p:attrName>ppt_y</p:attrName>
@@ -2505,7 +2492,7 @@
                                       <p:tavLst>
                                         <p:tav tm="0">
                                           <p:val>
-                                            <p:strVal val="#ppt_y+0.025"/>
+                                            <p:strVal val="#ppt_y+0.04"/>
                                           </p:val>
                                         </p:tav>
                                         <p:tav tm="100000">
@@ -2521,7 +2508,7 @@
                               <p:par>
                                 <p:cTn id="9" presetID="10" presetClass="entr" presetSubtype="0" fill="hold" grpId="0" nodeType="withEffect">
                                   <p:stCondLst>
-                                    <p:cond delay="160"/>
+                                    <p:cond delay="200"/>
                                   </p:stCondLst>
                                   <p:childTnLst>
                                     <p:set>
@@ -2532,7 +2519,7 @@
                                           </p:stCondLst>
                                         </p:cTn>
                                         <p:tgtEl>
-                                          <p:spTgt spid="3"/>
+                                          <p:spTgt spid="2"/>
                                         </p:tgtEl>
                                         <p:attrNameLst>
                                           <p:attrName>style.visibility</p:attrName>
@@ -2544,42 +2531,29 @@
                                     </p:set>
                                     <p:animEffect transition="in" filter="fade">
                                       <p:cBhvr>
-                                        <p:cTn id="11" dur="450"/>
-                                        <p:tgtEl>
-                                          <p:spTgt spid="3"/>
+                                        <p:cTn id="11" dur="600"/>
+                                        <p:tgtEl>
+                                          <p:spTgt spid="2"/>
                                         </p:tgtEl>
                                       </p:cBhvr>
                                     </p:animEffect>
-                                    <p:anim calcmode="lin" valueType="num">
-                                      <p:cBhvr additive="base">
-                                        <p:cTn id="12" dur="450" fill="hold"/>
-                                        <p:tgtEl>
-                                          <p:spTgt spid="3"/>
-                                        </p:tgtEl>
-                                        <p:attrNameLst>
-                                          <p:attrName>ppt_y</p:attrName>
-                                        </p:attrNameLst>
-                                      </p:cBhvr>
-                                      <p:tavLst>
-                                        <p:tav tm="0">
-                                          <p:val>
-                                            <p:strVal val="#ppt_y+0.025"/>
-                                          </p:val>
-                                        </p:tav>
-                                        <p:tav tm="100000">
-                                          <p:val>
-                                            <p:strVal val="#ppt_y"/>
-                                          </p:val>
-                                        </p:tav>
-                                      </p:tavLst>
-                                    </p:anim>
+                                    <p:animScale>
+                                      <p:cBhvr>
+                                        <p:cTn id="12" dur="600" fill="hold"/>
+                                        <p:tgtEl>
+                                          <p:spTgt spid="2"/>
+                                        </p:tgtEl>
+                                      </p:cBhvr>
+                                      <p:from x="88000" y="88000"/>
+                                      <p:to x="100000" y="100000"/>
+                                    </p:animScale>
                                   </p:childTnLst>
                                 </p:cTn>
                               </p:par>
                               <p:par>
                                 <p:cTn id="13" presetID="10" presetClass="entr" presetSubtype="0" fill="hold" grpId="0" nodeType="withEffect">
                                   <p:stCondLst>
-                                    <p:cond delay="320"/>
+                                    <p:cond delay="400"/>
                                   </p:stCondLst>
                                   <p:childTnLst>
                                     <p:set>
@@ -2602,7 +2576,7 @@
                                     </p:set>
                                     <p:animEffect transition="in" filter="fade">
                                       <p:cBhvr>
-                                        <p:cTn id="15" dur="450"/>
+                                        <p:cTn id="15" dur="600"/>
                                         <p:tgtEl>
                                           <p:spTgt spid="4"/>
                                         </p:tgtEl>
@@ -2610,7 +2584,7 @@
                                     </p:animEffect>
                                     <p:anim calcmode="lin" valueType="num">
                                       <p:cBhvr additive="base">
-                                        <p:cTn id="16" dur="450" fill="hold"/>
+                                        <p:cTn id="16" dur="600" fill="hold"/>
                                         <p:tgtEl>
                                           <p:spTgt spid="4"/>
                                         </p:tgtEl>
@@ -2621,7 +2595,7 @@
                                       <p:tavLst>
                                         <p:tav tm="0">
                                           <p:val>
-                                            <p:strVal val="#ppt_y+0.025"/>
+                                            <p:strVal val="#ppt_y+0.04"/>
                                           </p:val>
                                         </p:tav>
                                         <p:tav tm="100000">
@@ -2637,7 +2611,7 @@
                               <p:par>
                                 <p:cTn id="17" presetID="10" presetClass="entr" presetSubtype="0" fill="hold" grpId="0" nodeType="withEffect">
                                   <p:stCondLst>
-                                    <p:cond delay="480"/>
+                                    <p:cond delay="600"/>
                                   </p:stCondLst>
                                   <p:childTnLst>
                                     <p:set>
@@ -2660,7 +2634,7 @@
                                     </p:set>
                                     <p:animEffect transition="in" filter="fade">
                                       <p:cBhvr>
-                                        <p:cTn id="19" dur="450"/>
+                                        <p:cTn id="19" dur="600"/>
                                         <p:tgtEl>
                                           <p:spTgt spid="5"/>
                                         </p:tgtEl>
@@ -2668,7 +2642,7 @@
                                     </p:animEffect>
                                     <p:anim calcmode="lin" valueType="num">
                                       <p:cBhvr additive="base">
-                                        <p:cTn id="20" dur="450" fill="hold"/>
+                                        <p:cTn id="20" dur="600" fill="hold"/>
                                         <p:tgtEl>
                                           <p:spTgt spid="5"/>
                                         </p:tgtEl>
@@ -2679,7 +2653,7 @@
                                       <p:tavLst>
                                         <p:tav tm="0">
                                           <p:val>
-                                            <p:strVal val="#ppt_y+0.025"/>
+                                            <p:strVal val="#ppt_y+0.04"/>
                                           </p:val>
                                         </p:tav>
                                         <p:tav tm="100000">
@@ -2720,8 +2694,8 @@
       </p:par>
     </p:tnLst>
     <p:bldLst>
+      <p:bldP spid="3" grpId="0"/>
       <p:bldP spid="2" grpId="0"/>
-      <p:bldP spid="3" grpId="0"/>
       <p:bldP spid="4" grpId="0"/>
       <p:bldP spid="5" grpId="0"/>
     </p:bldLst>
@@ -2889,8 +2863,8 @@
   <p:clrMapOvr>
     <a:masterClrMapping/>
   </p:clrMapOvr>
-  <p:transition xmlns:p14="http://schemas.microsoft.com/office/powerpoint/2010/main" spd="slow" p14:dur="700">
-    <p:fade/>
+  <p:transition xmlns:p14="http://schemas.microsoft.com/office/powerpoint/2010/main" spd="slow" p14:dur="820">
+    <p:fade thruBlk="1"/>
   </p:transition>
   <p:timing xmlns:p="http://schemas.openxmlformats.org/presentationml/2006/main">
     <p:tnLst>
@@ -2941,7 +2915,7 @@
                                     </p:set>
                                     <p:animEffect transition="in" filter="fade">
                                       <p:cBhvr>
-                                        <p:cTn id="7" dur="450"/>
+                                        <p:cTn id="7" dur="600"/>
                                         <p:tgtEl>
                                           <p:spTgt spid="2"/>
                                         </p:tgtEl>
@@ -2949,7 +2923,7 @@
                                     </p:animEffect>
                                     <p:anim calcmode="lin" valueType="num">
                                       <p:cBhvr additive="base">
-                                        <p:cTn id="8" dur="450" fill="hold"/>
+                                        <p:cTn id="8" dur="600" fill="hold"/>
                                         <p:tgtEl>
                                           <p:spTgt spid="2"/>
                                         </p:tgtEl>
@@ -2960,7 +2934,7 @@
                                       <p:tavLst>
                                         <p:tav tm="0">
                                           <p:val>
-                                            <p:strVal val="#ppt_y+0.025"/>
+                                            <p:strVal val="#ppt_y+0.04"/>
                                           </p:val>
                                         </p:tav>
                                         <p:tav tm="100000">
@@ -2976,7 +2950,7 @@
                               <p:par>
                                 <p:cTn id="9" presetID="10" presetClass="entr" presetSubtype="0" fill="hold" grpId="0" nodeType="withEffect">
                                   <p:stCondLst>
-                                    <p:cond delay="160"/>
+                                    <p:cond delay="200"/>
                                   </p:stCondLst>
                                   <p:childTnLst>
                                     <p:set>
@@ -2999,7 +2973,7 @@
                                     </p:set>
                                     <p:animEffect transition="in" filter="fade">
                                       <p:cBhvr>
-                                        <p:cTn id="11" dur="450"/>
+                                        <p:cTn id="11" dur="600"/>
                                         <p:tgtEl>
                                           <p:spTgt spid="3"/>
                                         </p:tgtEl>
@@ -3007,7 +2981,7 @@
                                     </p:animEffect>
                                     <p:anim calcmode="lin" valueType="num">
                                       <p:cBhvr additive="base">
-                                        <p:cTn id="12" dur="450" fill="hold"/>
+                                        <p:cTn id="12" dur="600" fill="hold"/>
                                         <p:tgtEl>
                                           <p:spTgt spid="3"/>
                                         </p:tgtEl>
@@ -3018,7 +2992,7 @@
                                       <p:tavLst>
                                         <p:tav tm="0">
                                           <p:val>
-                                            <p:strVal val="#ppt_y+0.025"/>
+                                            <p:strVal val="#ppt_y+0.04"/>
                                           </p:val>
                                         </p:tav>
                                         <p:tav tm="100000">
@@ -3034,7 +3008,7 @@
                               <p:par>
                                 <p:cTn id="13" presetID="10" presetClass="entr" presetSubtype="0" fill="hold" grpId="0" nodeType="withEffect">
                                   <p:stCondLst>
-                                    <p:cond delay="320"/>
+                                    <p:cond delay="400"/>
                                   </p:stCondLst>
                                   <p:childTnLst>
                                     <p:set>
@@ -3057,7 +3031,7 @@
                                     </p:set>
                                     <p:animEffect transition="in" filter="fade">
                                       <p:cBhvr>
-                                        <p:cTn id="15" dur="450"/>
+                                        <p:cTn id="15" dur="600"/>
                                         <p:tgtEl>
                                           <p:spTgt spid="4"/>
                                         </p:tgtEl>
@@ -3065,7 +3039,7 @@
                                     </p:animEffect>
                                     <p:anim calcmode="lin" valueType="num">
                                       <p:cBhvr additive="base">
-                                        <p:cTn id="16" dur="450" fill="hold"/>
+                                        <p:cTn id="16" dur="600" fill="hold"/>
                                         <p:tgtEl>
                                           <p:spTgt spid="4"/>
                                         </p:tgtEl>
@@ -3076,7 +3050,7 @@
                                       <p:tavLst>
                                         <p:tav tm="0">
                                           <p:val>
-                                            <p:strVal val="#ppt_y+0.025"/>
+                                            <p:strVal val="#ppt_y+0.04"/>
                                           </p:val>
                                         </p:tav>
                                         <p:tav tm="100000">
@@ -3196,8 +3170,8 @@
   <p:clrMapOvr>
     <a:masterClrMapping/>
   </p:clrMapOvr>
-  <p:transition xmlns:p14="http://schemas.microsoft.com/office/powerpoint/2010/main" spd="slow" p14:dur="700">
-    <p:fade/>
+  <p:transition xmlns:p14="http://schemas.microsoft.com/office/powerpoint/2010/main" spd="slow" p14:dur="820">
+    <p:fade thruBlk="1"/>
   </p:transition>
   <p:timing xmlns:p="http://schemas.openxmlformats.org/presentationml/2006/main">
     <p:tnLst>
@@ -3248,7 +3222,7 @@
                                     </p:set>
                                     <p:animEffect transition="in" filter="fade">
                                       <p:cBhvr>
-                                        <p:cTn id="7" dur="450"/>
+                                        <p:cTn id="7" dur="600"/>
                                         <p:tgtEl>
                                           <p:spTgt spid="2"/>
                                         </p:tgtEl>
@@ -3256,7 +3230,7 @@
                                     </p:animEffect>
                                     <p:anim calcmode="lin" valueType="num">
                                       <p:cBhvr additive="base">
-                                        <p:cTn id="8" dur="450" fill="hold"/>
+                                        <p:cTn id="8" dur="600" fill="hold"/>
                                         <p:tgtEl>
                                           <p:spTgt spid="2"/>
                                         </p:tgtEl>
@@ -3267,7 +3241,7 @@
                                       <p:tavLst>
                                         <p:tav tm="0">
                                           <p:val>
-                                            <p:strVal val="#ppt_y+0.025"/>
+                                            <p:strVal val="#ppt_y+0.04"/>
                                           </p:val>
                                         </p:tav>
                                         <p:tav tm="100000">
@@ -3460,8 +3434,8 @@
   <p:clrMapOvr>
     <a:masterClrMapping/>
   </p:clrMapOvr>
-  <p:transition xmlns:p14="http://schemas.microsoft.com/office/powerpoint/2010/main" spd="slow" p14:dur="700">
-    <p:fade/>
+  <p:transition xmlns:p14="http://schemas.microsoft.com/office/powerpoint/2010/main" spd="slow" p14:dur="820">
+    <p:fade thruBlk="1"/>
   </p:transition>
   <p:timing xmlns:p="http://schemas.openxmlformats.org/presentationml/2006/main">
     <p:tnLst>
@@ -3500,7 +3474,7 @@
                                           </p:stCondLst>
                                         </p:cTn>
                                         <p:tgtEl>
-                                          <p:spTgt spid="2"/>
+                                          <p:spTgt spid="3"/>
                                         </p:tgtEl>
                                         <p:attrNameLst>
                                           <p:attrName>style.visibility</p:attrName>
@@ -3512,17 +3486,17 @@
                                     </p:set>
                                     <p:animEffect transition="in" filter="fade">
                                       <p:cBhvr>
-                                        <p:cTn id="7" dur="450"/>
-                                        <p:tgtEl>
-                                          <p:spTgt spid="2"/>
+                                        <p:cTn id="7" dur="600"/>
+                                        <p:tgtEl>
+                                          <p:spTgt spid="3"/>
                                         </p:tgtEl>
                                       </p:cBhvr>
                                     </p:animEffect>
                                     <p:anim calcmode="lin" valueType="num">
                                       <p:cBhvr additive="base">
-                                        <p:cTn id="8" dur="450" fill="hold"/>
-                                        <p:tgtEl>
-                                          <p:spTgt spid="2"/>
+                                        <p:cTn id="8" dur="600" fill="hold"/>
+                                        <p:tgtEl>
+                                          <p:spTgt spid="3"/>
                                         </p:tgtEl>
                                         <p:attrNameLst>
                                           <p:attrName>ppt_y</p:attrName>
@@ -3531,7 +3505,7 @@
                                       <p:tavLst>
                                         <p:tav tm="0">
                                           <p:val>
-                                            <p:strVal val="#ppt_y+0.025"/>
+                                            <p:strVal val="#ppt_y+0.04"/>
                                           </p:val>
                                         </p:tav>
                                         <p:tav tm="100000">
@@ -3547,7 +3521,7 @@
                               <p:par>
                                 <p:cTn id="9" presetID="10" presetClass="entr" presetSubtype="0" fill="hold" grpId="0" nodeType="withEffect">
                                   <p:stCondLst>
-                                    <p:cond delay="160"/>
+                                    <p:cond delay="200"/>
                                   </p:stCondLst>
                                   <p:childTnLst>
                                     <p:set>
@@ -3558,7 +3532,7 @@
                                           </p:stCondLst>
                                         </p:cTn>
                                         <p:tgtEl>
-                                          <p:spTgt spid="3"/>
+                                          <p:spTgt spid="4"/>
                                         </p:tgtEl>
                                         <p:attrNameLst>
                                           <p:attrName>style.visibility</p:attrName>
@@ -3570,17 +3544,17 @@
                                     </p:set>
                                     <p:animEffect transition="in" filter="fade">
                                       <p:cBhvr>
-                                        <p:cTn id="11" dur="450"/>
-                                        <p:tgtEl>
-                                          <p:spTgt spid="3"/>
+                                        <p:cTn id="11" dur="600"/>
+                                        <p:tgtEl>
+                                          <p:spTgt spid="4"/>
                                         </p:tgtEl>
                                       </p:cBhvr>
                                     </p:animEffect>
                                     <p:anim calcmode="lin" valueType="num">
                                       <p:cBhvr additive="base">
-                                        <p:cTn id="12" dur="450" fill="hold"/>
-                                        <p:tgtEl>
-                                          <p:spTgt spid="3"/>
+                                        <p:cTn id="12" dur="600" fill="hold"/>
+                                        <p:tgtEl>
+                                          <p:spTgt spid="4"/>
                                         </p:tgtEl>
                                         <p:attrNameLst>
                                           <p:attrName>ppt_y</p:attrName>
@@ -3589,7 +3563,7 @@
                                       <p:tavLst>
                                         <p:tav tm="0">
                                           <p:val>
-                                            <p:strVal val="#ppt_y+0.025"/>
+                                            <p:strVal val="#ppt_y+0.04"/>
                                           </p:val>
                                         </p:tav>
                                         <p:tav tm="100000">
@@ -3605,7 +3579,7 @@
                               <p:par>
                                 <p:cTn id="13" presetID="10" presetClass="entr" presetSubtype="0" fill="hold" grpId="0" nodeType="withEffect">
                                   <p:stCondLst>
-                                    <p:cond delay="320"/>
+                                    <p:cond delay="400"/>
                                   </p:stCondLst>
                                   <p:childTnLst>
                                     <p:set>
@@ -3616,7 +3590,7 @@
                                           </p:stCondLst>
                                         </p:cTn>
                                         <p:tgtEl>
-                                          <p:spTgt spid="4"/>
+                                          <p:spTgt spid="2"/>
                                         </p:tgtEl>
                                         <p:attrNameLst>
                                           <p:attrName>style.visibility</p:attrName>
@@ -3628,35 +3602,22 @@
                                     </p:set>
                                     <p:animEffect transition="in" filter="fade">
                                       <p:cBhvr>
-                                        <p:cTn id="15" dur="450"/>
-                                        <p:tgtEl>
-                                          <p:spTgt spid="4"/>
+                                        <p:cTn id="15" dur="600"/>
+                                        <p:tgtEl>
+                                          <p:spTgt spid="2"/>
                                         </p:tgtEl>
                                       </p:cBhvr>
                                     </p:animEffect>
-                                    <p:anim calcmode="lin" valueType="num">
-                                      <p:cBhvr additive="base">
-                                        <p:cTn id="16" dur="450" fill="hold"/>
-                                        <p:tgtEl>
-                                          <p:spTgt spid="4"/>
-                                        </p:tgtEl>
-                                        <p:attrNameLst>
-                                          <p:attrName>ppt_y</p:attrName>
-                                        </p:attrNameLst>
-                                      </p:cBhvr>
-                                      <p:tavLst>
-                                        <p:tav tm="0">
-                                          <p:val>
-                                            <p:strVal val="#ppt_y+0.025"/>
-                                          </p:val>
-                                        </p:tav>
-                                        <p:tav tm="100000">
-                                          <p:val>
-                                            <p:strVal val="#ppt_y"/>
-                                          </p:val>
-                                        </p:tav>
-                                      </p:tavLst>
-                                    </p:anim>
+                                    <p:animScale>
+                                      <p:cBhvr>
+                                        <p:cTn id="16" dur="600" fill="hold"/>
+                                        <p:tgtEl>
+                                          <p:spTgt spid="2"/>
+                                        </p:tgtEl>
+                                      </p:cBhvr>
+                                      <p:from x="88000" y="88000"/>
+                                      <p:to x="100000" y="100000"/>
+                                    </p:animScale>
                                   </p:childTnLst>
                                 </p:cTn>
                               </p:par>
@@ -3688,9 +3649,9 @@
       </p:par>
     </p:tnLst>
     <p:bldLst>
-      <p:bldP spid="2" grpId="0"/>
       <p:bldP spid="3" grpId="0"/>
       <p:bldP spid="4" grpId="0"/>
+      <p:bldP spid="2" grpId="0"/>
     </p:bldLst>
   </p:timing>
 </p:sld>
@@ -3803,8 +3764,8 @@
   <p:clrMapOvr>
     <a:masterClrMapping/>
   </p:clrMapOvr>
-  <p:transition xmlns:p14="http://schemas.microsoft.com/office/powerpoint/2010/main" spd="slow" p14:dur="700">
-    <p:fade/>
+  <p:transition xmlns:p14="http://schemas.microsoft.com/office/powerpoint/2010/main" spd="slow" p14:dur="820">
+    <p:fade thruBlk="1"/>
   </p:transition>
   <p:timing xmlns:p="http://schemas.openxmlformats.org/presentationml/2006/main">
     <p:tnLst>
@@ -3855,7 +3816,7 @@
                                     </p:set>
                                     <p:animEffect transition="in" filter="fade">
                                       <p:cBhvr>
-                                        <p:cTn id="7" dur="450"/>
+                                        <p:cTn id="7" dur="600"/>
                                         <p:tgtEl>
                                           <p:spTgt spid="2"/>
                                         </p:tgtEl>
@@ -3863,7 +3824,7 @@
                                     </p:animEffect>
                                     <p:anim calcmode="lin" valueType="num">
                                       <p:cBhvr additive="base">
-                                        <p:cTn id="8" dur="450" fill="hold"/>
+                                        <p:cTn id="8" dur="600" fill="hold"/>
                                         <p:tgtEl>
                                           <p:spTgt spid="2"/>
                                         </p:tgtEl>
@@ -3874,7 +3835,7 @@
                                       <p:tavLst>
                                         <p:tav tm="0">
                                           <p:val>
-                                            <p:strVal val="#ppt_y+0.025"/>
+                                            <p:strVal val="#ppt_y+0.04"/>
                                           </p:val>
                                         </p:tav>
                                         <p:tav tm="100000">
@@ -3890,7 +3851,7 @@
                               <p:par>
                                 <p:cTn id="9" presetID="10" presetClass="entr" presetSubtype="0" fill="hold" grpId="0" nodeType="withEffect">
                                   <p:stCondLst>
-                                    <p:cond delay="160"/>
+                                    <p:cond delay="200"/>
                                   </p:stCondLst>
                                   <p:childTnLst>
                                     <p:set>
@@ -3913,7 +3874,7 @@
                                     </p:set>
                                     <p:animEffect transition="in" filter="fade">
                                       <p:cBhvr>
-                                        <p:cTn id="11" dur="450"/>
+                                        <p:cTn id="11" dur="600"/>
                                         <p:tgtEl>
                                           <p:spTgt spid="3"/>
                                         </p:tgtEl>
@@ -3921,7 +3882,7 @@
                                     </p:animEffect>
                                     <p:anim calcmode="lin" valueType="num">
                                       <p:cBhvr additive="base">
-                                        <p:cTn id="12" dur="450" fill="hold"/>
+                                        <p:cTn id="12" dur="600" fill="hold"/>
                                         <p:tgtEl>
                                           <p:spTgt spid="3"/>
                                         </p:tgtEl>
@@ -3932,7 +3893,7 @@
                                       <p:tavLst>
                                         <p:tav tm="0">
                                           <p:val>
-                                            <p:strVal val="#ppt_y+0.025"/>
+                                            <p:strVal val="#ppt_y+0.04"/>
                                           </p:val>
                                         </p:tav>
                                         <p:tav tm="100000">
@@ -4179,8 +4140,8 @@
   <p:clrMapOvr>
     <a:masterClrMapping/>
   </p:clrMapOvr>
-  <p:transition xmlns:p14="http://schemas.microsoft.com/office/powerpoint/2010/main" spd="slow" p14:dur="700">
-    <p:fade/>
+  <p:transition xmlns:p14="http://schemas.microsoft.com/office/powerpoint/2010/main" spd="slow" p14:dur="820">
+    <p:fade thruBlk="1"/>
   </p:transition>
   <p:timing xmlns:p="http://schemas.openxmlformats.org/presentationml/2006/main">
     <p:tnLst>
@@ -4219,7 +4180,7 @@
                                           </p:stCondLst>
                                         </p:cTn>
                                         <p:tgtEl>
-                                          <p:spTgt spid="2"/>
+                                          <p:spTgt spid="4"/>
                                         </p:tgtEl>
                                         <p:attrNameLst>
                                           <p:attrName>style.visibility</p:attrName>
@@ -4231,17 +4192,17 @@
                                     </p:set>
                                     <p:animEffect transition="in" filter="fade">
                                       <p:cBhvr>
-                                        <p:cTn id="7" dur="450"/>
-                                        <p:tgtEl>
-                                          <p:spTgt spid="2"/>
+                                        <p:cTn id="7" dur="600"/>
+                                        <p:tgtEl>
+                                          <p:spTgt spid="4"/>
                                         </p:tgtEl>
                                       </p:cBhvr>
                                     </p:animEffect>
                                     <p:anim calcmode="lin" valueType="num">
                                       <p:cBhvr additive="base">
-                                        <p:cTn id="8" dur="450" fill="hold"/>
-                                        <p:tgtEl>
-                                          <p:spTgt spid="2"/>
+                                        <p:cTn id="8" dur="600" fill="hold"/>
+                                        <p:tgtEl>
+                                          <p:spTgt spid="4"/>
                                         </p:tgtEl>
                                         <p:attrNameLst>
                                           <p:attrName>ppt_y</p:attrName>
@@ -4250,7 +4211,7 @@
                                       <p:tavLst>
                                         <p:tav tm="0">
                                           <p:val>
-                                            <p:strVal val="#ppt_y+0.025"/>
+                                            <p:strVal val="#ppt_y+0.04"/>
                                           </p:val>
                                         </p:tav>
                                         <p:tav tm="100000">
@@ -4266,7 +4227,7 @@
                               <p:par>
                                 <p:cTn id="9" presetID="10" presetClass="entr" presetSubtype="0" fill="hold" grpId="0" nodeType="withEffect">
                                   <p:stCondLst>
-                                    <p:cond delay="160"/>
+                                    <p:cond delay="200"/>
                                   </p:stCondLst>
                                   <p:childTnLst>
                                     <p:set>
@@ -4289,42 +4250,29 @@
                                     </p:set>
                                     <p:animEffect transition="in" filter="fade">
                                       <p:cBhvr>
-                                        <p:cTn id="11" dur="450"/>
+                                        <p:cTn id="11" dur="600"/>
                                         <p:tgtEl>
                                           <p:spTgt spid="3"/>
                                         </p:tgtEl>
                                       </p:cBhvr>
                                     </p:animEffect>
-                                    <p:anim calcmode="lin" valueType="num">
-                                      <p:cBhvr additive="base">
-                                        <p:cTn id="12" dur="450" fill="hold"/>
+                                    <p:animScale>
+                                      <p:cBhvr>
+                                        <p:cTn id="12" dur="600" fill="hold"/>
                                         <p:tgtEl>
                                           <p:spTgt spid="3"/>
                                         </p:tgtEl>
-                                        <p:attrNameLst>
-                                          <p:attrName>ppt_y</p:attrName>
-                                        </p:attrNameLst>
-                                      </p:cBhvr>
-                                      <p:tavLst>
-                                        <p:tav tm="0">
-                                          <p:val>
-                                            <p:strVal val="#ppt_y+0.025"/>
-                                          </p:val>
-                                        </p:tav>
-                                        <p:tav tm="100000">
-                                          <p:val>
-                                            <p:strVal val="#ppt_y"/>
-                                          </p:val>
-                                        </p:tav>
-                                      </p:tavLst>
-                                    </p:anim>
+                                      </p:cBhvr>
+                                      <p:from x="88000" y="88000"/>
+                                      <p:to x="100000" y="100000"/>
+                                    </p:animScale>
                                   </p:childTnLst>
                                 </p:cTn>
                               </p:par>
                               <p:par>
                                 <p:cTn id="13" presetID="10" presetClass="entr" presetSubtype="0" fill="hold" grpId="0" nodeType="withEffect">
                                   <p:stCondLst>
-                                    <p:cond delay="320"/>
+                                    <p:cond delay="400"/>
                                   </p:stCondLst>
                                   <p:childTnLst>
                                     <p:set>
@@ -4335,7 +4283,7 @@
                                           </p:stCondLst>
                                         </p:cTn>
                                         <p:tgtEl>
-                                          <p:spTgt spid="4"/>
+                                          <p:spTgt spid="5"/>
                                         </p:tgtEl>
                                         <p:attrNameLst>
                                           <p:attrName>style.visibility</p:attrName>
@@ -4347,17 +4295,17 @@
                                     </p:set>
                                     <p:animEffect transition="in" filter="fade">
                                       <p:cBhvr>
-                                        <p:cTn id="15" dur="450"/>
-                                        <p:tgtEl>
-                                          <p:spTgt spid="4"/>
+                                        <p:cTn id="15" dur="600"/>
+                                        <p:tgtEl>
+                                          <p:spTgt spid="5"/>
                                         </p:tgtEl>
                                       </p:cBhvr>
                                     </p:animEffect>
                                     <p:anim calcmode="lin" valueType="num">
                                       <p:cBhvr additive="base">
-                                        <p:cTn id="16" dur="450" fill="hold"/>
-                                        <p:tgtEl>
-                                          <p:spTgt spid="4"/>
+                                        <p:cTn id="16" dur="600" fill="hold"/>
+                                        <p:tgtEl>
+                                          <p:spTgt spid="5"/>
                                         </p:tgtEl>
                                         <p:attrNameLst>
                                           <p:attrName>ppt_y</p:attrName>
@@ -4366,7 +4314,7 @@
                                       <p:tavLst>
                                         <p:tav tm="0">
                                           <p:val>
-                                            <p:strVal val="#ppt_y+0.025"/>
+                                            <p:strVal val="#ppt_y+0.04"/>
                                           </p:val>
                                         </p:tav>
                                         <p:tav tm="100000">
@@ -4382,7 +4330,7 @@
                               <p:par>
                                 <p:cTn id="17" presetID="10" presetClass="entr" presetSubtype="0" fill="hold" grpId="0" nodeType="withEffect">
                                   <p:stCondLst>
-                                    <p:cond delay="480"/>
+                                    <p:cond delay="600"/>
                                   </p:stCondLst>
                                   <p:childTnLst>
                                     <p:set>
@@ -4393,7 +4341,7 @@
                                           </p:stCondLst>
                                         </p:cTn>
                                         <p:tgtEl>
-                                          <p:spTgt spid="5"/>
+                                          <p:spTgt spid="2"/>
                                         </p:tgtEl>
                                         <p:attrNameLst>
                                           <p:attrName>style.visibility</p:attrName>
@@ -4405,17 +4353,17 @@
                                     </p:set>
                                     <p:animEffect transition="in" filter="fade">
                                       <p:cBhvr>
-                                        <p:cTn id="19" dur="450"/>
-                                        <p:tgtEl>
-                                          <p:spTgt spid="5"/>
+                                        <p:cTn id="19" dur="600"/>
+                                        <p:tgtEl>
+                                          <p:spTgt spid="2"/>
                                         </p:tgtEl>
                                       </p:cBhvr>
                                     </p:animEffect>
                                     <p:anim calcmode="lin" valueType="num">
                                       <p:cBhvr additive="base">
-                                        <p:cTn id="20" dur="450" fill="hold"/>
-                                        <p:tgtEl>
-                                          <p:spTgt spid="5"/>
+                                        <p:cTn id="20" dur="600" fill="hold"/>
+                                        <p:tgtEl>
+                                          <p:spTgt spid="2"/>
                                         </p:tgtEl>
                                         <p:attrNameLst>
                                           <p:attrName>ppt_y</p:attrName>
@@ -4424,7 +4372,7 @@
                                       <p:tavLst>
                                         <p:tav tm="0">
                                           <p:val>
-                                            <p:strVal val="#ppt_y+0.025"/>
+                                            <p:strVal val="#ppt_y+0.04"/>
                                           </p:val>
                                         </p:tav>
                                         <p:tav tm="100000">
@@ -4465,10 +4413,10 @@
       </p:par>
     </p:tnLst>
     <p:bldLst>
+      <p:bldP spid="4" grpId="0"/>
+      <p:bldP spid="3" grpId="0"/>
+      <p:bldP spid="5" grpId="0"/>
       <p:bldP spid="2" grpId="0"/>
-      <p:bldP spid="3" grpId="0"/>
-      <p:bldP spid="4" grpId="0"/>
-      <p:bldP spid="5" grpId="0"/>
     </p:bldLst>
   </p:timing>
 </p:sld>
@@ -4785,8 +4733,8 @@
   <p:clrMapOvr>
     <a:masterClrMapping/>
   </p:clrMapOvr>
-  <p:transition xmlns:p14="http://schemas.microsoft.com/office/powerpoint/2010/main" spd="slow" p14:dur="700">
-    <p:fade/>
+  <p:transition xmlns:p14="http://schemas.microsoft.com/office/powerpoint/2010/main" spd="slow" p14:dur="820">
+    <p:fade thruBlk="1"/>
   </p:transition>
   <p:timing xmlns:p="http://schemas.openxmlformats.org/presentationml/2006/main">
     <p:tnLst>
@@ -4825,7 +4773,7 @@
                                           </p:stCondLst>
                                         </p:cTn>
                                         <p:tgtEl>
-                                          <p:spTgt spid="2"/>
+                                          <p:spTgt spid="3"/>
                                         </p:tgtEl>
                                         <p:attrNameLst>
                                           <p:attrName>style.visibility</p:attrName>
@@ -4837,17 +4785,17 @@
                                     </p:set>
                                     <p:animEffect transition="in" filter="fade">
                                       <p:cBhvr>
-                                        <p:cTn id="7" dur="450"/>
-                                        <p:tgtEl>
-                                          <p:spTgt spid="2"/>
+                                        <p:cTn id="7" dur="600"/>
+                                        <p:tgtEl>
+                                          <p:spTgt spid="3"/>
                                         </p:tgtEl>
                                       </p:cBhvr>
                                     </p:animEffect>
                                     <p:anim calcmode="lin" valueType="num">
                                       <p:cBhvr additive="base">
-                                        <p:cTn id="8" dur="450" fill="hold"/>
-                                        <p:tgtEl>
-                                          <p:spTgt spid="2"/>
+                                        <p:cTn id="8" dur="600" fill="hold"/>
+                                        <p:tgtEl>
+                                          <p:spTgt spid="3"/>
                                         </p:tgtEl>
                                         <p:attrNameLst>
                                           <p:attrName>ppt_y</p:attrName>
@@ -4856,7 +4804,7 @@
                                       <p:tavLst>
                                         <p:tav tm="0">
                                           <p:val>
-                                            <p:strVal val="#ppt_y+0.025"/>
+                                            <p:strVal val="#ppt_y+0.04"/>
                                           </p:val>
                                         </p:tav>
                                         <p:tav tm="100000">
@@ -4872,7 +4820,7 @@
                               <p:par>
                                 <p:cTn id="9" presetID="10" presetClass="entr" presetSubtype="0" fill="hold" grpId="0" nodeType="withEffect">
                                   <p:stCondLst>
-                                    <p:cond delay="160"/>
+                                    <p:cond delay="200"/>
                                   </p:stCondLst>
                                   <p:childTnLst>
                                     <p:set>
@@ -4883,7 +4831,7 @@
                                           </p:stCondLst>
                                         </p:cTn>
                                         <p:tgtEl>
-                                          <p:spTgt spid="3"/>
+                                          <p:spTgt spid="5"/>
                                         </p:tgtEl>
                                         <p:attrNameLst>
                                           <p:attrName>style.visibility</p:attrName>
@@ -4895,17 +4843,17 @@
                                     </p:set>
                                     <p:animEffect transition="in" filter="fade">
                                       <p:cBhvr>
-                                        <p:cTn id="11" dur="450"/>
-                                        <p:tgtEl>
-                                          <p:spTgt spid="3"/>
+                                        <p:cTn id="11" dur="600"/>
+                                        <p:tgtEl>
+                                          <p:spTgt spid="5"/>
                                         </p:tgtEl>
                                       </p:cBhvr>
                                     </p:animEffect>
                                     <p:anim calcmode="lin" valueType="num">
                                       <p:cBhvr additive="base">
-                                        <p:cTn id="12" dur="450" fill="hold"/>
-                                        <p:tgtEl>
-                                          <p:spTgt spid="3"/>
+                                        <p:cTn id="12" dur="600" fill="hold"/>
+                                        <p:tgtEl>
+                                          <p:spTgt spid="5"/>
                                         </p:tgtEl>
                                         <p:attrNameLst>
                                           <p:attrName>ppt_y</p:attrName>
@@ -4914,7 +4862,7 @@
                                       <p:tavLst>
                                         <p:tav tm="0">
                                           <p:val>
-                                            <p:strVal val="#ppt_y+0.025"/>
+                                            <p:strVal val="#ppt_y+0.04"/>
                                           </p:val>
                                         </p:tav>
                                         <p:tav tm="100000">
@@ -4930,7 +4878,7 @@
                               <p:par>
                                 <p:cTn id="13" presetID="10" presetClass="entr" presetSubtype="0" fill="hold" grpId="0" nodeType="withEffect">
                                   <p:stCondLst>
-                                    <p:cond delay="320"/>
+                                    <p:cond delay="400"/>
                                   </p:stCondLst>
                                   <p:childTnLst>
                                     <p:set>
@@ -4941,7 +4889,7 @@
                                           </p:stCondLst>
                                         </p:cTn>
                                         <p:tgtEl>
-                                          <p:spTgt spid="5"/>
+                                          <p:spTgt spid="7"/>
                                         </p:tgtEl>
                                         <p:attrNameLst>
                                           <p:attrName>style.visibility</p:attrName>
@@ -4953,17 +4901,17 @@
                                     </p:set>
                                     <p:animEffect transition="in" filter="fade">
                                       <p:cBhvr>
-                                        <p:cTn id="15" dur="450"/>
-                                        <p:tgtEl>
-                                          <p:spTgt spid="5"/>
+                                        <p:cTn id="15" dur="600"/>
+                                        <p:tgtEl>
+                                          <p:spTgt spid="7"/>
                                         </p:tgtEl>
                                       </p:cBhvr>
                                     </p:animEffect>
                                     <p:anim calcmode="lin" valueType="num">
                                       <p:cBhvr additive="base">
-                                        <p:cTn id="16" dur="450" fill="hold"/>
-                                        <p:tgtEl>
-                                          <p:spTgt spid="5"/>
+                                        <p:cTn id="16" dur="600" fill="hold"/>
+                                        <p:tgtEl>
+                                          <p:spTgt spid="7"/>
                                         </p:tgtEl>
                                         <p:attrNameLst>
                                           <p:attrName>ppt_y</p:attrName>
@@ -4972,7 +4920,7 @@
                                       <p:tavLst>
                                         <p:tav tm="0">
                                           <p:val>
-                                            <p:strVal val="#ppt_y+0.025"/>
+                                            <p:strVal val="#ppt_y+0.04"/>
                                           </p:val>
                                         </p:tav>
                                         <p:tav tm="100000">
@@ -4988,7 +4936,7 @@
                               <p:par>
                                 <p:cTn id="17" presetID="10" presetClass="entr" presetSubtype="0" fill="hold" grpId="0" nodeType="withEffect">
                                   <p:stCondLst>
-                                    <p:cond delay="480"/>
+                                    <p:cond delay="600"/>
                                   </p:stCondLst>
                                   <p:childTnLst>
                                     <p:set>
@@ -4999,7 +4947,7 @@
                                           </p:stCondLst>
                                         </p:cTn>
                                         <p:tgtEl>
-                                          <p:spTgt spid="7"/>
+                                          <p:spTgt spid="4"/>
                                         </p:tgtEl>
                                         <p:attrNameLst>
                                           <p:attrName>style.visibility</p:attrName>
@@ -5011,17 +4959,17 @@
                                     </p:set>
                                     <p:animEffect transition="in" filter="fade">
                                       <p:cBhvr>
-                                        <p:cTn id="19" dur="450"/>
-                                        <p:tgtEl>
-                                          <p:spTgt spid="7"/>
+                                        <p:cTn id="19" dur="600"/>
+                                        <p:tgtEl>
+                                          <p:spTgt spid="4"/>
                                         </p:tgtEl>
                                       </p:cBhvr>
                                     </p:animEffect>
                                     <p:anim calcmode="lin" valueType="num">
                                       <p:cBhvr additive="base">
-                                        <p:cTn id="20" dur="450" fill="hold"/>
-                                        <p:tgtEl>
-                                          <p:spTgt spid="7"/>
+                                        <p:cTn id="20" dur="600" fill="hold"/>
+                                        <p:tgtEl>
+                                          <p:spTgt spid="4"/>
                                         </p:tgtEl>
                                         <p:attrNameLst>
                                           <p:attrName>ppt_y</p:attrName>
@@ -5030,7 +4978,7 @@
                                       <p:tavLst>
                                         <p:tav tm="0">
                                           <p:val>
-                                            <p:strVal val="#ppt_y+0.025"/>
+                                            <p:strVal val="#ppt_y+0.04"/>
                                           </p:val>
                                         </p:tav>
                                         <p:tav tm="100000">
@@ -5046,7 +4994,7 @@
                               <p:par>
                                 <p:cTn id="21" presetID="10" presetClass="entr" presetSubtype="0" fill="hold" grpId="0" nodeType="withEffect">
                                   <p:stCondLst>
-                                    <p:cond delay="640"/>
+                                    <p:cond delay="800"/>
                                   </p:stCondLst>
                                   <p:childTnLst>
                                     <p:set>
@@ -5057,7 +5005,7 @@
                                           </p:stCondLst>
                                         </p:cTn>
                                         <p:tgtEl>
-                                          <p:spTgt spid="4"/>
+                                          <p:spTgt spid="6"/>
                                         </p:tgtEl>
                                         <p:attrNameLst>
                                           <p:attrName>style.visibility</p:attrName>
@@ -5069,17 +5017,17 @@
                                     </p:set>
                                     <p:animEffect transition="in" filter="fade">
                                       <p:cBhvr>
-                                        <p:cTn id="23" dur="450"/>
-                                        <p:tgtEl>
-                                          <p:spTgt spid="4"/>
+                                        <p:cTn id="23" dur="600"/>
+                                        <p:tgtEl>
+                                          <p:spTgt spid="6"/>
                                         </p:tgtEl>
                                       </p:cBhvr>
                                     </p:animEffect>
                                     <p:anim calcmode="lin" valueType="num">
                                       <p:cBhvr additive="base">
-                                        <p:cTn id="24" dur="450" fill="hold"/>
-                                        <p:tgtEl>
-                                          <p:spTgt spid="4"/>
+                                        <p:cTn id="24" dur="600" fill="hold"/>
+                                        <p:tgtEl>
+                                          <p:spTgt spid="6"/>
                                         </p:tgtEl>
                                         <p:attrNameLst>
                                           <p:attrName>ppt_y</p:attrName>
@@ -5088,7 +5036,7 @@
                                       <p:tavLst>
                                         <p:tav tm="0">
                                           <p:val>
-                                            <p:strVal val="#ppt_y+0.025"/>
+                                            <p:strVal val="#ppt_y+0.04"/>
                                           </p:val>
                                         </p:tav>
                                         <p:tav tm="100000">
@@ -5104,7 +5052,7 @@
                               <p:par>
                                 <p:cTn id="25" presetID="10" presetClass="entr" presetSubtype="0" fill="hold" grpId="0" nodeType="withEffect">
                                   <p:stCondLst>
-                                    <p:cond delay="800"/>
+                                    <p:cond delay="1000"/>
                                   </p:stCondLst>
                                   <p:childTnLst>
                                     <p:set>
@@ -5115,7 +5063,7 @@
                                           </p:stCondLst>
                                         </p:cTn>
                                         <p:tgtEl>
-                                          <p:spTgt spid="6"/>
+                                          <p:spTgt spid="8"/>
                                         </p:tgtEl>
                                         <p:attrNameLst>
                                           <p:attrName>style.visibility</p:attrName>
@@ -5127,17 +5075,17 @@
                                     </p:set>
                                     <p:animEffect transition="in" filter="fade">
                                       <p:cBhvr>
-                                        <p:cTn id="27" dur="450"/>
-                                        <p:tgtEl>
-                                          <p:spTgt spid="6"/>
+                                        <p:cTn id="27" dur="600"/>
+                                        <p:tgtEl>
+                                          <p:spTgt spid="8"/>
                                         </p:tgtEl>
                                       </p:cBhvr>
                                     </p:animEffect>
                                     <p:anim calcmode="lin" valueType="num">
                                       <p:cBhvr additive="base">
-                                        <p:cTn id="28" dur="450" fill="hold"/>
-                                        <p:tgtEl>
-                                          <p:spTgt spid="6"/>
+                                        <p:cTn id="28" dur="600" fill="hold"/>
+                                        <p:tgtEl>
+                                          <p:spTgt spid="8"/>
                                         </p:tgtEl>
                                         <p:attrNameLst>
                                           <p:attrName>ppt_y</p:attrName>
@@ -5146,7 +5094,7 @@
                                       <p:tavLst>
                                         <p:tav tm="0">
                                           <p:val>
-                                            <p:strVal val="#ppt_y+0.025"/>
+                                            <p:strVal val="#ppt_y+0.04"/>
                                           </p:val>
                                         </p:tav>
                                         <p:tav tm="100000">
@@ -5162,7 +5110,7 @@
                               <p:par>
                                 <p:cTn id="29" presetID="10" presetClass="entr" presetSubtype="0" fill="hold" grpId="0" nodeType="withEffect">
                                   <p:stCondLst>
-                                    <p:cond delay="960"/>
+                                    <p:cond delay="1200"/>
                                   </p:stCondLst>
                                   <p:childTnLst>
                                     <p:set>
@@ -5173,7 +5121,7 @@
                                           </p:stCondLst>
                                         </p:cTn>
                                         <p:tgtEl>
-                                          <p:spTgt spid="8"/>
+                                          <p:spTgt spid="2"/>
                                         </p:tgtEl>
                                         <p:attrNameLst>
                                           <p:attrName>style.visibility</p:attrName>
@@ -5185,17 +5133,17 @@
                                     </p:set>
                                     <p:animEffect transition="in" filter="fade">
                                       <p:cBhvr>
-                                        <p:cTn id="31" dur="450"/>
-                                        <p:tgtEl>
-                                          <p:spTgt spid="8"/>
+                                        <p:cTn id="31" dur="600"/>
+                                        <p:tgtEl>
+                                          <p:spTgt spid="2"/>
                                         </p:tgtEl>
                                       </p:cBhvr>
                                     </p:animEffect>
                                     <p:anim calcmode="lin" valueType="num">
                                       <p:cBhvr additive="base">
-                                        <p:cTn id="32" dur="450" fill="hold"/>
-                                        <p:tgtEl>
-                                          <p:spTgt spid="8"/>
+                                        <p:cTn id="32" dur="600" fill="hold"/>
+                                        <p:tgtEl>
+                                          <p:spTgt spid="2"/>
                                         </p:tgtEl>
                                         <p:attrNameLst>
                                           <p:attrName>ppt_y</p:attrName>
@@ -5204,7 +5152,7 @@
                                       <p:tavLst>
                                         <p:tav tm="0">
                                           <p:val>
-                                            <p:strVal val="#ppt_y+0.025"/>
+                                            <p:strVal val="#ppt_y+0.04"/>
                                           </p:val>
                                         </p:tav>
                                         <p:tav tm="100000">
@@ -5245,13 +5193,13 @@
       </p:par>
     </p:tnLst>
     <p:bldLst>
-      <p:bldP spid="2" grpId="0"/>
       <p:bldP spid="3" grpId="0"/>
       <p:bldP spid="5" grpId="0"/>
       <p:bldP spid="7" grpId="0"/>
       <p:bldP spid="4" grpId="0"/>
       <p:bldP spid="6" grpId="0"/>
       <p:bldP spid="8" grpId="0"/>
+      <p:bldP spid="2" grpId="0"/>
     </p:bldLst>
   </p:timing>
 </p:sld>
@@ -5456,8 +5404,8 @@
   <p:clrMapOvr>
     <a:masterClrMapping/>
   </p:clrMapOvr>
-  <p:transition xmlns:p14="http://schemas.microsoft.com/office/powerpoint/2010/main" spd="slow" p14:dur="700">
-    <p:fade/>
+  <p:transition xmlns:p14="http://schemas.microsoft.com/office/powerpoint/2010/main" spd="slow" p14:dur="820">
+    <p:fade thruBlk="1"/>
   </p:transition>
   <p:timing xmlns:p="http://schemas.openxmlformats.org/presentationml/2006/main">
     <p:tnLst>
@@ -5496,7 +5444,7 @@
                                           </p:stCondLst>
                                         </p:cTn>
                                         <p:tgtEl>
-                                          <p:spTgt spid="2"/>
+                                          <p:spTgt spid="4"/>
                                         </p:tgtEl>
                                         <p:attrNameLst>
                                           <p:attrName>style.visibility</p:attrName>
@@ -5508,17 +5456,17 @@
                                     </p:set>
                                     <p:animEffect transition="in" filter="fade">
                                       <p:cBhvr>
-                                        <p:cTn id="7" dur="450"/>
-                                        <p:tgtEl>
-                                          <p:spTgt spid="2"/>
+                                        <p:cTn id="7" dur="600"/>
+                                        <p:tgtEl>
+                                          <p:spTgt spid="4"/>
                                         </p:tgtEl>
                                       </p:cBhvr>
                                     </p:animEffect>
                                     <p:anim calcmode="lin" valueType="num">
                                       <p:cBhvr additive="base">
-                                        <p:cTn id="8" dur="450" fill="hold"/>
-                                        <p:tgtEl>
-                                          <p:spTgt spid="2"/>
+                                        <p:cTn id="8" dur="600" fill="hold"/>
+                                        <p:tgtEl>
+                                          <p:spTgt spid="4"/>
                                         </p:tgtEl>
                                         <p:attrNameLst>
                                           <p:attrName>ppt_y</p:attrName>
@@ -5527,7 +5475,7 @@
                                       <p:tavLst>
                                         <p:tav tm="0">
                                           <p:val>
-                                            <p:strVal val="#ppt_y+0.025"/>
+                                            <p:strVal val="#ppt_y+0.04"/>
                                           </p:val>
                                         </p:tav>
                                         <p:tav tm="100000">
@@ -5543,7 +5491,7 @@
                               <p:par>
                                 <p:cTn id="9" presetID="10" presetClass="entr" presetSubtype="0" fill="hold" grpId="0" nodeType="withEffect">
                                   <p:stCondLst>
-                                    <p:cond delay="160"/>
+                                    <p:cond delay="200"/>
                                   </p:stCondLst>
                                   <p:childTnLst>
                                     <p:set>
@@ -5566,42 +5514,29 @@
                                     </p:set>
                                     <p:animEffect transition="in" filter="fade">
                                       <p:cBhvr>
-                                        <p:cTn id="11" dur="450"/>
+                                        <p:cTn id="11" dur="600"/>
                                         <p:tgtEl>
                                           <p:spTgt spid="3"/>
                                         </p:tgtEl>
                                       </p:cBhvr>
                                     </p:animEffect>
-                                    <p:anim calcmode="lin" valueType="num">
-                                      <p:cBhvr additive="base">
-                                        <p:cTn id="12" dur="450" fill="hold"/>
+                                    <p:animScale>
+                                      <p:cBhvr>
+                                        <p:cTn id="12" dur="600" fill="hold"/>
                                         <p:tgtEl>
                                           <p:spTgt spid="3"/>
                                         </p:tgtEl>
-                                        <p:attrNameLst>
-                                          <p:attrName>ppt_y</p:attrName>
-                                        </p:attrNameLst>
-                                      </p:cBhvr>
-                                      <p:tavLst>
-                                        <p:tav tm="0">
-                                          <p:val>
-                                            <p:strVal val="#ppt_y+0.025"/>
-                                          </p:val>
-                                        </p:tav>
-                                        <p:tav tm="100000">
-                                          <p:val>
-                                            <p:strVal val="#ppt_y"/>
-                                          </p:val>
-                                        </p:tav>
-                                      </p:tavLst>
-                                    </p:anim>
+                                      </p:cBhvr>
+                                      <p:from x="88000" y="88000"/>
+                                      <p:to x="100000" y="100000"/>
+                                    </p:animScale>
                                   </p:childTnLst>
                                 </p:cTn>
                               </p:par>
                               <p:par>
                                 <p:cTn id="13" presetID="10" presetClass="entr" presetSubtype="0" fill="hold" grpId="0" nodeType="withEffect">
                                   <p:stCondLst>
-                                    <p:cond delay="320"/>
+                                    <p:cond delay="400"/>
                                   </p:stCondLst>
                                   <p:childTnLst>
                                     <p:set>
@@ -5612,7 +5547,7 @@
                                           </p:stCondLst>
                                         </p:cTn>
                                         <p:tgtEl>
-                                          <p:spTgt spid="4"/>
+                                          <p:spTgt spid="5"/>
                                         </p:tgtEl>
                                         <p:attrNameLst>
                                           <p:attrName>style.visibility</p:attrName>
@@ -5624,17 +5559,17 @@
                                     </p:set>
                                     <p:animEffect transition="in" filter="fade">
                                       <p:cBhvr>
-                                        <p:cTn id="15" dur="450"/>
-                                        <p:tgtEl>
-                                          <p:spTgt spid="4"/>
+                                        <p:cTn id="15" dur="600"/>
+                                        <p:tgtEl>
+                                          <p:spTgt spid="5"/>
                                         </p:tgtEl>
                                       </p:cBhvr>
                                     </p:animEffect>
                                     <p:anim calcmode="lin" valueType="num">
                                       <p:cBhvr additive="base">
-                                        <p:cTn id="16" dur="450" fill="hold"/>
-                                        <p:tgtEl>
-                                          <p:spTgt spid="4"/>
+                                        <p:cTn id="16" dur="600" fill="hold"/>
+                                        <p:tgtEl>
+                                          <p:spTgt spid="5"/>
                                         </p:tgtEl>
                                         <p:attrNameLst>
                                           <p:attrName>ppt_y</p:attrName>
@@ -5643,7 +5578,7 @@
                                       <p:tavLst>
                                         <p:tav tm="0">
                                           <p:val>
-                                            <p:strVal val="#ppt_y+0.025"/>
+                                            <p:strVal val="#ppt_y+0.04"/>
                                           </p:val>
                                         </p:tav>
                                         <p:tav tm="100000">
@@ -5659,7 +5594,7 @@
                               <p:par>
                                 <p:cTn id="17" presetID="10" presetClass="entr" presetSubtype="0" fill="hold" grpId="0" nodeType="withEffect">
                                   <p:stCondLst>
-                                    <p:cond delay="480"/>
+                                    <p:cond delay="600"/>
                                   </p:stCondLst>
                                   <p:childTnLst>
                                     <p:set>
@@ -5670,7 +5605,7 @@
                                           </p:stCondLst>
                                         </p:cTn>
                                         <p:tgtEl>
-                                          <p:spTgt spid="5"/>
+                                          <p:spTgt spid="2"/>
                                         </p:tgtEl>
                                         <p:attrNameLst>
                                           <p:attrName>style.visibility</p:attrName>
@@ -5682,17 +5617,17 @@
                                     </p:set>
                                     <p:animEffect transition="in" filter="fade">
                                       <p:cBhvr>
-                                        <p:cTn id="19" dur="450"/>
-                                        <p:tgtEl>
-                                          <p:spTgt spid="5"/>
+                                        <p:cTn id="19" dur="600"/>
+                                        <p:tgtEl>
+                                          <p:spTgt spid="2"/>
                                         </p:tgtEl>
                                       </p:cBhvr>
                                     </p:animEffect>
                                     <p:anim calcmode="lin" valueType="num">
                                       <p:cBhvr additive="base">
-                                        <p:cTn id="20" dur="450" fill="hold"/>
-                                        <p:tgtEl>
-                                          <p:spTgt spid="5"/>
+                                        <p:cTn id="20" dur="600" fill="hold"/>
+                                        <p:tgtEl>
+                                          <p:spTgt spid="2"/>
                                         </p:tgtEl>
                                         <p:attrNameLst>
                                           <p:attrName>ppt_y</p:attrName>
@@ -5701,7 +5636,7 @@
                                       <p:tavLst>
                                         <p:tav tm="0">
                                           <p:val>
-                                            <p:strVal val="#ppt_y+0.025"/>
+                                            <p:strVal val="#ppt_y+0.04"/>
                                           </p:val>
                                         </p:tav>
                                         <p:tav tm="100000">
@@ -5742,10 +5677,10 @@
       </p:par>
     </p:tnLst>
     <p:bldLst>
+      <p:bldP spid="4" grpId="0"/>
+      <p:bldP spid="3" grpId="0"/>
+      <p:bldP spid="5" grpId="0"/>
       <p:bldP spid="2" grpId="0"/>
-      <p:bldP spid="3" grpId="0"/>
-      <p:bldP spid="4" grpId="0"/>
-      <p:bldP spid="5" grpId="0"/>
     </p:bldLst>
   </p:timing>
 </p:sld>
@@ -6097,7 +6032,7 @@
       </p:sp>
       <p:sp>
         <p:nvSpPr>
-          <p:cNvPr id="8" name="Shape 6"/>
+          <p:cNvPr id="8" name="anim:wipe"/>
           <p:cNvSpPr/>
           <p:nvPr/>
         </p:nvSpPr>
@@ -6120,8 +6055,8 @@
   <p:clrMapOvr>
     <a:masterClrMapping/>
   </p:clrMapOvr>
-  <p:transition xmlns:p14="http://schemas.microsoft.com/office/powerpoint/2010/main" spd="slow" p14:dur="700">
-    <p:fade/>
+  <p:transition xmlns:p14="http://schemas.microsoft.com/office/powerpoint/2010/main" spd="slow" p14:dur="820">
+    <p:fade thruBlk="1"/>
   </p:transition>
   <p:timing xmlns:p="http://schemas.openxmlformats.org/presentationml/2006/main">
     <p:tnLst>
@@ -6160,7 +6095,42 @@
                                           </p:stCondLst>
                                         </p:cTn>
                                         <p:tgtEl>
-                                          <p:spTgt spid="2"/>
+                                          <p:spTgt spid="8"/>
+                                        </p:tgtEl>
+                                        <p:attrNameLst>
+                                          <p:attrName>style.visibility</p:attrName>
+                                        </p:attrNameLst>
+                                      </p:cBhvr>
+                                      <p:to>
+                                        <p:strVal val="visible"/>
+                                      </p:to>
+                                    </p:set>
+                                    <p:animEffect transition="in" filter="wipe(left)">
+                                      <p:cBhvr>
+                                        <p:cTn id="7" dur="600"/>
+                                        <p:tgtEl>
+                                          <p:spTgt spid="8"/>
+                                        </p:tgtEl>
+                                      </p:cBhvr>
+                                    </p:animEffect>
+                                  </p:childTnLst>
+                                </p:cTn>
+                              </p:par>
+                              <p:par>
+                                <p:cTn id="8" presetID="10" presetClass="entr" presetSubtype="0" fill="hold" grpId="0" nodeType="withEffect">
+                                  <p:stCondLst>
+                                    <p:cond delay="200"/>
+                                  </p:stCondLst>
+                                  <p:childTnLst>
+                                    <p:set>
+                                      <p:cBhvr>
+                                        <p:cTn id="9" dur="1" fill="hold">
+                                          <p:stCondLst>
+                                            <p:cond delay="0"/>
+                                          </p:stCondLst>
+                                        </p:cTn>
+                                        <p:tgtEl>
+                                          <p:spTgt spid="4"/>
                                         </p:tgtEl>
                                         <p:attrNameLst>
                                           <p:attrName>style.visibility</p:attrName>
@@ -6172,17 +6142,17 @@
                                     </p:set>
                                     <p:animEffect transition="in" filter="fade">
                                       <p:cBhvr>
-                                        <p:cTn id="7" dur="450"/>
-                                        <p:tgtEl>
-                                          <p:spTgt spid="2"/>
+                                        <p:cTn id="10" dur="600"/>
+                                        <p:tgtEl>
+                                          <p:spTgt spid="4"/>
                                         </p:tgtEl>
                                       </p:cBhvr>
                                     </p:animEffect>
                                     <p:anim calcmode="lin" valueType="num">
                                       <p:cBhvr additive="base">
-                                        <p:cTn id="8" dur="450" fill="hold"/>
-                                        <p:tgtEl>
-                                          <p:spTgt spid="2"/>
+                                        <p:cTn id="11" dur="600" fill="hold"/>
+                                        <p:tgtEl>
+                                          <p:spTgt spid="4"/>
                                         </p:tgtEl>
                                         <p:attrNameLst>
                                           <p:attrName>ppt_y</p:attrName>
@@ -6191,7 +6161,7 @@
                                       <p:tavLst>
                                         <p:tav tm="0">
                                           <p:val>
-                                            <p:strVal val="#ppt_y+0.025"/>
+                                            <p:strVal val="#ppt_y+0.04"/>
                                           </p:val>
                                         </p:tav>
                                         <p:tav tm="100000">
@@ -6205,20 +6175,20 @@
                                 </p:cTn>
                               </p:par>
                               <p:par>
-                                <p:cTn id="9" presetID="10" presetClass="entr" presetSubtype="0" fill="hold" grpId="0" nodeType="withEffect">
+                                <p:cTn id="12" presetID="10" presetClass="entr" presetSubtype="0" fill="hold" grpId="0" nodeType="withEffect">
                                   <p:stCondLst>
-                                    <p:cond delay="160"/>
+                                    <p:cond delay="400"/>
                                   </p:stCondLst>
                                   <p:childTnLst>
                                     <p:set>
                                       <p:cBhvr>
-                                        <p:cTn id="10" dur="1" fill="hold">
+                                        <p:cTn id="13" dur="1" fill="hold">
                                           <p:stCondLst>
                                             <p:cond delay="0"/>
                                           </p:stCondLst>
                                         </p:cTn>
                                         <p:tgtEl>
-                                          <p:spTgt spid="3"/>
+                                          <p:spTgt spid="5"/>
                                         </p:tgtEl>
                                         <p:attrNameLst>
                                           <p:attrName>style.visibility</p:attrName>
@@ -6230,17 +6200,17 @@
                                     </p:set>
                                     <p:animEffect transition="in" filter="fade">
                                       <p:cBhvr>
-                                        <p:cTn id="11" dur="450"/>
-                                        <p:tgtEl>
-                                          <p:spTgt spid="3"/>
+                                        <p:cTn id="14" dur="600"/>
+                                        <p:tgtEl>
+                                          <p:spTgt spid="5"/>
                                         </p:tgtEl>
                                       </p:cBhvr>
                                     </p:animEffect>
                                     <p:anim calcmode="lin" valueType="num">
                                       <p:cBhvr additive="base">
-                                        <p:cTn id="12" dur="450" fill="hold"/>
-                                        <p:tgtEl>
-                                          <p:spTgt spid="3"/>
+                                        <p:cTn id="15" dur="600" fill="hold"/>
+                                        <p:tgtEl>
+                                          <p:spTgt spid="5"/>
                                         </p:tgtEl>
                                         <p:attrNameLst>
                                           <p:attrName>ppt_y</p:attrName>
@@ -6249,7 +6219,7 @@
                                       <p:tavLst>
                                         <p:tav tm="0">
                                           <p:val>
-                                            <p:strVal val="#ppt_y+0.025"/>
+                                            <p:strVal val="#ppt_y+0.04"/>
                                           </p:val>
                                         </p:tav>
                                         <p:tav tm="100000">
@@ -6263,20 +6233,20 @@
                                 </p:cTn>
                               </p:par>
                               <p:par>
-                                <p:cTn id="13" presetID="10" presetClass="entr" presetSubtype="0" fill="hold" grpId="0" nodeType="withEffect">
+                                <p:cTn id="16" presetID="10" presetClass="entr" presetSubtype="0" fill="hold" grpId="0" nodeType="withEffect">
                                   <p:stCondLst>
-                                    <p:cond delay="320"/>
+                                    <p:cond delay="600"/>
                                   </p:stCondLst>
                                   <p:childTnLst>
                                     <p:set>
                                       <p:cBhvr>
-                                        <p:cTn id="14" dur="1" fill="hold">
+                                        <p:cTn id="17" dur="1" fill="hold">
                                           <p:stCondLst>
                                             <p:cond delay="0"/>
                                           </p:stCondLst>
                                         </p:cTn>
                                         <p:tgtEl>
-                                          <p:spTgt spid="8"/>
+                                          <p:spTgt spid="6"/>
                                         </p:tgtEl>
                                         <p:attrNameLst>
                                           <p:attrName>style.visibility</p:attrName>
@@ -6288,17 +6258,17 @@
                                     </p:set>
                                     <p:animEffect transition="in" filter="fade">
                                       <p:cBhvr>
-                                        <p:cTn id="15" dur="450"/>
-                                        <p:tgtEl>
-                                          <p:spTgt spid="8"/>
+                                        <p:cTn id="18" dur="600"/>
+                                        <p:tgtEl>
+                                          <p:spTgt spid="6"/>
                                         </p:tgtEl>
                                       </p:cBhvr>
                                     </p:animEffect>
                                     <p:anim calcmode="lin" valueType="num">
                                       <p:cBhvr additive="base">
-                                        <p:cTn id="16" dur="450" fill="hold"/>
-                                        <p:tgtEl>
-                                          <p:spTgt spid="8"/>
+                                        <p:cTn id="19" dur="600" fill="hold"/>
+                                        <p:tgtEl>
+                                          <p:spTgt spid="6"/>
                                         </p:tgtEl>
                                         <p:attrNameLst>
                                           <p:attrName>ppt_y</p:attrName>
@@ -6307,7 +6277,7 @@
                                       <p:tavLst>
                                         <p:tav tm="0">
                                           <p:val>
-                                            <p:strVal val="#ppt_y+0.025"/>
+                                            <p:strVal val="#ppt_y+0.04"/>
                                           </p:val>
                                         </p:tav>
                                         <p:tav tm="100000">
@@ -6321,20 +6291,20 @@
                                 </p:cTn>
                               </p:par>
                               <p:par>
-                                <p:cTn id="17" presetID="10" presetClass="entr" presetSubtype="0" fill="hold" grpId="0" nodeType="withEffect">
+                                <p:cTn id="20" presetID="10" presetClass="entr" presetSubtype="0" fill="hold" grpId="0" nodeType="withEffect">
                                   <p:stCondLst>
-                                    <p:cond delay="480"/>
+                                    <p:cond delay="800"/>
                                   </p:stCondLst>
                                   <p:childTnLst>
                                     <p:set>
                                       <p:cBhvr>
-                                        <p:cTn id="18" dur="1" fill="hold">
+                                        <p:cTn id="21" dur="1" fill="hold">
                                           <p:stCondLst>
                                             <p:cond delay="0"/>
                                           </p:stCondLst>
                                         </p:cTn>
                                         <p:tgtEl>
-                                          <p:spTgt spid="4"/>
+                                          <p:spTgt spid="7"/>
                                         </p:tgtEl>
                                         <p:attrNameLst>
                                           <p:attrName>style.visibility</p:attrName>
@@ -6346,17 +6316,17 @@
                                     </p:set>
                                     <p:animEffect transition="in" filter="fade">
                                       <p:cBhvr>
-                                        <p:cTn id="19" dur="450"/>
-                                        <p:tgtEl>
-                                          <p:spTgt spid="4"/>
+                                        <p:cTn id="22" dur="600"/>
+                                        <p:tgtEl>
+                                          <p:spTgt spid="7"/>
                                         </p:tgtEl>
                                       </p:cBhvr>
                                     </p:animEffect>
                                     <p:anim calcmode="lin" valueType="num">
                                       <p:cBhvr additive="base">
-                                        <p:cTn id="20" dur="450" fill="hold"/>
-                                        <p:tgtEl>
-                                          <p:spTgt spid="4"/>
+                                        <p:cTn id="23" dur="600" fill="hold"/>
+                                        <p:tgtEl>
+                                          <p:spTgt spid="7"/>
                                         </p:tgtEl>
                                         <p:attrNameLst>
                                           <p:attrName>ppt_y</p:attrName>
@@ -6365,7 +6335,7 @@
                                       <p:tavLst>
                                         <p:tav tm="0">
                                           <p:val>
-                                            <p:strVal val="#ppt_y+0.025"/>
+                                            <p:strVal val="#ppt_y+0.04"/>
                                           </p:val>
                                         </p:tav>
                                         <p:tav tm="100000">
@@ -6379,20 +6349,20 @@
                                 </p:cTn>
                               </p:par>
                               <p:par>
-                                <p:cTn id="21" presetID="10" presetClass="entr" presetSubtype="0" fill="hold" grpId="0" nodeType="withEffect">
+                                <p:cTn id="24" presetID="10" presetClass="entr" presetSubtype="0" fill="hold" grpId="0" nodeType="withEffect">
                                   <p:stCondLst>
-                                    <p:cond delay="640"/>
+                                    <p:cond delay="1000"/>
                                   </p:stCondLst>
                                   <p:childTnLst>
                                     <p:set>
                                       <p:cBhvr>
-                                        <p:cTn id="22" dur="1" fill="hold">
+                                        <p:cTn id="25" dur="1" fill="hold">
                                           <p:stCondLst>
                                             <p:cond delay="0"/>
                                           </p:stCondLst>
                                         </p:cTn>
                                         <p:tgtEl>
-                                          <p:spTgt spid="5"/>
+                                          <p:spTgt spid="2"/>
                                         </p:tgtEl>
                                         <p:attrNameLst>
                                           <p:attrName>style.visibility</p:attrName>
@@ -6404,17 +6374,17 @@
                                     </p:set>
                                     <p:animEffect transition="in" filter="fade">
                                       <p:cBhvr>
-                                        <p:cTn id="23" dur="450"/>
-                                        <p:tgtEl>
-                                          <p:spTgt spid="5"/>
+                                        <p:cTn id="26" dur="600"/>
+                                        <p:tgtEl>
+                                          <p:spTgt spid="2"/>
                                         </p:tgtEl>
                                       </p:cBhvr>
                                     </p:animEffect>
                                     <p:anim calcmode="lin" valueType="num">
                                       <p:cBhvr additive="base">
-                                        <p:cTn id="24" dur="450" fill="hold"/>
-                                        <p:tgtEl>
-                                          <p:spTgt spid="5"/>
+                                        <p:cTn id="27" dur="600" fill="hold"/>
+                                        <p:tgtEl>
+                                          <p:spTgt spid="2"/>
                                         </p:tgtEl>
                                         <p:attrNameLst>
                                           <p:attrName>ppt_y</p:attrName>
@@ -6423,7 +6393,7 @@
                                       <p:tavLst>
                                         <p:tav tm="0">
                                           <p:val>
-                                            <p:strVal val="#ppt_y+0.025"/>
+                                            <p:strVal val="#ppt_y+0.04"/>
                                           </p:val>
                                         </p:tav>
                                         <p:tav tm="100000">
@@ -6437,20 +6407,20 @@
                                 </p:cTn>
                               </p:par>
                               <p:par>
-                                <p:cTn id="25" presetID="10" presetClass="entr" presetSubtype="0" fill="hold" grpId="0" nodeType="withEffect">
+                                <p:cTn id="28" presetID="10" presetClass="entr" presetSubtype="0" fill="hold" grpId="0" nodeType="withEffect">
                                   <p:stCondLst>
-                                    <p:cond delay="800"/>
+                                    <p:cond delay="1200"/>
                                   </p:stCondLst>
                                   <p:childTnLst>
                                     <p:set>
                                       <p:cBhvr>
-                                        <p:cTn id="26" dur="1" fill="hold">
+                                        <p:cTn id="29" dur="1" fill="hold">
                                           <p:stCondLst>
                                             <p:cond delay="0"/>
                                           </p:stCondLst>
                                         </p:cTn>
                                         <p:tgtEl>
-                                          <p:spTgt spid="6"/>
+                                          <p:spTgt spid="3"/>
                                         </p:tgtEl>
                                         <p:attrNameLst>
                                           <p:attrName>style.visibility</p:attrName>
@@ -6462,17 +6432,17 @@
                                     </p:set>
                                     <p:animEffect transition="in" filter="fade">
                                       <p:cBhvr>
-                                        <p:cTn id="27" dur="450"/>
-                                        <p:tgtEl>
-                                          <p:spTgt spid="6"/>
+                                        <p:cTn id="30" dur="600"/>
+                                        <p:tgtEl>
+                                          <p:spTgt spid="3"/>
                                         </p:tgtEl>
                                       </p:cBhvr>
                                     </p:animEffect>
                                     <p:anim calcmode="lin" valueType="num">
                                       <p:cBhvr additive="base">
-                                        <p:cTn id="28" dur="450" fill="hold"/>
-                                        <p:tgtEl>
-                                          <p:spTgt spid="6"/>
+                                        <p:cTn id="31" dur="600" fill="hold"/>
+                                        <p:tgtEl>
+                                          <p:spTgt spid="3"/>
                                         </p:tgtEl>
                                         <p:attrNameLst>
                                           <p:attrName>ppt_y</p:attrName>
@@ -6481,65 +6451,7 @@
                                       <p:tavLst>
                                         <p:tav tm="0">
                                           <p:val>
-                                            <p:strVal val="#ppt_y+0.025"/>
-                                          </p:val>
-                                        </p:tav>
-                                        <p:tav tm="100000">
-                                          <p:val>
-                                            <p:strVal val="#ppt_y"/>
-                                          </p:val>
-                                        </p:tav>
-                                      </p:tavLst>
-                                    </p:anim>
-                                  </p:childTnLst>
-                                </p:cTn>
-                              </p:par>
-                              <p:par>
-                                <p:cTn id="29" presetID="10" presetClass="entr" presetSubtype="0" fill="hold" grpId="0" nodeType="withEffect">
-                                  <p:stCondLst>
-                                    <p:cond delay="960"/>
-                                  </p:stCondLst>
-                                  <p:childTnLst>
-                                    <p:set>
-                                      <p:cBhvr>
-                                        <p:cTn id="30" dur="1" fill="hold">
-                                          <p:stCondLst>
-                                            <p:cond delay="0"/>
-                                          </p:stCondLst>
-                                        </p:cTn>
-                                        <p:tgtEl>
-                                          <p:spTgt spid="7"/>
-                                        </p:tgtEl>
-                                        <p:attrNameLst>
-                                          <p:attrName>style.visibility</p:attrName>
-                                        </p:attrNameLst>
-                                      </p:cBhvr>
-                                      <p:to>
-                                        <p:strVal val="visible"/>
-                                      </p:to>
-                                    </p:set>
-                                    <p:animEffect transition="in" filter="fade">
-                                      <p:cBhvr>
-                                        <p:cTn id="31" dur="450"/>
-                                        <p:tgtEl>
-                                          <p:spTgt spid="7"/>
-                                        </p:tgtEl>
-                                      </p:cBhvr>
-                                    </p:animEffect>
-                                    <p:anim calcmode="lin" valueType="num">
-                                      <p:cBhvr additive="base">
-                                        <p:cTn id="32" dur="450" fill="hold"/>
-                                        <p:tgtEl>
-                                          <p:spTgt spid="7"/>
-                                        </p:tgtEl>
-                                        <p:attrNameLst>
-                                          <p:attrName>ppt_y</p:attrName>
-                                        </p:attrNameLst>
-                                      </p:cBhvr>
-                                      <p:tavLst>
-                                        <p:tav tm="0">
-                                          <p:val>
-                                            <p:strVal val="#ppt_y+0.025"/>
+                                            <p:strVal val="#ppt_y+0.04"/>
                                           </p:val>
                                         </p:tav>
                                         <p:tav tm="100000">
@@ -6580,12 +6492,12 @@
       </p:par>
     </p:tnLst>
     <p:bldLst>
-      <p:bldP spid="2" grpId="0"/>
-      <p:bldP spid="3" grpId="0"/>
       <p:bldP spid="4" grpId="0"/>
       <p:bldP spid="5" grpId="0"/>
       <p:bldP spid="6" grpId="0"/>
       <p:bldP spid="7" grpId="0"/>
+      <p:bldP spid="2" grpId="0"/>
+      <p:bldP spid="3" grpId="0"/>
     </p:bldLst>
   </p:timing>
 </p:sld>
@@ -7059,8 +6971,8 @@
   <p:clrMapOvr>
     <a:masterClrMapping/>
   </p:clrMapOvr>
-  <p:transition xmlns:p14="http://schemas.microsoft.com/office/powerpoint/2010/main" spd="slow" p14:dur="700">
-    <p:fade/>
+  <p:transition xmlns:p14="http://schemas.microsoft.com/office/powerpoint/2010/main" spd="slow" p14:dur="820">
+    <p:fade thruBlk="1"/>
   </p:transition>
   <p:timing xmlns:p="http://schemas.openxmlformats.org/presentationml/2006/main">
     <p:tnLst>
@@ -7099,7 +7011,7 @@
                                           </p:stCondLst>
                                         </p:cTn>
                                         <p:tgtEl>
-                                          <p:spTgt spid="2"/>
+                                          <p:spTgt spid="3"/>
                                         </p:tgtEl>
                                         <p:attrNameLst>
                                           <p:attrName>style.visibility</p:attrName>
@@ -7111,42 +7023,29 @@
                                     </p:set>
                                     <p:animEffect transition="in" filter="fade">
                                       <p:cBhvr>
-                                        <p:cTn id="7" dur="450"/>
-                                        <p:tgtEl>
-                                          <p:spTgt spid="2"/>
+                                        <p:cTn id="7" dur="600"/>
+                                        <p:tgtEl>
+                                          <p:spTgt spid="3"/>
                                         </p:tgtEl>
                                       </p:cBhvr>
                                     </p:animEffect>
-                                    <p:anim calcmode="lin" valueType="num">
-                                      <p:cBhvr additive="base">
-                                        <p:cTn id="8" dur="450" fill="hold"/>
-                                        <p:tgtEl>
-                                          <p:spTgt spid="2"/>
-                                        </p:tgtEl>
-                                        <p:attrNameLst>
-                                          <p:attrName>ppt_y</p:attrName>
-                                        </p:attrNameLst>
-                                      </p:cBhvr>
-                                      <p:tavLst>
-                                        <p:tav tm="0">
-                                          <p:val>
-                                            <p:strVal val="#ppt_y+0.025"/>
-                                          </p:val>
-                                        </p:tav>
-                                        <p:tav tm="100000">
-                                          <p:val>
-                                            <p:strVal val="#ppt_y"/>
-                                          </p:val>
-                                        </p:tav>
-                                      </p:tavLst>
-                                    </p:anim>
+                                    <p:animScale>
+                                      <p:cBhvr>
+                                        <p:cTn id="8" dur="600" fill="hold"/>
+                                        <p:tgtEl>
+                                          <p:spTgt spid="3"/>
+                                        </p:tgtEl>
+                                      </p:cBhvr>
+                                      <p:from x="94000" y="94000"/>
+                                      <p:to x="100000" y="100000"/>
+                                    </p:animScale>
                                   </p:childTnLst>
                                 </p:cTn>
                               </p:par>
                               <p:par>
                                 <p:cTn id="9" presetID="10" presetClass="entr" presetSubtype="0" fill="hold" grpId="0" nodeType="withEffect">
                                   <p:stCondLst>
-                                    <p:cond delay="91"/>
+                                    <p:cond delay="100"/>
                                   </p:stCondLst>
                                   <p:childTnLst>
                                     <p:set>
@@ -7157,7 +7056,7 @@
                                           </p:stCondLst>
                                         </p:cTn>
                                         <p:tgtEl>
-                                          <p:spTgt spid="3"/>
+                                          <p:spTgt spid="6"/>
                                         </p:tgtEl>
                                         <p:attrNameLst>
                                           <p:attrName>style.visibility</p:attrName>
@@ -7169,42 +7068,29 @@
                                     </p:set>
                                     <p:animEffect transition="in" filter="fade">
                                       <p:cBhvr>
-                                        <p:cTn id="11" dur="450"/>
-                                        <p:tgtEl>
-                                          <p:spTgt spid="3"/>
+                                        <p:cTn id="11" dur="600"/>
+                                        <p:tgtEl>
+                                          <p:spTgt spid="6"/>
                                         </p:tgtEl>
                                       </p:cBhvr>
                                     </p:animEffect>
-                                    <p:anim calcmode="lin" valueType="num">
-                                      <p:cBhvr additive="base">
-                                        <p:cTn id="12" dur="450" fill="hold"/>
-                                        <p:tgtEl>
-                                          <p:spTgt spid="3"/>
-                                        </p:tgtEl>
-                                        <p:attrNameLst>
-                                          <p:attrName>ppt_y</p:attrName>
-                                        </p:attrNameLst>
-                                      </p:cBhvr>
-                                      <p:tavLst>
-                                        <p:tav tm="0">
-                                          <p:val>
-                                            <p:strVal val="#ppt_y+0.025"/>
-                                          </p:val>
-                                        </p:tav>
-                                        <p:tav tm="100000">
-                                          <p:val>
-                                            <p:strVal val="#ppt_y"/>
-                                          </p:val>
-                                        </p:tav>
-                                      </p:tavLst>
-                                    </p:anim>
+                                    <p:animScale>
+                                      <p:cBhvr>
+                                        <p:cTn id="12" dur="600" fill="hold"/>
+                                        <p:tgtEl>
+                                          <p:spTgt spid="6"/>
+                                        </p:tgtEl>
+                                      </p:cBhvr>
+                                      <p:from x="94000" y="94000"/>
+                                      <p:to x="100000" y="100000"/>
+                                    </p:animScale>
                                   </p:childTnLst>
                                 </p:cTn>
                               </p:par>
                               <p:par>
                                 <p:cTn id="13" presetID="10" presetClass="entr" presetSubtype="0" fill="hold" grpId="0" nodeType="withEffect">
                                   <p:stCondLst>
-                                    <p:cond delay="182"/>
+                                    <p:cond delay="200"/>
                                   </p:stCondLst>
                                   <p:childTnLst>
                                     <p:set>
@@ -7215,7 +7101,7 @@
                                           </p:stCondLst>
                                         </p:cTn>
                                         <p:tgtEl>
-                                          <p:spTgt spid="6"/>
+                                          <p:spTgt spid="9"/>
                                         </p:tgtEl>
                                         <p:attrNameLst>
                                           <p:attrName>style.visibility</p:attrName>
@@ -7227,42 +7113,29 @@
                                     </p:set>
                                     <p:animEffect transition="in" filter="fade">
                                       <p:cBhvr>
-                                        <p:cTn id="15" dur="450"/>
-                                        <p:tgtEl>
-                                          <p:spTgt spid="6"/>
+                                        <p:cTn id="15" dur="600"/>
+                                        <p:tgtEl>
+                                          <p:spTgt spid="9"/>
                                         </p:tgtEl>
                                       </p:cBhvr>
                                     </p:animEffect>
-                                    <p:anim calcmode="lin" valueType="num">
-                                      <p:cBhvr additive="base">
-                                        <p:cTn id="16" dur="450" fill="hold"/>
-                                        <p:tgtEl>
-                                          <p:spTgt spid="6"/>
-                                        </p:tgtEl>
-                                        <p:attrNameLst>
-                                          <p:attrName>ppt_y</p:attrName>
-                                        </p:attrNameLst>
-                                      </p:cBhvr>
-                                      <p:tavLst>
-                                        <p:tav tm="0">
-                                          <p:val>
-                                            <p:strVal val="#ppt_y+0.025"/>
-                                          </p:val>
-                                        </p:tav>
-                                        <p:tav tm="100000">
-                                          <p:val>
-                                            <p:strVal val="#ppt_y"/>
-                                          </p:val>
-                                        </p:tav>
-                                      </p:tavLst>
-                                    </p:anim>
+                                    <p:animScale>
+                                      <p:cBhvr>
+                                        <p:cTn id="16" dur="600" fill="hold"/>
+                                        <p:tgtEl>
+                                          <p:spTgt spid="9"/>
+                                        </p:tgtEl>
+                                      </p:cBhvr>
+                                      <p:from x="94000" y="94000"/>
+                                      <p:to x="100000" y="100000"/>
+                                    </p:animScale>
                                   </p:childTnLst>
                                 </p:cTn>
                               </p:par>
                               <p:par>
                                 <p:cTn id="17" presetID="10" presetClass="entr" presetSubtype="0" fill="hold" grpId="0" nodeType="withEffect">
                                   <p:stCondLst>
-                                    <p:cond delay="273"/>
+                                    <p:cond delay="300"/>
                                   </p:stCondLst>
                                   <p:childTnLst>
                                     <p:set>
@@ -7273,7 +7146,7 @@
                                           </p:stCondLst>
                                         </p:cTn>
                                         <p:tgtEl>
-                                          <p:spTgt spid="9"/>
+                                          <p:spTgt spid="12"/>
                                         </p:tgtEl>
                                         <p:attrNameLst>
                                           <p:attrName>style.visibility</p:attrName>
@@ -7285,42 +7158,29 @@
                                     </p:set>
                                     <p:animEffect transition="in" filter="fade">
                                       <p:cBhvr>
-                                        <p:cTn id="19" dur="450"/>
-                                        <p:tgtEl>
-                                          <p:spTgt spid="9"/>
+                                        <p:cTn id="19" dur="600"/>
+                                        <p:tgtEl>
+                                          <p:spTgt spid="12"/>
                                         </p:tgtEl>
                                       </p:cBhvr>
                                     </p:animEffect>
-                                    <p:anim calcmode="lin" valueType="num">
-                                      <p:cBhvr additive="base">
-                                        <p:cTn id="20" dur="450" fill="hold"/>
-                                        <p:tgtEl>
-                                          <p:spTgt spid="9"/>
-                                        </p:tgtEl>
-                                        <p:attrNameLst>
-                                          <p:attrName>ppt_y</p:attrName>
-                                        </p:attrNameLst>
-                                      </p:cBhvr>
-                                      <p:tavLst>
-                                        <p:tav tm="0">
-                                          <p:val>
-                                            <p:strVal val="#ppt_y+0.025"/>
-                                          </p:val>
-                                        </p:tav>
-                                        <p:tav tm="100000">
-                                          <p:val>
-                                            <p:strVal val="#ppt_y"/>
-                                          </p:val>
-                                        </p:tav>
-                                      </p:tavLst>
-                                    </p:anim>
+                                    <p:animScale>
+                                      <p:cBhvr>
+                                        <p:cTn id="20" dur="600" fill="hold"/>
+                                        <p:tgtEl>
+                                          <p:spTgt spid="12"/>
+                                        </p:tgtEl>
+                                      </p:cBhvr>
+                                      <p:from x="94000" y="94000"/>
+                                      <p:to x="100000" y="100000"/>
+                                    </p:animScale>
                                   </p:childTnLst>
                                 </p:cTn>
                               </p:par>
                               <p:par>
                                 <p:cTn id="21" presetID="10" presetClass="entr" presetSubtype="0" fill="hold" grpId="0" nodeType="withEffect">
                                   <p:stCondLst>
-                                    <p:cond delay="364"/>
+                                    <p:cond delay="400"/>
                                   </p:stCondLst>
                                   <p:childTnLst>
                                     <p:set>
@@ -7331,7 +7191,7 @@
                                           </p:stCondLst>
                                         </p:cTn>
                                         <p:tgtEl>
-                                          <p:spTgt spid="12"/>
+                                          <p:spTgt spid="4"/>
                                         </p:tgtEl>
                                         <p:attrNameLst>
                                           <p:attrName>style.visibility</p:attrName>
@@ -7343,17 +7203,17 @@
                                     </p:set>
                                     <p:animEffect transition="in" filter="fade">
                                       <p:cBhvr>
-                                        <p:cTn id="23" dur="450"/>
-                                        <p:tgtEl>
-                                          <p:spTgt spid="12"/>
+                                        <p:cTn id="23" dur="600"/>
+                                        <p:tgtEl>
+                                          <p:spTgt spid="4"/>
                                         </p:tgtEl>
                                       </p:cBhvr>
                                     </p:animEffect>
                                     <p:anim calcmode="lin" valueType="num">
                                       <p:cBhvr additive="base">
-                                        <p:cTn id="24" dur="450" fill="hold"/>
-                                        <p:tgtEl>
-                                          <p:spTgt spid="12"/>
+                                        <p:cTn id="24" dur="600" fill="hold"/>
+                                        <p:tgtEl>
+                                          <p:spTgt spid="4"/>
                                         </p:tgtEl>
                                         <p:attrNameLst>
                                           <p:attrName>ppt_y</p:attrName>
@@ -7362,7 +7222,7 @@
                                       <p:tavLst>
                                         <p:tav tm="0">
                                           <p:val>
-                                            <p:strVal val="#ppt_y+0.025"/>
+                                            <p:strVal val="#ppt_y+0.04"/>
                                           </p:val>
                                         </p:tav>
                                         <p:tav tm="100000">
@@ -7378,7 +7238,7 @@
                               <p:par>
                                 <p:cTn id="25" presetID="10" presetClass="entr" presetSubtype="0" fill="hold" grpId="0" nodeType="withEffect">
                                   <p:stCondLst>
-                                    <p:cond delay="455"/>
+                                    <p:cond delay="500"/>
                                   </p:stCondLst>
                                   <p:childTnLst>
                                     <p:set>
@@ -7389,7 +7249,7 @@
                                           </p:stCondLst>
                                         </p:cTn>
                                         <p:tgtEl>
-                                          <p:spTgt spid="4"/>
+                                          <p:spTgt spid="7"/>
                                         </p:tgtEl>
                                         <p:attrNameLst>
                                           <p:attrName>style.visibility</p:attrName>
@@ -7401,17 +7261,17 @@
                                     </p:set>
                                     <p:animEffect transition="in" filter="fade">
                                       <p:cBhvr>
-                                        <p:cTn id="27" dur="450"/>
-                                        <p:tgtEl>
-                                          <p:spTgt spid="4"/>
+                                        <p:cTn id="27" dur="600"/>
+                                        <p:tgtEl>
+                                          <p:spTgt spid="7"/>
                                         </p:tgtEl>
                                       </p:cBhvr>
                                     </p:animEffect>
                                     <p:anim calcmode="lin" valueType="num">
                                       <p:cBhvr additive="base">
-                                        <p:cTn id="28" dur="450" fill="hold"/>
-                                        <p:tgtEl>
-                                          <p:spTgt spid="4"/>
+                                        <p:cTn id="28" dur="600" fill="hold"/>
+                                        <p:tgtEl>
+                                          <p:spTgt spid="7"/>
                                         </p:tgtEl>
                                         <p:attrNameLst>
                                           <p:attrName>ppt_y</p:attrName>
@@ -7420,7 +7280,7 @@
                                       <p:tavLst>
                                         <p:tav tm="0">
                                           <p:val>
-                                            <p:strVal val="#ppt_y+0.025"/>
+                                            <p:strVal val="#ppt_y+0.04"/>
                                           </p:val>
                                         </p:tav>
                                         <p:tav tm="100000">
@@ -7436,7 +7296,7 @@
                               <p:par>
                                 <p:cTn id="29" presetID="10" presetClass="entr" presetSubtype="0" fill="hold" grpId="0" nodeType="withEffect">
                                   <p:stCondLst>
-                                    <p:cond delay="546"/>
+                                    <p:cond delay="600"/>
                                   </p:stCondLst>
                                   <p:childTnLst>
                                     <p:set>
@@ -7447,7 +7307,7 @@
                                           </p:stCondLst>
                                         </p:cTn>
                                         <p:tgtEl>
-                                          <p:spTgt spid="7"/>
+                                          <p:spTgt spid="10"/>
                                         </p:tgtEl>
                                         <p:attrNameLst>
                                           <p:attrName>style.visibility</p:attrName>
@@ -7459,17 +7319,17 @@
                                     </p:set>
                                     <p:animEffect transition="in" filter="fade">
                                       <p:cBhvr>
-                                        <p:cTn id="31" dur="450"/>
-                                        <p:tgtEl>
-                                          <p:spTgt spid="7"/>
+                                        <p:cTn id="31" dur="600"/>
+                                        <p:tgtEl>
+                                          <p:spTgt spid="10"/>
                                         </p:tgtEl>
                                       </p:cBhvr>
                                     </p:animEffect>
                                     <p:anim calcmode="lin" valueType="num">
                                       <p:cBhvr additive="base">
-                                        <p:cTn id="32" dur="450" fill="hold"/>
-                                        <p:tgtEl>
-                                          <p:spTgt spid="7"/>
+                                        <p:cTn id="32" dur="600" fill="hold"/>
+                                        <p:tgtEl>
+                                          <p:spTgt spid="10"/>
                                         </p:tgtEl>
                                         <p:attrNameLst>
                                           <p:attrName>ppt_y</p:attrName>
@@ -7478,7 +7338,7 @@
                                       <p:tavLst>
                                         <p:tav tm="0">
                                           <p:val>
-                                            <p:strVal val="#ppt_y+0.025"/>
+                                            <p:strVal val="#ppt_y+0.04"/>
                                           </p:val>
                                         </p:tav>
                                         <p:tav tm="100000">
@@ -7494,7 +7354,7 @@
                               <p:par>
                                 <p:cTn id="33" presetID="10" presetClass="entr" presetSubtype="0" fill="hold" grpId="0" nodeType="withEffect">
                                   <p:stCondLst>
-                                    <p:cond delay="637"/>
+                                    <p:cond delay="700"/>
                                   </p:stCondLst>
                                   <p:childTnLst>
                                     <p:set>
@@ -7505,7 +7365,7 @@
                                           </p:stCondLst>
                                         </p:cTn>
                                         <p:tgtEl>
-                                          <p:spTgt spid="10"/>
+                                          <p:spTgt spid="13"/>
                                         </p:tgtEl>
                                         <p:attrNameLst>
                                           <p:attrName>style.visibility</p:attrName>
@@ -7517,17 +7377,17 @@
                                     </p:set>
                                     <p:animEffect transition="in" filter="fade">
                                       <p:cBhvr>
-                                        <p:cTn id="35" dur="450"/>
-                                        <p:tgtEl>
-                                          <p:spTgt spid="10"/>
+                                        <p:cTn id="35" dur="600"/>
+                                        <p:tgtEl>
+                                          <p:spTgt spid="13"/>
                                         </p:tgtEl>
                                       </p:cBhvr>
                                     </p:animEffect>
                                     <p:anim calcmode="lin" valueType="num">
                                       <p:cBhvr additive="base">
-                                        <p:cTn id="36" dur="450" fill="hold"/>
-                                        <p:tgtEl>
-                                          <p:spTgt spid="10"/>
+                                        <p:cTn id="36" dur="600" fill="hold"/>
+                                        <p:tgtEl>
+                                          <p:spTgt spid="13"/>
                                         </p:tgtEl>
                                         <p:attrNameLst>
                                           <p:attrName>ppt_y</p:attrName>
@@ -7536,7 +7396,7 @@
                                       <p:tavLst>
                                         <p:tav tm="0">
                                           <p:val>
-                                            <p:strVal val="#ppt_y+0.025"/>
+                                            <p:strVal val="#ppt_y+0.04"/>
                                           </p:val>
                                         </p:tav>
                                         <p:tav tm="100000">
@@ -7552,7 +7412,7 @@
                               <p:par>
                                 <p:cTn id="37" presetID="10" presetClass="entr" presetSubtype="0" fill="hold" grpId="0" nodeType="withEffect">
                                   <p:stCondLst>
-                                    <p:cond delay="728"/>
+                                    <p:cond delay="800"/>
                                   </p:stCondLst>
                                   <p:childTnLst>
                                     <p:set>
@@ -7563,7 +7423,7 @@
                                           </p:stCondLst>
                                         </p:cTn>
                                         <p:tgtEl>
-                                          <p:spTgt spid="13"/>
+                                          <p:spTgt spid="5"/>
                                         </p:tgtEl>
                                         <p:attrNameLst>
                                           <p:attrName>style.visibility</p:attrName>
@@ -7575,17 +7435,17 @@
                                     </p:set>
                                     <p:animEffect transition="in" filter="fade">
                                       <p:cBhvr>
-                                        <p:cTn id="39" dur="450"/>
-                                        <p:tgtEl>
-                                          <p:spTgt spid="13"/>
+                                        <p:cTn id="39" dur="600"/>
+                                        <p:tgtEl>
+                                          <p:spTgt spid="5"/>
                                         </p:tgtEl>
                                       </p:cBhvr>
                                     </p:animEffect>
                                     <p:anim calcmode="lin" valueType="num">
                                       <p:cBhvr additive="base">
-                                        <p:cTn id="40" dur="450" fill="hold"/>
-                                        <p:tgtEl>
-                                          <p:spTgt spid="13"/>
+                                        <p:cTn id="40" dur="600" fill="hold"/>
+                                        <p:tgtEl>
+                                          <p:spTgt spid="5"/>
                                         </p:tgtEl>
                                         <p:attrNameLst>
                                           <p:attrName>ppt_y</p:attrName>
@@ -7594,7 +7454,7 @@
                                       <p:tavLst>
                                         <p:tav tm="0">
                                           <p:val>
-                                            <p:strVal val="#ppt_y+0.025"/>
+                                            <p:strVal val="#ppt_y+0.04"/>
                                           </p:val>
                                         </p:tav>
                                         <p:tav tm="100000">
@@ -7610,7 +7470,7 @@
                               <p:par>
                                 <p:cTn id="41" presetID="10" presetClass="entr" presetSubtype="0" fill="hold" grpId="0" nodeType="withEffect">
                                   <p:stCondLst>
-                                    <p:cond delay="819"/>
+                                    <p:cond delay="900"/>
                                   </p:stCondLst>
                                   <p:childTnLst>
                                     <p:set>
@@ -7621,7 +7481,7 @@
                                           </p:stCondLst>
                                         </p:cTn>
                                         <p:tgtEl>
-                                          <p:spTgt spid="5"/>
+                                          <p:spTgt spid="8"/>
                                         </p:tgtEl>
                                         <p:attrNameLst>
                                           <p:attrName>style.visibility</p:attrName>
@@ -7633,17 +7493,17 @@
                                     </p:set>
                                     <p:animEffect transition="in" filter="fade">
                                       <p:cBhvr>
-                                        <p:cTn id="43" dur="450"/>
-                                        <p:tgtEl>
-                                          <p:spTgt spid="5"/>
+                                        <p:cTn id="43" dur="600"/>
+                                        <p:tgtEl>
+                                          <p:spTgt spid="8"/>
                                         </p:tgtEl>
                                       </p:cBhvr>
                                     </p:animEffect>
                                     <p:anim calcmode="lin" valueType="num">
                                       <p:cBhvr additive="base">
-                                        <p:cTn id="44" dur="450" fill="hold"/>
-                                        <p:tgtEl>
-                                          <p:spTgt spid="5"/>
+                                        <p:cTn id="44" dur="600" fill="hold"/>
+                                        <p:tgtEl>
+                                          <p:spTgt spid="8"/>
                                         </p:tgtEl>
                                         <p:attrNameLst>
                                           <p:attrName>ppt_y</p:attrName>
@@ -7652,7 +7512,7 @@
                                       <p:tavLst>
                                         <p:tav tm="0">
                                           <p:val>
-                                            <p:strVal val="#ppt_y+0.025"/>
+                                            <p:strVal val="#ppt_y+0.04"/>
                                           </p:val>
                                         </p:tav>
                                         <p:tav tm="100000">
@@ -7668,7 +7528,7 @@
                               <p:par>
                                 <p:cTn id="45" presetID="10" presetClass="entr" presetSubtype="0" fill="hold" grpId="0" nodeType="withEffect">
                                   <p:stCondLst>
-                                    <p:cond delay="910"/>
+                                    <p:cond delay="1000"/>
                                   </p:stCondLst>
                                   <p:childTnLst>
                                     <p:set>
@@ -7679,7 +7539,7 @@
                                           </p:stCondLst>
                                         </p:cTn>
                                         <p:tgtEl>
-                                          <p:spTgt spid="8"/>
+                                          <p:spTgt spid="11"/>
                                         </p:tgtEl>
                                         <p:attrNameLst>
                                           <p:attrName>style.visibility</p:attrName>
@@ -7691,17 +7551,17 @@
                                     </p:set>
                                     <p:animEffect transition="in" filter="fade">
                                       <p:cBhvr>
-                                        <p:cTn id="47" dur="450"/>
-                                        <p:tgtEl>
-                                          <p:spTgt spid="8"/>
+                                        <p:cTn id="47" dur="600"/>
+                                        <p:tgtEl>
+                                          <p:spTgt spid="11"/>
                                         </p:tgtEl>
                                       </p:cBhvr>
                                     </p:animEffect>
                                     <p:anim calcmode="lin" valueType="num">
                                       <p:cBhvr additive="base">
-                                        <p:cTn id="48" dur="450" fill="hold"/>
-                                        <p:tgtEl>
-                                          <p:spTgt spid="8"/>
+                                        <p:cTn id="48" dur="600" fill="hold"/>
+                                        <p:tgtEl>
+                                          <p:spTgt spid="11"/>
                                         </p:tgtEl>
                                         <p:attrNameLst>
                                           <p:attrName>ppt_y</p:attrName>
@@ -7710,7 +7570,7 @@
                                       <p:tavLst>
                                         <p:tav tm="0">
                                           <p:val>
-                                            <p:strVal val="#ppt_y+0.025"/>
+                                            <p:strVal val="#ppt_y+0.04"/>
                                           </p:val>
                                         </p:tav>
                                         <p:tav tm="100000">
@@ -7726,7 +7586,7 @@
                               <p:par>
                                 <p:cTn id="49" presetID="10" presetClass="entr" presetSubtype="0" fill="hold" grpId="0" nodeType="withEffect">
                                   <p:stCondLst>
-                                    <p:cond delay="1001"/>
+                                    <p:cond delay="1100"/>
                                   </p:stCondLst>
                                   <p:childTnLst>
                                     <p:set>
@@ -7737,7 +7597,7 @@
                                           </p:stCondLst>
                                         </p:cTn>
                                         <p:tgtEl>
-                                          <p:spTgt spid="11"/>
+                                          <p:spTgt spid="14"/>
                                         </p:tgtEl>
                                         <p:attrNameLst>
                                           <p:attrName>style.visibility</p:attrName>
@@ -7749,17 +7609,17 @@
                                     </p:set>
                                     <p:animEffect transition="in" filter="fade">
                                       <p:cBhvr>
-                                        <p:cTn id="51" dur="450"/>
-                                        <p:tgtEl>
-                                          <p:spTgt spid="11"/>
+                                        <p:cTn id="51" dur="600"/>
+                                        <p:tgtEl>
+                                          <p:spTgt spid="14"/>
                                         </p:tgtEl>
                                       </p:cBhvr>
                                     </p:animEffect>
                                     <p:anim calcmode="lin" valueType="num">
                                       <p:cBhvr additive="base">
-                                        <p:cTn id="52" dur="450" fill="hold"/>
-                                        <p:tgtEl>
-                                          <p:spTgt spid="11"/>
+                                        <p:cTn id="52" dur="600" fill="hold"/>
+                                        <p:tgtEl>
+                                          <p:spTgt spid="14"/>
                                         </p:tgtEl>
                                         <p:attrNameLst>
                                           <p:attrName>ppt_y</p:attrName>
@@ -7768,7 +7628,7 @@
                                       <p:tavLst>
                                         <p:tav tm="0">
                                           <p:val>
-                                            <p:strVal val="#ppt_y+0.025"/>
+                                            <p:strVal val="#ppt_y+0.04"/>
                                           </p:val>
                                         </p:tav>
                                         <p:tav tm="100000">
@@ -7784,7 +7644,7 @@
                               <p:par>
                                 <p:cTn id="53" presetID="10" presetClass="entr" presetSubtype="0" fill="hold" grpId="0" nodeType="withEffect">
                                   <p:stCondLst>
-                                    <p:cond delay="1092"/>
+                                    <p:cond delay="1200"/>
                                   </p:stCondLst>
                                   <p:childTnLst>
                                     <p:set>
@@ -7795,7 +7655,7 @@
                                           </p:stCondLst>
                                         </p:cTn>
                                         <p:tgtEl>
-                                          <p:spTgt spid="14"/>
+                                          <p:spTgt spid="2"/>
                                         </p:tgtEl>
                                         <p:attrNameLst>
                                           <p:attrName>style.visibility</p:attrName>
@@ -7807,17 +7667,17 @@
                                     </p:set>
                                     <p:animEffect transition="in" filter="fade">
                                       <p:cBhvr>
-                                        <p:cTn id="55" dur="450"/>
-                                        <p:tgtEl>
-                                          <p:spTgt spid="14"/>
+                                        <p:cTn id="55" dur="600"/>
+                                        <p:tgtEl>
+                                          <p:spTgt spid="2"/>
                                         </p:tgtEl>
                                       </p:cBhvr>
                                     </p:animEffect>
                                     <p:anim calcmode="lin" valueType="num">
                                       <p:cBhvr additive="base">
-                                        <p:cTn id="56" dur="450" fill="hold"/>
-                                        <p:tgtEl>
-                                          <p:spTgt spid="14"/>
+                                        <p:cTn id="56" dur="600" fill="hold"/>
+                                        <p:tgtEl>
+                                          <p:spTgt spid="2"/>
                                         </p:tgtEl>
                                         <p:attrNameLst>
                                           <p:attrName>ppt_y</p:attrName>
@@ -7826,7 +7686,7 @@
                                       <p:tavLst>
                                         <p:tav tm="0">
                                           <p:val>
-                                            <p:strVal val="#ppt_y+0.025"/>
+                                            <p:strVal val="#ppt_y+0.04"/>
                                           </p:val>
                                         </p:tav>
                                         <p:tav tm="100000">
@@ -7867,7 +7727,6 @@
       </p:par>
     </p:tnLst>
     <p:bldLst>
-      <p:bldP spid="2" grpId="0"/>
       <p:bldP spid="4" grpId="0"/>
       <p:bldP spid="7" grpId="0"/>
       <p:bldP spid="10" grpId="0"/>
@@ -7876,6 +7735,7 @@
       <p:bldP spid="8" grpId="0"/>
       <p:bldP spid="11" grpId="0"/>
       <p:bldP spid="14" grpId="0"/>
+      <p:bldP spid="2" grpId="0"/>
     </p:bldLst>
   </p:timing>
 </p:sld>

--- a/assets/showcase/aurora-en/Aurora-Buds.pptx
+++ b/assets/showcase/aurora-en/Aurora-Buds.pptx
@@ -1992,7 +1992,7 @@
                                     </p:set>
                                     <p:animEffect transition="in" filter="fade">
                                       <p:cBhvr>
-                                        <p:cTn id="7" dur="600"/>
+                                        <p:cTn id="7" dur="692"/>
                                         <p:tgtEl>
                                           <p:spTgt spid="3"/>
                                         </p:tgtEl>
@@ -2000,7 +2000,7 @@
                                     </p:animEffect>
                                     <p:animScale>
                                       <p:cBhvr>
-                                        <p:cTn id="8" dur="600" fill="hold"/>
+                                        <p:cTn id="8" dur="692" fill="hold" decel="60000"/>
                                         <p:tgtEl>
                                           <p:spTgt spid="3"/>
                                         </p:tgtEl>
@@ -2037,7 +2037,7 @@
                                     </p:set>
                                     <p:animEffect transition="in" filter="fade">
                                       <p:cBhvr>
-                                        <p:cTn id="11" dur="600"/>
+                                        <p:cTn id="11" dur="567"/>
                                         <p:tgtEl>
                                           <p:spTgt spid="4"/>
                                         </p:tgtEl>
@@ -2045,7 +2045,7 @@
                                     </p:animEffect>
                                     <p:anim calcmode="lin" valueType="num">
                                       <p:cBhvr additive="base">
-                                        <p:cTn id="12" dur="600" fill="hold"/>
+                                        <p:cTn id="12" dur="567" fill="hold" decel="80000"/>
                                         <p:tgtEl>
                                           <p:spTgt spid="4"/>
                                         </p:tgtEl>
@@ -2095,7 +2095,7 @@
                                     </p:set>
                                     <p:animEffect transition="in" filter="fade">
                                       <p:cBhvr>
-                                        <p:cTn id="15" dur="600"/>
+                                        <p:cTn id="15" dur="548"/>
                                         <p:tgtEl>
                                           <p:spTgt spid="2"/>
                                         </p:tgtEl>
@@ -2103,7 +2103,7 @@
                                     </p:animEffect>
                                     <p:anim calcmode="lin" valueType="num">
                                       <p:cBhvr additive="base">
-                                        <p:cTn id="16" dur="600" fill="hold"/>
+                                        <p:cTn id="16" dur="548" fill="hold" decel="80000"/>
                                         <p:tgtEl>
                                           <p:spTgt spid="2"/>
                                         </p:tgtEl>
@@ -2153,7 +2153,7 @@
                                     </p:set>
                                     <p:animEffect transition="in" filter="fade">
                                       <p:cBhvr>
-                                        <p:cTn id="19" dur="600"/>
+                                        <p:cTn id="19" dur="548"/>
                                         <p:tgtEl>
                                           <p:spTgt spid="5"/>
                                         </p:tgtEl>
@@ -2161,7 +2161,7 @@
                                     </p:animEffect>
                                     <p:anim calcmode="lin" valueType="num">
                                       <p:cBhvr additive="base">
-                                        <p:cTn id="20" dur="600" fill="hold"/>
+                                        <p:cTn id="20" dur="548" fill="hold" decel="80000"/>
                                         <p:tgtEl>
                                           <p:spTgt spid="5"/>
                                         </p:tgtEl>
@@ -2473,7 +2473,7 @@
                                     </p:set>
                                     <p:animEffect transition="in" filter="fade">
                                       <p:cBhvr>
-                                        <p:cTn id="7" dur="600"/>
+                                        <p:cTn id="7" dur="567"/>
                                         <p:tgtEl>
                                           <p:spTgt spid="3"/>
                                         </p:tgtEl>
@@ -2481,7 +2481,7 @@
                                     </p:animEffect>
                                     <p:anim calcmode="lin" valueType="num">
                                       <p:cBhvr additive="base">
-                                        <p:cTn id="8" dur="600" fill="hold"/>
+                                        <p:cTn id="8" dur="567" fill="hold" decel="80000"/>
                                         <p:tgtEl>
                                           <p:spTgt spid="3"/>
                                         </p:tgtEl>
@@ -2531,7 +2531,7 @@
                                     </p:set>
                                     <p:animEffect transition="in" filter="fade">
                                       <p:cBhvr>
-                                        <p:cTn id="11" dur="600"/>
+                                        <p:cTn id="11" dur="702"/>
                                         <p:tgtEl>
                                           <p:spTgt spid="2"/>
                                         </p:tgtEl>
@@ -2539,7 +2539,7 @@
                                     </p:animEffect>
                                     <p:animScale>
                                       <p:cBhvr>
-                                        <p:cTn id="12" dur="600" fill="hold"/>
+                                        <p:cTn id="12" dur="702" fill="hold" decel="60000"/>
                                         <p:tgtEl>
                                           <p:spTgt spid="2"/>
                                         </p:tgtEl>
@@ -2576,7 +2576,7 @@
                                     </p:set>
                                     <p:animEffect transition="in" filter="fade">
                                       <p:cBhvr>
-                                        <p:cTn id="15" dur="600"/>
+                                        <p:cTn id="15" dur="567"/>
                                         <p:tgtEl>
                                           <p:spTgt spid="4"/>
                                         </p:tgtEl>
@@ -2584,7 +2584,7 @@
                                     </p:animEffect>
                                     <p:anim calcmode="lin" valueType="num">
                                       <p:cBhvr additive="base">
-                                        <p:cTn id="16" dur="600" fill="hold"/>
+                                        <p:cTn id="16" dur="567" fill="hold" decel="80000"/>
                                         <p:tgtEl>
                                           <p:spTgt spid="4"/>
                                         </p:tgtEl>
@@ -2634,7 +2634,7 @@
                                     </p:set>
                                     <p:animEffect transition="in" filter="fade">
                                       <p:cBhvr>
-                                        <p:cTn id="19" dur="600"/>
+                                        <p:cTn id="19" dur="548"/>
                                         <p:tgtEl>
                                           <p:spTgt spid="5"/>
                                         </p:tgtEl>
@@ -2642,7 +2642,7 @@
                                     </p:animEffect>
                                     <p:anim calcmode="lin" valueType="num">
                                       <p:cBhvr additive="base">
-                                        <p:cTn id="20" dur="600" fill="hold"/>
+                                        <p:cTn id="20" dur="548" fill="hold" decel="80000"/>
                                         <p:tgtEl>
                                           <p:spTgt spid="5"/>
                                         </p:tgtEl>
@@ -2915,7 +2915,7 @@
                                     </p:set>
                                     <p:animEffect transition="in" filter="fade">
                                       <p:cBhvr>
-                                        <p:cTn id="7" dur="600"/>
+                                        <p:cTn id="7" dur="654"/>
                                         <p:tgtEl>
                                           <p:spTgt spid="2"/>
                                         </p:tgtEl>
@@ -2923,7 +2923,7 @@
                                     </p:animEffect>
                                     <p:anim calcmode="lin" valueType="num">
                                       <p:cBhvr additive="base">
-                                        <p:cTn id="8" dur="600" fill="hold"/>
+                                        <p:cTn id="8" dur="654" fill="hold" decel="80000"/>
                                         <p:tgtEl>
                                           <p:spTgt spid="2"/>
                                         </p:tgtEl>
@@ -2973,7 +2973,7 @@
                                     </p:set>
                                     <p:animEffect transition="in" filter="fade">
                                       <p:cBhvr>
-                                        <p:cTn id="11" dur="600"/>
+                                        <p:cTn id="11" dur="567"/>
                                         <p:tgtEl>
                                           <p:spTgt spid="3"/>
                                         </p:tgtEl>
@@ -2981,7 +2981,7 @@
                                     </p:animEffect>
                                     <p:anim calcmode="lin" valueType="num">
                                       <p:cBhvr additive="base">
-                                        <p:cTn id="12" dur="600" fill="hold"/>
+                                        <p:cTn id="12" dur="567" fill="hold" decel="80000"/>
                                         <p:tgtEl>
                                           <p:spTgt spid="3"/>
                                         </p:tgtEl>
@@ -3031,7 +3031,7 @@
                                     </p:set>
                                     <p:animEffect transition="in" filter="fade">
                                       <p:cBhvr>
-                                        <p:cTn id="15" dur="600"/>
+                                        <p:cTn id="15" dur="548"/>
                                         <p:tgtEl>
                                           <p:spTgt spid="4"/>
                                         </p:tgtEl>
@@ -3039,7 +3039,7 @@
                                     </p:animEffect>
                                     <p:anim calcmode="lin" valueType="num">
                                       <p:cBhvr additive="base">
-                                        <p:cTn id="16" dur="600" fill="hold"/>
+                                        <p:cTn id="16" dur="548" fill="hold" decel="80000"/>
                                         <p:tgtEl>
                                           <p:spTgt spid="4"/>
                                         </p:tgtEl>
@@ -3222,7 +3222,7 @@
                                     </p:set>
                                     <p:animEffect transition="in" filter="fade">
                                       <p:cBhvr>
-                                        <p:cTn id="7" dur="600"/>
+                                        <p:cTn id="7" dur="1134"/>
                                         <p:tgtEl>
                                           <p:spTgt spid="2"/>
                                         </p:tgtEl>
@@ -3230,7 +3230,7 @@
                                     </p:animEffect>
                                     <p:anim calcmode="lin" valueType="num">
                                       <p:cBhvr additive="base">
-                                        <p:cTn id="8" dur="600" fill="hold"/>
+                                        <p:cTn id="8" dur="1134" fill="hold" decel="80000"/>
                                         <p:tgtEl>
                                           <p:spTgt spid="2"/>
                                         </p:tgtEl>
@@ -3486,7 +3486,7 @@
                                     </p:set>
                                     <p:animEffect transition="in" filter="fade">
                                       <p:cBhvr>
-                                        <p:cTn id="7" dur="600"/>
+                                        <p:cTn id="7" dur="634"/>
                                         <p:tgtEl>
                                           <p:spTgt spid="3"/>
                                         </p:tgtEl>
@@ -3494,7 +3494,7 @@
                                     </p:animEffect>
                                     <p:anim calcmode="lin" valueType="num">
                                       <p:cBhvr additive="base">
-                                        <p:cTn id="8" dur="600" fill="hold"/>
+                                        <p:cTn id="8" dur="634" fill="hold" decel="80000"/>
                                         <p:tgtEl>
                                           <p:spTgt spid="3"/>
                                         </p:tgtEl>
@@ -3544,7 +3544,7 @@
                                     </p:set>
                                     <p:animEffect transition="in" filter="fade">
                                       <p:cBhvr>
-                                        <p:cTn id="11" dur="600"/>
+                                        <p:cTn id="11" dur="567"/>
                                         <p:tgtEl>
                                           <p:spTgt spid="4"/>
                                         </p:tgtEl>
@@ -3552,7 +3552,7 @@
                                     </p:animEffect>
                                     <p:anim calcmode="lin" valueType="num">
                                       <p:cBhvr additive="base">
-                                        <p:cTn id="12" dur="600" fill="hold"/>
+                                        <p:cTn id="12" dur="567" fill="hold" decel="80000"/>
                                         <p:tgtEl>
                                           <p:spTgt spid="4"/>
                                         </p:tgtEl>
@@ -3602,7 +3602,7 @@
                                     </p:set>
                                     <p:animEffect transition="in" filter="fade">
                                       <p:cBhvr>
-                                        <p:cTn id="15" dur="600"/>
+                                        <p:cTn id="15" dur="673"/>
                                         <p:tgtEl>
                                           <p:spTgt spid="2"/>
                                         </p:tgtEl>
@@ -3610,7 +3610,7 @@
                                     </p:animEffect>
                                     <p:animScale>
                                       <p:cBhvr>
-                                        <p:cTn id="16" dur="600" fill="hold"/>
+                                        <p:cTn id="16" dur="673" fill="hold" decel="60000"/>
                                         <p:tgtEl>
                                           <p:spTgt spid="2"/>
                                         </p:tgtEl>
@@ -3816,7 +3816,7 @@
                                     </p:set>
                                     <p:animEffect transition="in" filter="fade">
                                       <p:cBhvr>
-                                        <p:cTn id="7" dur="600"/>
+                                        <p:cTn id="7" dur="928"/>
                                         <p:tgtEl>
                                           <p:spTgt spid="2"/>
                                         </p:tgtEl>
@@ -3824,7 +3824,7 @@
                                     </p:animEffect>
                                     <p:anim calcmode="lin" valueType="num">
                                       <p:cBhvr additive="base">
-                                        <p:cTn id="8" dur="600" fill="hold"/>
+                                        <p:cTn id="8" dur="928" fill="hold" decel="80000"/>
                                         <p:tgtEl>
                                           <p:spTgt spid="2"/>
                                         </p:tgtEl>
@@ -3874,7 +3874,7 @@
                                     </p:set>
                                     <p:animEffect transition="in" filter="fade">
                                       <p:cBhvr>
-                                        <p:cTn id="11" dur="600"/>
+                                        <p:cTn id="11" dur="794"/>
                                         <p:tgtEl>
                                           <p:spTgt spid="3"/>
                                         </p:tgtEl>
@@ -3882,7 +3882,7 @@
                                     </p:animEffect>
                                     <p:anim calcmode="lin" valueType="num">
                                       <p:cBhvr additive="base">
-                                        <p:cTn id="12" dur="600" fill="hold"/>
+                                        <p:cTn id="12" dur="794" fill="hold" decel="80000"/>
                                         <p:tgtEl>
                                           <p:spTgt spid="3"/>
                                         </p:tgtEl>
@@ -4192,7 +4192,7 @@
                                     </p:set>
                                     <p:animEffect transition="in" filter="fade">
                                       <p:cBhvr>
-                                        <p:cTn id="7" dur="600"/>
+                                        <p:cTn id="7" dur="577"/>
                                         <p:tgtEl>
                                           <p:spTgt spid="4"/>
                                         </p:tgtEl>
@@ -4200,7 +4200,7 @@
                                     </p:animEffect>
                                     <p:anim calcmode="lin" valueType="num">
                                       <p:cBhvr additive="base">
-                                        <p:cTn id="8" dur="600" fill="hold"/>
+                                        <p:cTn id="8" dur="577" fill="hold" decel="80000"/>
                                         <p:tgtEl>
                                           <p:spTgt spid="4"/>
                                         </p:tgtEl>
@@ -4250,7 +4250,7 @@
                                     </p:set>
                                     <p:animEffect transition="in" filter="fade">
                                       <p:cBhvr>
-                                        <p:cTn id="11" dur="600"/>
+                                        <p:cTn id="11" dur="730"/>
                                         <p:tgtEl>
                                           <p:spTgt spid="3"/>
                                         </p:tgtEl>
@@ -4258,7 +4258,7 @@
                                     </p:animEffect>
                                     <p:animScale>
                                       <p:cBhvr>
-                                        <p:cTn id="12" dur="600" fill="hold"/>
+                                        <p:cTn id="12" dur="730" fill="hold" decel="60000"/>
                                         <p:tgtEl>
                                           <p:spTgt spid="3"/>
                                         </p:tgtEl>
@@ -4295,7 +4295,7 @@
                                     </p:set>
                                     <p:animEffect transition="in" filter="fade">
                                       <p:cBhvr>
-                                        <p:cTn id="15" dur="600"/>
+                                        <p:cTn id="15" dur="596"/>
                                         <p:tgtEl>
                                           <p:spTgt spid="5"/>
                                         </p:tgtEl>
@@ -4303,7 +4303,7 @@
                                     </p:animEffect>
                                     <p:anim calcmode="lin" valueType="num">
                                       <p:cBhvr additive="base">
-                                        <p:cTn id="16" dur="600" fill="hold"/>
+                                        <p:cTn id="16" dur="596" fill="hold" decel="80000"/>
                                         <p:tgtEl>
                                           <p:spTgt spid="5"/>
                                         </p:tgtEl>
@@ -4353,7 +4353,7 @@
                                     </p:set>
                                     <p:animEffect transition="in" filter="fade">
                                       <p:cBhvr>
-                                        <p:cTn id="19" dur="600"/>
+                                        <p:cTn id="19" dur="548"/>
                                         <p:tgtEl>
                                           <p:spTgt spid="2"/>
                                         </p:tgtEl>
@@ -4361,7 +4361,7 @@
                                     </p:animEffect>
                                     <p:anim calcmode="lin" valueType="num">
                                       <p:cBhvr additive="base">
-                                        <p:cTn id="20" dur="600" fill="hold"/>
+                                        <p:cTn id="20" dur="548" fill="hold" decel="80000"/>
                                         <p:tgtEl>
                                           <p:spTgt spid="2"/>
                                         </p:tgtEl>
@@ -4785,7 +4785,7 @@
                                     </p:set>
                                     <p:animEffect transition="in" filter="fade">
                                       <p:cBhvr>
-                                        <p:cTn id="7" dur="600"/>
+                                        <p:cTn id="7" dur="567"/>
                                         <p:tgtEl>
                                           <p:spTgt spid="3"/>
                                         </p:tgtEl>
@@ -4793,7 +4793,7 @@
                                     </p:animEffect>
                                     <p:anim calcmode="lin" valueType="num">
                                       <p:cBhvr additive="base">
-                                        <p:cTn id="8" dur="600" fill="hold"/>
+                                        <p:cTn id="8" dur="567" fill="hold" decel="80000"/>
                                         <p:tgtEl>
                                           <p:spTgt spid="3"/>
                                         </p:tgtEl>
@@ -4820,7 +4820,7 @@
                               <p:par>
                                 <p:cTn id="9" presetID="10" presetClass="entr" presetSubtype="0" fill="hold" grpId="0" nodeType="withEffect">
                                   <p:stCondLst>
-                                    <p:cond delay="200"/>
+                                    <p:cond delay="40"/>
                                   </p:stCondLst>
                                   <p:childTnLst>
                                     <p:set>
@@ -4843,7 +4843,7 @@
                                     </p:set>
                                     <p:animEffect transition="in" filter="fade">
                                       <p:cBhvr>
-                                        <p:cTn id="11" dur="600"/>
+                                        <p:cTn id="11" dur="567"/>
                                         <p:tgtEl>
                                           <p:spTgt spid="5"/>
                                         </p:tgtEl>
@@ -4851,7 +4851,7 @@
                                     </p:animEffect>
                                     <p:anim calcmode="lin" valueType="num">
                                       <p:cBhvr additive="base">
-                                        <p:cTn id="12" dur="600" fill="hold"/>
+                                        <p:cTn id="12" dur="567" fill="hold" decel="80000"/>
                                         <p:tgtEl>
                                           <p:spTgt spid="5"/>
                                         </p:tgtEl>
@@ -4878,7 +4878,7 @@
                               <p:par>
                                 <p:cTn id="13" presetID="10" presetClass="entr" presetSubtype="0" fill="hold" grpId="0" nodeType="withEffect">
                                   <p:stCondLst>
-                                    <p:cond delay="400"/>
+                                    <p:cond delay="80"/>
                                   </p:stCondLst>
                                   <p:childTnLst>
                                     <p:set>
@@ -4901,7 +4901,7 @@
                                     </p:set>
                                     <p:animEffect transition="in" filter="fade">
                                       <p:cBhvr>
-                                        <p:cTn id="15" dur="600"/>
+                                        <p:cTn id="15" dur="567"/>
                                         <p:tgtEl>
                                           <p:spTgt spid="7"/>
                                         </p:tgtEl>
@@ -4909,7 +4909,7 @@
                                     </p:animEffect>
                                     <p:anim calcmode="lin" valueType="num">
                                       <p:cBhvr additive="base">
-                                        <p:cTn id="16" dur="600" fill="hold"/>
+                                        <p:cTn id="16" dur="567" fill="hold" decel="80000"/>
                                         <p:tgtEl>
                                           <p:spTgt spid="7"/>
                                         </p:tgtEl>
@@ -4936,7 +4936,7 @@
                               <p:par>
                                 <p:cTn id="17" presetID="10" presetClass="entr" presetSubtype="0" fill="hold" grpId="0" nodeType="withEffect">
                                   <p:stCondLst>
-                                    <p:cond delay="600"/>
+                                    <p:cond delay="200"/>
                                   </p:stCondLst>
                                   <p:childTnLst>
                                     <p:set>
@@ -4959,7 +4959,7 @@
                                     </p:set>
                                     <p:animEffect transition="in" filter="fade">
                                       <p:cBhvr>
-                                        <p:cTn id="19" dur="600"/>
+                                        <p:cTn id="19" dur="740"/>
                                         <p:tgtEl>
                                           <p:spTgt spid="4"/>
                                         </p:tgtEl>
@@ -4967,7 +4967,7 @@
                                     </p:animEffect>
                                     <p:anim calcmode="lin" valueType="num">
                                       <p:cBhvr additive="base">
-                                        <p:cTn id="20" dur="600" fill="hold"/>
+                                        <p:cTn id="20" dur="740" fill="hold" decel="80000"/>
                                         <p:tgtEl>
                                           <p:spTgt spid="4"/>
                                         </p:tgtEl>
@@ -4994,7 +4994,7 @@
                               <p:par>
                                 <p:cTn id="21" presetID="10" presetClass="entr" presetSubtype="0" fill="hold" grpId="0" nodeType="withEffect">
                                   <p:stCondLst>
-                                    <p:cond delay="800"/>
+                                    <p:cond delay="240"/>
                                   </p:stCondLst>
                                   <p:childTnLst>
                                     <p:set>
@@ -5017,7 +5017,7 @@
                                     </p:set>
                                     <p:animEffect transition="in" filter="fade">
                                       <p:cBhvr>
-                                        <p:cTn id="23" dur="600"/>
+                                        <p:cTn id="23" dur="740"/>
                                         <p:tgtEl>
                                           <p:spTgt spid="6"/>
                                         </p:tgtEl>
@@ -5025,7 +5025,7 @@
                                     </p:animEffect>
                                     <p:anim calcmode="lin" valueType="num">
                                       <p:cBhvr additive="base">
-                                        <p:cTn id="24" dur="600" fill="hold"/>
+                                        <p:cTn id="24" dur="740" fill="hold" decel="80000"/>
                                         <p:tgtEl>
                                           <p:spTgt spid="6"/>
                                         </p:tgtEl>
@@ -5052,7 +5052,7 @@
                               <p:par>
                                 <p:cTn id="25" presetID="10" presetClass="entr" presetSubtype="0" fill="hold" grpId="0" nodeType="withEffect">
                                   <p:stCondLst>
-                                    <p:cond delay="1000"/>
+                                    <p:cond delay="280"/>
                                   </p:stCondLst>
                                   <p:childTnLst>
                                     <p:set>
@@ -5075,7 +5075,7 @@
                                     </p:set>
                                     <p:animEffect transition="in" filter="fade">
                                       <p:cBhvr>
-                                        <p:cTn id="27" dur="600"/>
+                                        <p:cTn id="27" dur="740"/>
                                         <p:tgtEl>
                                           <p:spTgt spid="8"/>
                                         </p:tgtEl>
@@ -5083,7 +5083,7 @@
                                     </p:animEffect>
                                     <p:anim calcmode="lin" valueType="num">
                                       <p:cBhvr additive="base">
-                                        <p:cTn id="28" dur="600" fill="hold"/>
+                                        <p:cTn id="28" dur="740" fill="hold" decel="80000"/>
                                         <p:tgtEl>
                                           <p:spTgt spid="8"/>
                                         </p:tgtEl>
@@ -5110,7 +5110,7 @@
                               <p:par>
                                 <p:cTn id="29" presetID="10" presetClass="entr" presetSubtype="0" fill="hold" grpId="0" nodeType="withEffect">
                                   <p:stCondLst>
-                                    <p:cond delay="1200"/>
+                                    <p:cond delay="400"/>
                                   </p:stCondLst>
                                   <p:childTnLst>
                                     <p:set>
@@ -5133,7 +5133,7 @@
                                     </p:set>
                                     <p:animEffect transition="in" filter="fade">
                                       <p:cBhvr>
-                                        <p:cTn id="31" dur="600"/>
+                                        <p:cTn id="31" dur="586"/>
                                         <p:tgtEl>
                                           <p:spTgt spid="2"/>
                                         </p:tgtEl>
@@ -5141,7 +5141,7 @@
                                     </p:animEffect>
                                     <p:anim calcmode="lin" valueType="num">
                                       <p:cBhvr additive="base">
-                                        <p:cTn id="32" dur="600" fill="hold"/>
+                                        <p:cTn id="32" dur="586" fill="hold" decel="80000"/>
                                         <p:tgtEl>
                                           <p:spTgt spid="2"/>
                                         </p:tgtEl>
@@ -5456,7 +5456,7 @@
                                     </p:set>
                                     <p:animEffect transition="in" filter="fade">
                                       <p:cBhvr>
-                                        <p:cTn id="7" dur="600"/>
+                                        <p:cTn id="7" dur="577"/>
                                         <p:tgtEl>
                                           <p:spTgt spid="4"/>
                                         </p:tgtEl>
@@ -5464,7 +5464,7 @@
                                     </p:animEffect>
                                     <p:anim calcmode="lin" valueType="num">
                                       <p:cBhvr additive="base">
-                                        <p:cTn id="8" dur="600" fill="hold"/>
+                                        <p:cTn id="8" dur="577" fill="hold" decel="80000"/>
                                         <p:tgtEl>
                                           <p:spTgt spid="4"/>
                                         </p:tgtEl>
@@ -5514,7 +5514,7 @@
                                     </p:set>
                                     <p:animEffect transition="in" filter="fade">
                                       <p:cBhvr>
-                                        <p:cTn id="11" dur="600"/>
+                                        <p:cTn id="11" dur="730"/>
                                         <p:tgtEl>
                                           <p:spTgt spid="3"/>
                                         </p:tgtEl>
@@ -5522,7 +5522,7 @@
                                     </p:animEffect>
                                     <p:animScale>
                                       <p:cBhvr>
-                                        <p:cTn id="12" dur="600" fill="hold"/>
+                                        <p:cTn id="12" dur="730" fill="hold" decel="60000"/>
                                         <p:tgtEl>
                                           <p:spTgt spid="3"/>
                                         </p:tgtEl>
@@ -5559,7 +5559,7 @@
                                     </p:set>
                                     <p:animEffect transition="in" filter="fade">
                                       <p:cBhvr>
-                                        <p:cTn id="15" dur="600"/>
+                                        <p:cTn id="15" dur="596"/>
                                         <p:tgtEl>
                                           <p:spTgt spid="5"/>
                                         </p:tgtEl>
@@ -5567,7 +5567,7 @@
                                     </p:animEffect>
                                     <p:anim calcmode="lin" valueType="num">
                                       <p:cBhvr additive="base">
-                                        <p:cTn id="16" dur="600" fill="hold"/>
+                                        <p:cTn id="16" dur="596" fill="hold" decel="80000"/>
                                         <p:tgtEl>
                                           <p:spTgt spid="5"/>
                                         </p:tgtEl>
@@ -5617,7 +5617,7 @@
                                     </p:set>
                                     <p:animEffect transition="in" filter="fade">
                                       <p:cBhvr>
-                                        <p:cTn id="19" dur="600"/>
+                                        <p:cTn id="19" dur="548"/>
                                         <p:tgtEl>
                                           <p:spTgt spid="2"/>
                                         </p:tgtEl>
@@ -5625,7 +5625,7 @@
                                     </p:animEffect>
                                     <p:anim calcmode="lin" valueType="num">
                                       <p:cBhvr additive="base">
-                                        <p:cTn id="20" dur="600" fill="hold"/>
+                                        <p:cTn id="20" dur="548" fill="hold" decel="80000"/>
                                         <p:tgtEl>
                                           <p:spTgt spid="2"/>
                                         </p:tgtEl>
@@ -6107,7 +6107,7 @@
                                     </p:set>
                                     <p:animEffect transition="in" filter="wipe(left)">
                                       <p:cBhvr>
-                                        <p:cTn id="7" dur="600"/>
+                                        <p:cTn id="7" dur="810"/>
                                         <p:tgtEl>
                                           <p:spTgt spid="8"/>
                                         </p:tgtEl>
@@ -6119,7 +6119,7 @@
                               <p:par>
                                 <p:cTn id="8" presetID="10" presetClass="entr" presetSubtype="0" fill="hold" grpId="0" nodeType="withEffect">
                                   <p:stCondLst>
-                                    <p:cond delay="200"/>
+                                    <p:cond delay="40"/>
                                   </p:stCondLst>
                                   <p:childTnLst>
                                     <p:set>
@@ -6142,7 +6142,7 @@
                                     </p:set>
                                     <p:animEffect transition="in" filter="fade">
                                       <p:cBhvr>
-                                        <p:cTn id="10" dur="600"/>
+                                        <p:cTn id="10" dur="615"/>
                                         <p:tgtEl>
                                           <p:spTgt spid="4"/>
                                         </p:tgtEl>
@@ -6150,7 +6150,7 @@
                                     </p:animEffect>
                                     <p:anim calcmode="lin" valueType="num">
                                       <p:cBhvr additive="base">
-                                        <p:cTn id="11" dur="600" fill="hold"/>
+                                        <p:cTn id="11" dur="615" fill="hold" decel="80000"/>
                                         <p:tgtEl>
                                           <p:spTgt spid="4"/>
                                         </p:tgtEl>
@@ -6177,7 +6177,7 @@
                               <p:par>
                                 <p:cTn id="12" presetID="10" presetClass="entr" presetSubtype="0" fill="hold" grpId="0" nodeType="withEffect">
                                   <p:stCondLst>
-                                    <p:cond delay="400"/>
+                                    <p:cond delay="80"/>
                                   </p:stCondLst>
                                   <p:childTnLst>
                                     <p:set>
@@ -6200,7 +6200,7 @@
                                     </p:set>
                                     <p:animEffect transition="in" filter="fade">
                                       <p:cBhvr>
-                                        <p:cTn id="14" dur="600"/>
+                                        <p:cTn id="14" dur="615"/>
                                         <p:tgtEl>
                                           <p:spTgt spid="5"/>
                                         </p:tgtEl>
@@ -6208,7 +6208,7 @@
                                     </p:animEffect>
                                     <p:anim calcmode="lin" valueType="num">
                                       <p:cBhvr additive="base">
-                                        <p:cTn id="15" dur="600" fill="hold"/>
+                                        <p:cTn id="15" dur="615" fill="hold" decel="80000"/>
                                         <p:tgtEl>
                                           <p:spTgt spid="5"/>
                                         </p:tgtEl>
@@ -6235,7 +6235,7 @@
                               <p:par>
                                 <p:cTn id="16" presetID="10" presetClass="entr" presetSubtype="0" fill="hold" grpId="0" nodeType="withEffect">
                                   <p:stCondLst>
-                                    <p:cond delay="600"/>
+                                    <p:cond delay="120"/>
                                   </p:stCondLst>
                                   <p:childTnLst>
                                     <p:set>
@@ -6258,7 +6258,7 @@
                                     </p:set>
                                     <p:animEffect transition="in" filter="fade">
                                       <p:cBhvr>
-                                        <p:cTn id="18" dur="600"/>
+                                        <p:cTn id="18" dur="810"/>
                                         <p:tgtEl>
                                           <p:spTgt spid="6"/>
                                         </p:tgtEl>
@@ -6266,7 +6266,7 @@
                                     </p:animEffect>
                                     <p:anim calcmode="lin" valueType="num">
                                       <p:cBhvr additive="base">
-                                        <p:cTn id="19" dur="600" fill="hold"/>
+                                        <p:cTn id="19" dur="810" fill="hold" decel="80000"/>
                                         <p:tgtEl>
                                           <p:spTgt spid="6"/>
                                         </p:tgtEl>
@@ -6293,7 +6293,7 @@
                               <p:par>
                                 <p:cTn id="20" presetID="10" presetClass="entr" presetSubtype="0" fill="hold" grpId="0" nodeType="withEffect">
                                   <p:stCondLst>
-                                    <p:cond delay="800"/>
+                                    <p:cond delay="160"/>
                                   </p:stCondLst>
                                   <p:childTnLst>
                                     <p:set>
@@ -6316,7 +6316,7 @@
                                     </p:set>
                                     <p:animEffect transition="in" filter="fade">
                                       <p:cBhvr>
-                                        <p:cTn id="22" dur="600"/>
+                                        <p:cTn id="22" dur="810"/>
                                         <p:tgtEl>
                                           <p:spTgt spid="7"/>
                                         </p:tgtEl>
@@ -6324,7 +6324,7 @@
                                     </p:animEffect>
                                     <p:anim calcmode="lin" valueType="num">
                                       <p:cBhvr additive="base">
-                                        <p:cTn id="23" dur="600" fill="hold"/>
+                                        <p:cTn id="23" dur="810" fill="hold" decel="80000"/>
                                         <p:tgtEl>
                                           <p:spTgt spid="7"/>
                                         </p:tgtEl>
@@ -6351,7 +6351,7 @@
                               <p:par>
                                 <p:cTn id="24" presetID="10" presetClass="entr" presetSubtype="0" fill="hold" grpId="0" nodeType="withEffect">
                                   <p:stCondLst>
-                                    <p:cond delay="1000"/>
+                                    <p:cond delay="200"/>
                                   </p:stCondLst>
                                   <p:childTnLst>
                                     <p:set>
@@ -6374,7 +6374,7 @@
                                     </p:set>
                                     <p:animEffect transition="in" filter="fade">
                                       <p:cBhvr>
-                                        <p:cTn id="26" dur="600"/>
+                                        <p:cTn id="26" dur="548"/>
                                         <p:tgtEl>
                                           <p:spTgt spid="2"/>
                                         </p:tgtEl>
@@ -6382,7 +6382,7 @@
                                     </p:animEffect>
                                     <p:anim calcmode="lin" valueType="num">
                                       <p:cBhvr additive="base">
-                                        <p:cTn id="27" dur="600" fill="hold"/>
+                                        <p:cTn id="27" dur="548" fill="hold" decel="80000"/>
                                         <p:tgtEl>
                                           <p:spTgt spid="2"/>
                                         </p:tgtEl>
@@ -6409,7 +6409,7 @@
                               <p:par>
                                 <p:cTn id="28" presetID="10" presetClass="entr" presetSubtype="0" fill="hold" grpId="0" nodeType="withEffect">
                                   <p:stCondLst>
-                                    <p:cond delay="1200"/>
+                                    <p:cond delay="240"/>
                                   </p:stCondLst>
                                   <p:childTnLst>
                                     <p:set>
@@ -6432,7 +6432,7 @@
                                     </p:set>
                                     <p:animEffect transition="in" filter="fade">
                                       <p:cBhvr>
-                                        <p:cTn id="30" dur="600"/>
+                                        <p:cTn id="30" dur="548"/>
                                         <p:tgtEl>
                                           <p:spTgt spid="3"/>
                                         </p:tgtEl>
@@ -6440,7 +6440,7 @@
                                     </p:animEffect>
                                     <p:anim calcmode="lin" valueType="num">
                                       <p:cBhvr additive="base">
-                                        <p:cTn id="31" dur="600" fill="hold"/>
+                                        <p:cTn id="31" dur="548" fill="hold" decel="80000"/>
                                         <p:tgtEl>
                                           <p:spTgt spid="3"/>
                                         </p:tgtEl>
@@ -7023,7 +7023,7 @@
                                     </p:set>
                                     <p:animEffect transition="in" filter="fade">
                                       <p:cBhvr>
-                                        <p:cTn id="7" dur="600"/>
+                                        <p:cTn id="7" dur="759"/>
                                         <p:tgtEl>
                                           <p:spTgt spid="3"/>
                                         </p:tgtEl>
@@ -7031,7 +7031,7 @@
                                     </p:animEffect>
                                     <p:animScale>
                                       <p:cBhvr>
-                                        <p:cTn id="8" dur="600" fill="hold"/>
+                                        <p:cTn id="8" dur="759" fill="hold" decel="60000"/>
                                         <p:tgtEl>
                                           <p:spTgt spid="3"/>
                                         </p:tgtEl>
@@ -7045,7 +7045,7 @@
                               <p:par>
                                 <p:cTn id="9" presetID="10" presetClass="entr" presetSubtype="0" fill="hold" grpId="0" nodeType="withEffect">
                                   <p:stCondLst>
-                                    <p:cond delay="100"/>
+                                    <p:cond delay="40"/>
                                   </p:stCondLst>
                                   <p:childTnLst>
                                     <p:set>
@@ -7068,7 +7068,7 @@
                                     </p:set>
                                     <p:animEffect transition="in" filter="fade">
                                       <p:cBhvr>
-                                        <p:cTn id="11" dur="600"/>
+                                        <p:cTn id="11" dur="759"/>
                                         <p:tgtEl>
                                           <p:spTgt spid="6"/>
                                         </p:tgtEl>
@@ -7076,7 +7076,7 @@
                                     </p:animEffect>
                                     <p:animScale>
                                       <p:cBhvr>
-                                        <p:cTn id="12" dur="600" fill="hold"/>
+                                        <p:cTn id="12" dur="759" fill="hold" decel="60000"/>
                                         <p:tgtEl>
                                           <p:spTgt spid="6"/>
                                         </p:tgtEl>
@@ -7090,7 +7090,7 @@
                               <p:par>
                                 <p:cTn id="13" presetID="10" presetClass="entr" presetSubtype="0" fill="hold" grpId="0" nodeType="withEffect">
                                   <p:stCondLst>
-                                    <p:cond delay="200"/>
+                                    <p:cond delay="80"/>
                                   </p:stCondLst>
                                   <p:childTnLst>
                                     <p:set>
@@ -7113,7 +7113,7 @@
                                     </p:set>
                                     <p:animEffect transition="in" filter="fade">
                                       <p:cBhvr>
-                                        <p:cTn id="15" dur="600"/>
+                                        <p:cTn id="15" dur="759"/>
                                         <p:tgtEl>
                                           <p:spTgt spid="9"/>
                                         </p:tgtEl>
@@ -7121,7 +7121,7 @@
                                     </p:animEffect>
                                     <p:animScale>
                                       <p:cBhvr>
-                                        <p:cTn id="16" dur="600" fill="hold"/>
+                                        <p:cTn id="16" dur="759" fill="hold" decel="60000"/>
                                         <p:tgtEl>
                                           <p:spTgt spid="9"/>
                                         </p:tgtEl>
@@ -7135,7 +7135,7 @@
                               <p:par>
                                 <p:cTn id="17" presetID="10" presetClass="entr" presetSubtype="0" fill="hold" grpId="0" nodeType="withEffect">
                                   <p:stCondLst>
-                                    <p:cond delay="300"/>
+                                    <p:cond delay="120"/>
                                   </p:stCondLst>
                                   <p:childTnLst>
                                     <p:set>
@@ -7158,7 +7158,7 @@
                                     </p:set>
                                     <p:animEffect transition="in" filter="fade">
                                       <p:cBhvr>
-                                        <p:cTn id="19" dur="600"/>
+                                        <p:cTn id="19" dur="759"/>
                                         <p:tgtEl>
                                           <p:spTgt spid="12"/>
                                         </p:tgtEl>
@@ -7166,7 +7166,7 @@
                                     </p:animEffect>
                                     <p:animScale>
                                       <p:cBhvr>
-                                        <p:cTn id="20" dur="600" fill="hold"/>
+                                        <p:cTn id="20" dur="759" fill="hold" decel="60000"/>
                                         <p:tgtEl>
                                           <p:spTgt spid="12"/>
                                         </p:tgtEl>
@@ -7180,7 +7180,7 @@
                               <p:par>
                                 <p:cTn id="21" presetID="10" presetClass="entr" presetSubtype="0" fill="hold" grpId="0" nodeType="withEffect">
                                   <p:stCondLst>
-                                    <p:cond delay="400"/>
+                                    <p:cond delay="200"/>
                                   </p:stCondLst>
                                   <p:childTnLst>
                                     <p:set>
@@ -7203,7 +7203,7 @@
                                     </p:set>
                                     <p:animEffect transition="in" filter="fade">
                                       <p:cBhvr>
-                                        <p:cTn id="23" dur="600"/>
+                                        <p:cTn id="23" dur="558"/>
                                         <p:tgtEl>
                                           <p:spTgt spid="4"/>
                                         </p:tgtEl>
@@ -7211,7 +7211,7 @@
                                     </p:animEffect>
                                     <p:anim calcmode="lin" valueType="num">
                                       <p:cBhvr additive="base">
-                                        <p:cTn id="24" dur="600" fill="hold"/>
+                                        <p:cTn id="24" dur="558" fill="hold" decel="80000"/>
                                         <p:tgtEl>
                                           <p:spTgt spid="4"/>
                                         </p:tgtEl>
@@ -7238,7 +7238,7 @@
                               <p:par>
                                 <p:cTn id="25" presetID="10" presetClass="entr" presetSubtype="0" fill="hold" grpId="0" nodeType="withEffect">
                                   <p:stCondLst>
-                                    <p:cond delay="500"/>
+                                    <p:cond delay="240"/>
                                   </p:stCondLst>
                                   <p:childTnLst>
                                     <p:set>
@@ -7261,7 +7261,7 @@
                                     </p:set>
                                     <p:animEffect transition="in" filter="fade">
                                       <p:cBhvr>
-                                        <p:cTn id="27" dur="600"/>
+                                        <p:cTn id="27" dur="558"/>
                                         <p:tgtEl>
                                           <p:spTgt spid="7"/>
                                         </p:tgtEl>
@@ -7269,7 +7269,7 @@
                                     </p:animEffect>
                                     <p:anim calcmode="lin" valueType="num">
                                       <p:cBhvr additive="base">
-                                        <p:cTn id="28" dur="600" fill="hold"/>
+                                        <p:cTn id="28" dur="558" fill="hold" decel="80000"/>
                                         <p:tgtEl>
                                           <p:spTgt spid="7"/>
                                         </p:tgtEl>
@@ -7296,7 +7296,7 @@
                               <p:par>
                                 <p:cTn id="29" presetID="10" presetClass="entr" presetSubtype="0" fill="hold" grpId="0" nodeType="withEffect">
                                   <p:stCondLst>
-                                    <p:cond delay="600"/>
+                                    <p:cond delay="280"/>
                                   </p:stCondLst>
                                   <p:childTnLst>
                                     <p:set>
@@ -7319,7 +7319,7 @@
                                     </p:set>
                                     <p:animEffect transition="in" filter="fade">
                                       <p:cBhvr>
-                                        <p:cTn id="31" dur="600"/>
+                                        <p:cTn id="31" dur="558"/>
                                         <p:tgtEl>
                                           <p:spTgt spid="10"/>
                                         </p:tgtEl>
@@ -7327,7 +7327,7 @@
                                     </p:animEffect>
                                     <p:anim calcmode="lin" valueType="num">
                                       <p:cBhvr additive="base">
-                                        <p:cTn id="32" dur="600" fill="hold"/>
+                                        <p:cTn id="32" dur="558" fill="hold" decel="80000"/>
                                         <p:tgtEl>
                                           <p:spTgt spid="10"/>
                                         </p:tgtEl>
@@ -7354,7 +7354,7 @@
                               <p:par>
                                 <p:cTn id="33" presetID="10" presetClass="entr" presetSubtype="0" fill="hold" grpId="0" nodeType="withEffect">
                                   <p:stCondLst>
-                                    <p:cond delay="700"/>
+                                    <p:cond delay="320"/>
                                   </p:stCondLst>
                                   <p:childTnLst>
                                     <p:set>
@@ -7377,7 +7377,7 @@
                                     </p:set>
                                     <p:animEffect transition="in" filter="fade">
                                       <p:cBhvr>
-                                        <p:cTn id="35" dur="600"/>
+                                        <p:cTn id="35" dur="558"/>
                                         <p:tgtEl>
                                           <p:spTgt spid="13"/>
                                         </p:tgtEl>
@@ -7385,7 +7385,7 @@
                                     </p:animEffect>
                                     <p:anim calcmode="lin" valueType="num">
                                       <p:cBhvr additive="base">
-                                        <p:cTn id="36" dur="600" fill="hold"/>
+                                        <p:cTn id="36" dur="558" fill="hold" decel="80000"/>
                                         <p:tgtEl>
                                           <p:spTgt spid="13"/>
                                         </p:tgtEl>
@@ -7412,7 +7412,7 @@
                               <p:par>
                                 <p:cTn id="37" presetID="10" presetClass="entr" presetSubtype="0" fill="hold" grpId="0" nodeType="withEffect">
                                   <p:stCondLst>
-                                    <p:cond delay="800"/>
+                                    <p:cond delay="400"/>
                                   </p:stCondLst>
                                   <p:childTnLst>
                                     <p:set>
@@ -7435,7 +7435,7 @@
                                     </p:set>
                                     <p:animEffect transition="in" filter="fade">
                                       <p:cBhvr>
-                                        <p:cTn id="39" dur="600"/>
+                                        <p:cTn id="39" dur="586"/>
                                         <p:tgtEl>
                                           <p:spTgt spid="5"/>
                                         </p:tgtEl>
@@ -7443,7 +7443,7 @@
                                     </p:animEffect>
                                     <p:anim calcmode="lin" valueType="num">
                                       <p:cBhvr additive="base">
-                                        <p:cTn id="40" dur="600" fill="hold"/>
+                                        <p:cTn id="40" dur="586" fill="hold" decel="80000"/>
                                         <p:tgtEl>
                                           <p:spTgt spid="5"/>
                                         </p:tgtEl>
@@ -7470,7 +7470,7 @@
                               <p:par>
                                 <p:cTn id="41" presetID="10" presetClass="entr" presetSubtype="0" fill="hold" grpId="0" nodeType="withEffect">
                                   <p:stCondLst>
-                                    <p:cond delay="900"/>
+                                    <p:cond delay="440"/>
                                   </p:stCondLst>
                                   <p:childTnLst>
                                     <p:set>
@@ -7493,7 +7493,7 @@
                                     </p:set>
                                     <p:animEffect transition="in" filter="fade">
                                       <p:cBhvr>
-                                        <p:cTn id="43" dur="600"/>
+                                        <p:cTn id="43" dur="586"/>
                                         <p:tgtEl>
                                           <p:spTgt spid="8"/>
                                         </p:tgtEl>
@@ -7501,7 +7501,7 @@
                                     </p:animEffect>
                                     <p:anim calcmode="lin" valueType="num">
                                       <p:cBhvr additive="base">
-                                        <p:cTn id="44" dur="600" fill="hold"/>
+                                        <p:cTn id="44" dur="586" fill="hold" decel="80000"/>
                                         <p:tgtEl>
                                           <p:spTgt spid="8"/>
                                         </p:tgtEl>
@@ -7528,7 +7528,7 @@
                               <p:par>
                                 <p:cTn id="45" presetID="10" presetClass="entr" presetSubtype="0" fill="hold" grpId="0" nodeType="withEffect">
                                   <p:stCondLst>
-                                    <p:cond delay="1000"/>
+                                    <p:cond delay="480"/>
                                   </p:stCondLst>
                                   <p:childTnLst>
                                     <p:set>
@@ -7551,7 +7551,7 @@
                                     </p:set>
                                     <p:animEffect transition="in" filter="fade">
                                       <p:cBhvr>
-                                        <p:cTn id="47" dur="600"/>
+                                        <p:cTn id="47" dur="586"/>
                                         <p:tgtEl>
                                           <p:spTgt spid="11"/>
                                         </p:tgtEl>
@@ -7559,7 +7559,7 @@
                                     </p:animEffect>
                                     <p:anim calcmode="lin" valueType="num">
                                       <p:cBhvr additive="base">
-                                        <p:cTn id="48" dur="600" fill="hold"/>
+                                        <p:cTn id="48" dur="586" fill="hold" decel="80000"/>
                                         <p:tgtEl>
                                           <p:spTgt spid="11"/>
                                         </p:tgtEl>
@@ -7586,7 +7586,7 @@
                               <p:par>
                                 <p:cTn id="49" presetID="10" presetClass="entr" presetSubtype="0" fill="hold" grpId="0" nodeType="withEffect">
                                   <p:stCondLst>
-                                    <p:cond delay="1100"/>
+                                    <p:cond delay="520"/>
                                   </p:stCondLst>
                                   <p:childTnLst>
                                     <p:set>
@@ -7609,7 +7609,7 @@
                                     </p:set>
                                     <p:animEffect transition="in" filter="fade">
                                       <p:cBhvr>
-                                        <p:cTn id="51" dur="600"/>
+                                        <p:cTn id="51" dur="586"/>
                                         <p:tgtEl>
                                           <p:spTgt spid="14"/>
                                         </p:tgtEl>
@@ -7617,7 +7617,7 @@
                                     </p:animEffect>
                                     <p:anim calcmode="lin" valueType="num">
                                       <p:cBhvr additive="base">
-                                        <p:cTn id="52" dur="600" fill="hold"/>
+                                        <p:cTn id="52" dur="586" fill="hold" decel="80000"/>
                                         <p:tgtEl>
                                           <p:spTgt spid="14"/>
                                         </p:tgtEl>
@@ -7644,7 +7644,7 @@
                               <p:par>
                                 <p:cTn id="53" presetID="10" presetClass="entr" presetSubtype="0" fill="hold" grpId="0" nodeType="withEffect">
                                   <p:stCondLst>
-                                    <p:cond delay="1200"/>
+                                    <p:cond delay="600"/>
                                   </p:stCondLst>
                                   <p:childTnLst>
                                     <p:set>
@@ -7667,7 +7667,7 @@
                                     </p:set>
                                     <p:animEffect transition="in" filter="fade">
                                       <p:cBhvr>
-                                        <p:cTn id="55" dur="600"/>
+                                        <p:cTn id="55" dur="577"/>
                                         <p:tgtEl>
                                           <p:spTgt spid="2"/>
                                         </p:tgtEl>
@@ -7675,7 +7675,7 @@
                                     </p:animEffect>
                                     <p:anim calcmode="lin" valueType="num">
                                       <p:cBhvr additive="base">
-                                        <p:cTn id="56" dur="600" fill="hold"/>
+                                        <p:cTn id="56" dur="577" fill="hold" decel="80000"/>
                                         <p:tgtEl>
                                           <p:spTgt spid="2"/>
                                         </p:tgtEl>
